--- a/ranking-uji-route.pptx
+++ b/ranking-uji-route.pptx
@@ -1105,85 +1105,58 @@
       </p:sp>
       <p:sp>
         <p:nvSpPr>
-          <p:cNvPr id="4" name="Text 2"/>
-          <p:cNvSpPr/>
-          <p:nvPr/>
-        </p:nvSpPr>
-        <p:spPr>
-          <a:xfrm>
-            <a:off x="320040" y="146304"/>
-            <a:ext cx="1828800" cy="274320"/>
-          </a:xfrm>
-          <a:prstGeom prst="rect">
-            <a:avLst/>
-          </a:prstGeom>
-          <a:noFill/>
-          <a:ln/>
-        </p:spPr>
-        <p:txBody>
-          <a:bodyPr wrap="square" rtlCol="0" anchor="ctr"/>
-          <a:lstStyle/>
-          <a:p>
-            <a:pPr indent="0" marL="0">
-              <a:buNone/>
-            </a:pPr>
-            <a:r>
-              <a:rPr lang="en-US" sz="1300" b="1" dirty="0">
-                <a:solidFill>
-                  <a:srgbClr val="FFFFFF"/>
-                </a:solidFill>
-                <a:latin typeface="Arial" pitchFamily="34" charset="0"/>
-                <a:ea typeface="Arial" pitchFamily="34" charset="-122"/>
-                <a:cs typeface="Arial" pitchFamily="34" charset="-120"/>
-              </a:rPr>
-              <a:t>Danantara</a:t>
-            </a:r>
-            <a:endParaRPr lang="en-US" sz="1300" dirty="0"/>
-          </a:p>
-        </p:txBody>
-      </p:sp>
-      <p:sp>
-        <p:nvSpPr>
-          <p:cNvPr id="5" name="Text 3"/>
-          <p:cNvSpPr/>
-          <p:nvPr/>
-        </p:nvSpPr>
-        <p:spPr>
-          <a:xfrm>
-            <a:off x="320040" y="384048"/>
-            <a:ext cx="1828800" cy="274320"/>
-          </a:xfrm>
-          <a:prstGeom prst="rect">
-            <a:avLst/>
-          </a:prstGeom>
-          <a:noFill/>
-          <a:ln/>
-        </p:spPr>
-        <p:txBody>
-          <a:bodyPr wrap="square" rtlCol="0" anchor="ctr"/>
-          <a:lstStyle/>
-          <a:p>
-            <a:pPr indent="0" marL="0">
-              <a:buNone/>
-            </a:pPr>
-            <a:r>
-              <a:rPr lang="en-US" sz="1300" b="1" dirty="0">
-                <a:solidFill>
-                  <a:srgbClr val="FFFFFF"/>
-                </a:solidFill>
-                <a:latin typeface="Arial" pitchFamily="34" charset="0"/>
-                <a:ea typeface="Arial" pitchFamily="34" charset="-122"/>
-                <a:cs typeface="Arial" pitchFamily="34" charset="-120"/>
-              </a:rPr>
-              <a:t>Indonesia</a:t>
-            </a:r>
-            <a:endParaRPr lang="en-US" sz="1300" dirty="0"/>
-          </a:p>
-        </p:txBody>
-      </p:sp>
-      <p:sp>
-        <p:nvSpPr>
-          <p:cNvPr id="6" name="Text 4"/>
+          <p:cNvPr id="4" name="Shape 2"/>
+          <p:cNvSpPr/>
+          <p:nvPr/>
+        </p:nvSpPr>
+        <p:spPr>
+          <a:xfrm>
+            <a:off x="274320" y="201168"/>
+            <a:ext cx="713232" cy="713232"/>
+          </a:xfrm>
+          <a:prstGeom prst="roundRect">
+            <a:avLst>
+              <a:gd name="adj" fmla="val 15385"/>
+            </a:avLst>
+          </a:prstGeom>
+          <a:solidFill>
+            <a:srgbClr val="FFFFFF"/>
+          </a:solidFill>
+          <a:ln w="12700">
+            <a:solidFill>
+              <a:srgbClr val="FFFFFF"/>
+            </a:solidFill>
+            <a:prstDash val="solid"/>
+          </a:ln>
+        </p:spPr>
+      </p:sp>
+      <p:pic>
+        <p:nvPicPr>
+          <p:cNvPr id="5" name="Image 0" descr="preencoded.png">    </p:cNvPr>
+          <p:cNvPicPr>
+            <a:picLocks noChangeAspect="1"/>
+          </p:cNvPicPr>
+          <p:nvPr/>
+        </p:nvPicPr>
+        <p:blipFill>
+          <a:blip r:embed="rId1"/>
+          <a:stretch>
+            <a:fillRect/>
+          </a:stretch>
+        </p:blipFill>
+        <p:spPr>
+          <a:xfrm>
+            <a:off x="310896" y="237744"/>
+            <a:ext cx="640080" cy="640080"/>
+          </a:xfrm>
+          <a:prstGeom prst="rect">
+            <a:avLst/>
+          </a:prstGeom>
+        </p:spPr>
+      </p:pic>
+      <p:sp>
+        <p:nvSpPr>
+          <p:cNvPr id="6" name="Text 3"/>
           <p:cNvSpPr/>
           <p:nvPr/>
         </p:nvSpPr>
@@ -1222,7 +1195,7 @@
       </p:sp>
       <p:sp>
         <p:nvSpPr>
-          <p:cNvPr id="7" name="Text 5"/>
+          <p:cNvPr id="7" name="Text 4"/>
           <p:cNvSpPr/>
           <p:nvPr/>
         </p:nvSpPr>
@@ -1261,7 +1234,7 @@
       </p:sp>
       <p:sp>
         <p:nvSpPr>
-          <p:cNvPr id="8" name="Text 6"/>
+          <p:cNvPr id="8" name="Text 5"/>
           <p:cNvSpPr/>
           <p:nvPr/>
         </p:nvSpPr>
@@ -1300,7 +1273,7 @@
       </p:sp>
       <p:sp>
         <p:nvSpPr>
-          <p:cNvPr id="9" name="Text 7"/>
+          <p:cNvPr id="9" name="Text 6"/>
           <p:cNvSpPr/>
           <p:nvPr/>
         </p:nvSpPr>
@@ -1339,7 +1312,7 @@
       </p:sp>
       <p:sp>
         <p:nvSpPr>
-          <p:cNvPr id="10" name="Text 8"/>
+          <p:cNvPr id="10" name="Text 7"/>
           <p:cNvSpPr/>
           <p:nvPr/>
         </p:nvSpPr>
@@ -1378,7 +1351,7 @@
       </p:sp>
       <p:sp>
         <p:nvSpPr>
-          <p:cNvPr id="11" name="Text 9"/>
+          <p:cNvPr id="11" name="Text 8"/>
           <p:cNvSpPr/>
           <p:nvPr/>
         </p:nvSpPr>
@@ -1417,7 +1390,7 @@
       </p:sp>
       <p:sp>
         <p:nvSpPr>
-          <p:cNvPr id="12" name="Text 10"/>
+          <p:cNvPr id="12" name="Text 9"/>
           <p:cNvSpPr/>
           <p:nvPr/>
         </p:nvSpPr>
@@ -1456,7 +1429,7 @@
       </p:sp>
       <p:sp>
         <p:nvSpPr>
-          <p:cNvPr id="13" name="Text 11"/>
+          <p:cNvPr id="13" name="Text 10"/>
           <p:cNvSpPr/>
           <p:nvPr/>
         </p:nvSpPr>
@@ -1495,7 +1468,7 @@
       </p:sp>
       <p:sp>
         <p:nvSpPr>
-          <p:cNvPr id="14" name="Text 12"/>
+          <p:cNvPr id="14" name="Text 11"/>
           <p:cNvSpPr/>
           <p:nvPr/>
         </p:nvSpPr>
@@ -1534,7 +1507,7 @@
       </p:sp>
       <p:sp>
         <p:nvSpPr>
-          <p:cNvPr id="15" name="Text 13"/>
+          <p:cNvPr id="15" name="Text 12"/>
           <p:cNvSpPr/>
           <p:nvPr/>
         </p:nvSpPr>
@@ -1573,7 +1546,7 @@
       </p:sp>
       <p:sp>
         <p:nvSpPr>
-          <p:cNvPr id="16" name="Text 14"/>
+          <p:cNvPr id="16" name="Text 13"/>
           <p:cNvSpPr/>
           <p:nvPr/>
         </p:nvSpPr>
@@ -1612,7 +1585,7 @@
       </p:sp>
       <p:sp>
         <p:nvSpPr>
-          <p:cNvPr id="17" name="Text 15"/>
+          <p:cNvPr id="17" name="Text 14"/>
           <p:cNvSpPr/>
           <p:nvPr/>
         </p:nvSpPr>
@@ -1651,7 +1624,7 @@
       </p:sp>
       <p:sp>
         <p:nvSpPr>
-          <p:cNvPr id="18" name="Text 16"/>
+          <p:cNvPr id="18" name="Text 15"/>
           <p:cNvSpPr/>
           <p:nvPr/>
         </p:nvSpPr>
@@ -1772,278 +1745,19 @@
       </p:sp>
       <p:sp>
         <p:nvSpPr>
-          <p:cNvPr id="4" name="Text 2"/>
-          <p:cNvSpPr/>
-          <p:nvPr/>
-        </p:nvSpPr>
-        <p:spPr>
-          <a:xfrm>
-            <a:off x="320040" y="146304"/>
-            <a:ext cx="1828800" cy="274320"/>
-          </a:xfrm>
-          <a:prstGeom prst="rect">
-            <a:avLst/>
-          </a:prstGeom>
-          <a:noFill/>
-          <a:ln/>
-        </p:spPr>
-        <p:txBody>
-          <a:bodyPr wrap="square" rtlCol="0" anchor="ctr"/>
-          <a:lstStyle/>
-          <a:p>
-            <a:pPr indent="0" marL="0">
-              <a:buNone/>
-            </a:pPr>
-            <a:r>
-              <a:rPr lang="en-US" sz="1300" b="1" dirty="0">
-                <a:solidFill>
-                  <a:srgbClr val="FFFFFF"/>
-                </a:solidFill>
-                <a:latin typeface="Arial" pitchFamily="34" charset="0"/>
-                <a:ea typeface="Arial" pitchFamily="34" charset="-122"/>
-                <a:cs typeface="Arial" pitchFamily="34" charset="-120"/>
-              </a:rPr>
-              <a:t>Danantara</a:t>
-            </a:r>
-            <a:endParaRPr lang="en-US" sz="1300" dirty="0"/>
-          </a:p>
-        </p:txBody>
-      </p:sp>
-      <p:sp>
-        <p:nvSpPr>
-          <p:cNvPr id="5" name="Text 3"/>
-          <p:cNvSpPr/>
-          <p:nvPr/>
-        </p:nvSpPr>
-        <p:spPr>
-          <a:xfrm>
-            <a:off x="320040" y="384048"/>
-            <a:ext cx="1828800" cy="274320"/>
-          </a:xfrm>
-          <a:prstGeom prst="rect">
-            <a:avLst/>
-          </a:prstGeom>
-          <a:noFill/>
-          <a:ln/>
-        </p:spPr>
-        <p:txBody>
-          <a:bodyPr wrap="square" rtlCol="0" anchor="ctr"/>
-          <a:lstStyle/>
-          <a:p>
-            <a:pPr indent="0" marL="0">
-              <a:buNone/>
-            </a:pPr>
-            <a:r>
-              <a:rPr lang="en-US" sz="1300" b="1" dirty="0">
-                <a:solidFill>
-                  <a:srgbClr val="FFFFFF"/>
-                </a:solidFill>
-                <a:latin typeface="Arial" pitchFamily="34" charset="0"/>
-                <a:ea typeface="Arial" pitchFamily="34" charset="-122"/>
-                <a:cs typeface="Arial" pitchFamily="34" charset="-120"/>
-              </a:rPr>
-              <a:t>Indonesia</a:t>
-            </a:r>
-            <a:endParaRPr lang="en-US" sz="1300" dirty="0"/>
-          </a:p>
-        </p:txBody>
-      </p:sp>
-      <p:sp>
-        <p:nvSpPr>
-          <p:cNvPr id="6" name="Text 4"/>
-          <p:cNvSpPr/>
-          <p:nvPr/>
-        </p:nvSpPr>
-        <p:spPr>
-          <a:xfrm>
-            <a:off x="10820095" y="201168"/>
-            <a:ext cx="1051560" cy="502920"/>
-          </a:xfrm>
-          <a:prstGeom prst="rect">
-            <a:avLst/>
-          </a:prstGeom>
-          <a:noFill/>
-          <a:ln/>
-        </p:spPr>
-        <p:txBody>
-          <a:bodyPr wrap="square" rtlCol="0" anchor="ctr"/>
-          <a:lstStyle/>
-          <a:p>
-            <a:pPr algn="r" indent="0" marL="0">
-              <a:buNone/>
-            </a:pPr>
-            <a:r>
-              <a:rPr lang="en-US" sz="3400" b="1" dirty="0">
-                <a:solidFill>
-                  <a:srgbClr val="FFFFFF"/>
-                </a:solidFill>
-                <a:latin typeface="Arial" pitchFamily="34" charset="0"/>
-                <a:ea typeface="Arial" pitchFamily="34" charset="-122"/>
-                <a:cs typeface="Arial" pitchFamily="34" charset="-120"/>
-              </a:rPr>
-              <a:t>btn</a:t>
-            </a:r>
-            <a:endParaRPr lang="en-US" sz="3400" dirty="0"/>
-          </a:p>
-        </p:txBody>
-      </p:sp>
-      <p:sp>
-        <p:nvSpPr>
-          <p:cNvPr id="7" name="Text 5"/>
-          <p:cNvSpPr/>
-          <p:nvPr/>
-        </p:nvSpPr>
-        <p:spPr>
-          <a:xfrm>
-            <a:off x="0" y="237744"/>
-            <a:ext cx="12191695" cy="685800"/>
-          </a:xfrm>
-          <a:prstGeom prst="rect">
-            <a:avLst/>
-          </a:prstGeom>
-          <a:noFill/>
-          <a:ln/>
-        </p:spPr>
-        <p:txBody>
-          <a:bodyPr wrap="square" rtlCol="0" anchor="ctr"/>
-          <a:lstStyle/>
-          <a:p>
-            <a:pPr algn="ctr" indent="0" marL="0">
-              <a:buNone/>
-            </a:pPr>
-            <a:r>
-              <a:rPr lang="en-US" sz="3400" b="1" dirty="0">
-                <a:solidFill>
-                  <a:srgbClr val="FFFFFF"/>
-                </a:solidFill>
-                <a:latin typeface="Arial" pitchFamily="34" charset="0"/>
-                <a:ea typeface="Arial" pitchFamily="34" charset="-122"/>
-                <a:cs typeface="Arial" pitchFamily="34" charset="-120"/>
-              </a:rPr>
-              <a:t>Service Drill Ranking</a:t>
-            </a:r>
-            <a:endParaRPr lang="en-US" sz="3400" dirty="0"/>
-          </a:p>
-        </p:txBody>
-      </p:sp>
-      <p:sp>
-        <p:nvSpPr>
-          <p:cNvPr id="8" name="Shape 6"/>
-          <p:cNvSpPr/>
-          <p:nvPr/>
-        </p:nvSpPr>
-        <p:spPr>
-          <a:xfrm>
-            <a:off x="4358488" y="1051560"/>
-            <a:ext cx="3474720" cy="457200"/>
+          <p:cNvPr id="4" name="Shape 2"/>
+          <p:cNvSpPr/>
+          <p:nvPr/>
+        </p:nvSpPr>
+        <p:spPr>
+          <a:xfrm>
+            <a:off x="274320" y="201168"/>
+            <a:ext cx="713232" cy="713232"/>
           </a:xfrm>
           <a:prstGeom prst="roundRect">
             <a:avLst>
-              <a:gd name="adj" fmla="val 50000"/>
+              <a:gd name="adj" fmla="val 15385"/>
             </a:avLst>
-          </a:prstGeom>
-          <a:solidFill>
-            <a:srgbClr val="2E5CD6"/>
-          </a:solidFill>
-          <a:ln w="12700">
-            <a:solidFill>
-              <a:srgbClr val="2E5CD6"/>
-            </a:solidFill>
-            <a:prstDash val="solid"/>
-          </a:ln>
-        </p:spPr>
-      </p:sp>
-      <p:sp>
-        <p:nvSpPr>
-          <p:cNvPr id="9" name="Text 7"/>
-          <p:cNvSpPr/>
-          <p:nvPr/>
-        </p:nvSpPr>
-        <p:spPr>
-          <a:xfrm>
-            <a:off x="4358488" y="1051560"/>
-            <a:ext cx="3474720" cy="457200"/>
-          </a:xfrm>
-          <a:prstGeom prst="rect">
-            <a:avLst/>
-          </a:prstGeom>
-          <a:noFill/>
-          <a:ln/>
-        </p:spPr>
-        <p:txBody>
-          <a:bodyPr wrap="square" rtlCol="0" anchor="ctr"/>
-          <a:lstStyle/>
-          <a:p>
-            <a:pPr algn="ctr" indent="0" marL="0">
-              <a:buNone/>
-            </a:pPr>
-            <a:r>
-              <a:rPr lang="en-US" sz="1700" dirty="0">
-                <a:solidFill>
-                  <a:srgbClr val="FFFFFF"/>
-                </a:solidFill>
-                <a:latin typeface="Arial" pitchFamily="34" charset="0"/>
-                <a:ea typeface="Arial" pitchFamily="34" charset="-122"/>
-                <a:cs typeface="Arial" pitchFamily="34" charset="-120"/>
-              </a:rPr>
-              <a:t>RO-SMP KANWIL SULAMPUA</a:t>
-            </a:r>
-            <a:endParaRPr lang="en-US" sz="1700" dirty="0"/>
-          </a:p>
-        </p:txBody>
-      </p:sp>
-      <p:sp>
-        <p:nvSpPr>
-          <p:cNvPr id="10" name="Text 8"/>
-          <p:cNvSpPr/>
-          <p:nvPr/>
-        </p:nvSpPr>
-        <p:spPr>
-          <a:xfrm>
-            <a:off x="0" y="1536192"/>
-            <a:ext cx="12191695" cy="320040"/>
-          </a:xfrm>
-          <a:prstGeom prst="rect">
-            <a:avLst/>
-          </a:prstGeom>
-          <a:noFill/>
-          <a:ln/>
-        </p:spPr>
-        <p:txBody>
-          <a:bodyPr wrap="square" rtlCol="0" anchor="ctr"/>
-          <a:lstStyle/>
-          <a:p>
-            <a:pPr algn="ctr" indent="0" marL="0">
-              <a:buNone/>
-            </a:pPr>
-            <a:r>
-              <a:rPr lang="en-US" sz="1500" dirty="0">
-                <a:solidFill>
-                  <a:srgbClr val="FFFFFF"/>
-                </a:solidFill>
-                <a:latin typeface="Arial" pitchFamily="34" charset="0"/>
-                <a:ea typeface="Arial" pitchFamily="34" charset="-122"/>
-                <a:cs typeface="Arial" pitchFamily="34" charset="-120"/>
-              </a:rPr>
-              <a:t>Customer Service</a:t>
-            </a:r>
-            <a:endParaRPr lang="en-US" sz="1500" dirty="0"/>
-          </a:p>
-        </p:txBody>
-      </p:sp>
-      <p:sp>
-        <p:nvSpPr>
-          <p:cNvPr id="11" name="Shape 9"/>
-          <p:cNvSpPr/>
-          <p:nvPr/>
-        </p:nvSpPr>
-        <p:spPr>
-          <a:xfrm>
-            <a:off x="2798064" y="2011680"/>
-            <a:ext cx="13716" cy="758952"/>
-          </a:xfrm>
-          <a:prstGeom prst="rect">
-            <a:avLst/>
           </a:prstGeom>
           <a:solidFill>
             <a:srgbClr val="FFFFFF"/>
@@ -2056,36 +1770,9 @@
           </a:ln>
         </p:spPr>
       </p:sp>
-      <p:sp>
-        <p:nvSpPr>
-          <p:cNvPr id="12" name="Shape 10"/>
-          <p:cNvSpPr/>
-          <p:nvPr/>
-        </p:nvSpPr>
-        <p:spPr>
-          <a:xfrm>
-            <a:off x="621792" y="2029968"/>
-            <a:ext cx="731520" cy="731520"/>
-          </a:xfrm>
-          <a:prstGeom prst="roundRect">
-            <a:avLst>
-              <a:gd name="adj" fmla="val 6250"/>
-            </a:avLst>
-          </a:prstGeom>
-          <a:solidFill>
-            <a:srgbClr val="FFFFFF"/>
-          </a:solidFill>
-          <a:ln w="12700">
-            <a:solidFill>
-              <a:srgbClr val="FFFFFF"/>
-            </a:solidFill>
-            <a:prstDash val="solid"/>
-          </a:ln>
-        </p:spPr>
-      </p:sp>
       <p:pic>
         <p:nvPicPr>
-          <p:cNvPr id="13" name="Image 0" descr="preencoded.png">    </p:cNvPr>
+          <p:cNvPr id="5" name="Image 0" descr="preencoded.png">    </p:cNvPr>
           <p:cNvPicPr>
             <a:picLocks noChangeAspect="1"/>
           </p:cNvPicPr>
@@ -2099,6 +1786,265 @@
         </p:blipFill>
         <p:spPr>
           <a:xfrm>
+            <a:off x="310896" y="237744"/>
+            <a:ext cx="640080" cy="640080"/>
+          </a:xfrm>
+          <a:prstGeom prst="rect">
+            <a:avLst/>
+          </a:prstGeom>
+        </p:spPr>
+      </p:pic>
+      <p:sp>
+        <p:nvSpPr>
+          <p:cNvPr id="6" name="Text 3"/>
+          <p:cNvSpPr/>
+          <p:nvPr/>
+        </p:nvSpPr>
+        <p:spPr>
+          <a:xfrm>
+            <a:off x="10820095" y="201168"/>
+            <a:ext cx="1051560" cy="502920"/>
+          </a:xfrm>
+          <a:prstGeom prst="rect">
+            <a:avLst/>
+          </a:prstGeom>
+          <a:noFill/>
+          <a:ln/>
+        </p:spPr>
+        <p:txBody>
+          <a:bodyPr wrap="square" rtlCol="0" anchor="ctr"/>
+          <a:lstStyle/>
+          <a:p>
+            <a:pPr algn="r" indent="0" marL="0">
+              <a:buNone/>
+            </a:pPr>
+            <a:r>
+              <a:rPr lang="en-US" sz="3400" b="1" dirty="0">
+                <a:solidFill>
+                  <a:srgbClr val="FFFFFF"/>
+                </a:solidFill>
+                <a:latin typeface="Arial" pitchFamily="34" charset="0"/>
+                <a:ea typeface="Arial" pitchFamily="34" charset="-122"/>
+                <a:cs typeface="Arial" pitchFamily="34" charset="-120"/>
+              </a:rPr>
+              <a:t>btn</a:t>
+            </a:r>
+            <a:endParaRPr lang="en-US" sz="3400" dirty="0"/>
+          </a:p>
+        </p:txBody>
+      </p:sp>
+      <p:sp>
+        <p:nvSpPr>
+          <p:cNvPr id="7" name="Text 4"/>
+          <p:cNvSpPr/>
+          <p:nvPr/>
+        </p:nvSpPr>
+        <p:spPr>
+          <a:xfrm>
+            <a:off x="0" y="237744"/>
+            <a:ext cx="12191695" cy="685800"/>
+          </a:xfrm>
+          <a:prstGeom prst="rect">
+            <a:avLst/>
+          </a:prstGeom>
+          <a:noFill/>
+          <a:ln/>
+        </p:spPr>
+        <p:txBody>
+          <a:bodyPr wrap="square" rtlCol="0" anchor="ctr"/>
+          <a:lstStyle/>
+          <a:p>
+            <a:pPr algn="ctr" indent="0" marL="0">
+              <a:buNone/>
+            </a:pPr>
+            <a:r>
+              <a:rPr lang="en-US" sz="3400" b="1" dirty="0">
+                <a:solidFill>
+                  <a:srgbClr val="FFFFFF"/>
+                </a:solidFill>
+                <a:latin typeface="Arial" pitchFamily="34" charset="0"/>
+                <a:ea typeface="Arial" pitchFamily="34" charset="-122"/>
+                <a:cs typeface="Arial" pitchFamily="34" charset="-120"/>
+              </a:rPr>
+              <a:t>Service Drill Ranking</a:t>
+            </a:r>
+            <a:endParaRPr lang="en-US" sz="3400" dirty="0"/>
+          </a:p>
+        </p:txBody>
+      </p:sp>
+      <p:sp>
+        <p:nvSpPr>
+          <p:cNvPr id="8" name="Shape 5"/>
+          <p:cNvSpPr/>
+          <p:nvPr/>
+        </p:nvSpPr>
+        <p:spPr>
+          <a:xfrm>
+            <a:off x="4358488" y="1051560"/>
+            <a:ext cx="3474720" cy="457200"/>
+          </a:xfrm>
+          <a:prstGeom prst="roundRect">
+            <a:avLst>
+              <a:gd name="adj" fmla="val 50000"/>
+            </a:avLst>
+          </a:prstGeom>
+          <a:solidFill>
+            <a:srgbClr val="2E5CD6"/>
+          </a:solidFill>
+          <a:ln w="12700">
+            <a:solidFill>
+              <a:srgbClr val="2E5CD6"/>
+            </a:solidFill>
+            <a:prstDash val="solid"/>
+          </a:ln>
+        </p:spPr>
+      </p:sp>
+      <p:sp>
+        <p:nvSpPr>
+          <p:cNvPr id="9" name="Text 6"/>
+          <p:cNvSpPr/>
+          <p:nvPr/>
+        </p:nvSpPr>
+        <p:spPr>
+          <a:xfrm>
+            <a:off x="4358488" y="1051560"/>
+            <a:ext cx="3474720" cy="457200"/>
+          </a:xfrm>
+          <a:prstGeom prst="rect">
+            <a:avLst/>
+          </a:prstGeom>
+          <a:noFill/>
+          <a:ln/>
+        </p:spPr>
+        <p:txBody>
+          <a:bodyPr wrap="square" rtlCol="0" anchor="ctr"/>
+          <a:lstStyle/>
+          <a:p>
+            <a:pPr algn="ctr" indent="0" marL="0">
+              <a:buNone/>
+            </a:pPr>
+            <a:r>
+              <a:rPr lang="en-US" sz="1700" dirty="0">
+                <a:solidFill>
+                  <a:srgbClr val="FFFFFF"/>
+                </a:solidFill>
+                <a:latin typeface="Arial" pitchFamily="34" charset="0"/>
+                <a:ea typeface="Arial" pitchFamily="34" charset="-122"/>
+                <a:cs typeface="Arial" pitchFamily="34" charset="-120"/>
+              </a:rPr>
+              <a:t>RO-SMP KANWIL SULAMPUA</a:t>
+            </a:r>
+            <a:endParaRPr lang="en-US" sz="1700" dirty="0"/>
+          </a:p>
+        </p:txBody>
+      </p:sp>
+      <p:sp>
+        <p:nvSpPr>
+          <p:cNvPr id="10" name="Text 7"/>
+          <p:cNvSpPr/>
+          <p:nvPr/>
+        </p:nvSpPr>
+        <p:spPr>
+          <a:xfrm>
+            <a:off x="0" y="1536192"/>
+            <a:ext cx="12191695" cy="320040"/>
+          </a:xfrm>
+          <a:prstGeom prst="rect">
+            <a:avLst/>
+          </a:prstGeom>
+          <a:noFill/>
+          <a:ln/>
+        </p:spPr>
+        <p:txBody>
+          <a:bodyPr wrap="square" rtlCol="0" anchor="ctr"/>
+          <a:lstStyle/>
+          <a:p>
+            <a:pPr algn="ctr" indent="0" marL="0">
+              <a:buNone/>
+            </a:pPr>
+            <a:r>
+              <a:rPr lang="en-US" sz="1500" dirty="0">
+                <a:solidFill>
+                  <a:srgbClr val="FFFFFF"/>
+                </a:solidFill>
+                <a:latin typeface="Arial" pitchFamily="34" charset="0"/>
+                <a:ea typeface="Arial" pitchFamily="34" charset="-122"/>
+                <a:cs typeface="Arial" pitchFamily="34" charset="-120"/>
+              </a:rPr>
+              <a:t>Customer Service</a:t>
+            </a:r>
+            <a:endParaRPr lang="en-US" sz="1500" dirty="0"/>
+          </a:p>
+        </p:txBody>
+      </p:sp>
+      <p:sp>
+        <p:nvSpPr>
+          <p:cNvPr id="11" name="Shape 8"/>
+          <p:cNvSpPr/>
+          <p:nvPr/>
+        </p:nvSpPr>
+        <p:spPr>
+          <a:xfrm>
+            <a:off x="2798064" y="2011680"/>
+            <a:ext cx="13716" cy="758952"/>
+          </a:xfrm>
+          <a:prstGeom prst="rect">
+            <a:avLst/>
+          </a:prstGeom>
+          <a:solidFill>
+            <a:srgbClr val="FFFFFF"/>
+          </a:solidFill>
+          <a:ln w="12700">
+            <a:solidFill>
+              <a:srgbClr val="FFFFFF"/>
+            </a:solidFill>
+            <a:prstDash val="solid"/>
+          </a:ln>
+        </p:spPr>
+      </p:sp>
+      <p:sp>
+        <p:nvSpPr>
+          <p:cNvPr id="12" name="Shape 9"/>
+          <p:cNvSpPr/>
+          <p:nvPr/>
+        </p:nvSpPr>
+        <p:spPr>
+          <a:xfrm>
+            <a:off x="621792" y="2029968"/>
+            <a:ext cx="731520" cy="731520"/>
+          </a:xfrm>
+          <a:prstGeom prst="roundRect">
+            <a:avLst>
+              <a:gd name="adj" fmla="val 6250"/>
+            </a:avLst>
+          </a:prstGeom>
+          <a:solidFill>
+            <a:srgbClr val="FFFFFF"/>
+          </a:solidFill>
+          <a:ln w="12700">
+            <a:solidFill>
+              <a:srgbClr val="FFFFFF"/>
+            </a:solidFill>
+            <a:prstDash val="solid"/>
+          </a:ln>
+        </p:spPr>
+      </p:sp>
+      <p:pic>
+        <p:nvPicPr>
+          <p:cNvPr id="13" name="Image 1" descr="preencoded.png">    </p:cNvPr>
+          <p:cNvPicPr>
+            <a:picLocks noChangeAspect="1"/>
+          </p:cNvPicPr>
+          <p:nvPr/>
+        </p:nvPicPr>
+        <p:blipFill>
+          <a:blip r:embed="rId2"/>
+          <a:stretch>
+            <a:fillRect/>
+          </a:stretch>
+        </p:blipFill>
+        <p:spPr>
+          <a:xfrm>
             <a:off x="667512" y="2075688"/>
             <a:ext cx="640080" cy="640080"/>
           </a:xfrm>
@@ -2109,7 +2055,7 @@
       </p:pic>
       <p:sp>
         <p:nvSpPr>
-          <p:cNvPr id="14" name="Text 11"/>
+          <p:cNvPr id="14" name="Text 10"/>
           <p:cNvSpPr/>
           <p:nvPr/>
         </p:nvSpPr>
@@ -2150,7 +2096,7 @@
       </p:sp>
       <p:sp>
         <p:nvSpPr>
-          <p:cNvPr id="15" name="Shape 12"/>
+          <p:cNvPr id="15" name="Shape 11"/>
           <p:cNvSpPr/>
           <p:nvPr/>
         </p:nvSpPr>
@@ -2175,7 +2121,7 @@
       </p:sp>
       <p:sp>
         <p:nvSpPr>
-          <p:cNvPr id="16" name="Text 13"/>
+          <p:cNvPr id="16" name="Text 12"/>
           <p:cNvSpPr/>
           <p:nvPr/>
         </p:nvSpPr>
@@ -2214,7 +2160,7 @@
       </p:sp>
       <p:sp>
         <p:nvSpPr>
-          <p:cNvPr id="17" name="Shape 14"/>
+          <p:cNvPr id="17" name="Shape 13"/>
           <p:cNvSpPr/>
           <p:nvPr/>
         </p:nvSpPr>
@@ -2241,7 +2187,7 @@
       </p:sp>
       <p:sp>
         <p:nvSpPr>
-          <p:cNvPr id="18" name="Text 15"/>
+          <p:cNvPr id="18" name="Text 14"/>
           <p:cNvSpPr/>
           <p:nvPr/>
         </p:nvSpPr>
@@ -2280,7 +2226,7 @@
       </p:sp>
       <p:sp>
         <p:nvSpPr>
-          <p:cNvPr id="19" name="Shape 16"/>
+          <p:cNvPr id="19" name="Shape 15"/>
           <p:cNvSpPr/>
           <p:nvPr/>
         </p:nvSpPr>
@@ -2307,7 +2253,7 @@
       </p:sp>
       <p:sp>
         <p:nvSpPr>
-          <p:cNvPr id="20" name="Text 17"/>
+          <p:cNvPr id="20" name="Text 16"/>
           <p:cNvSpPr/>
           <p:nvPr/>
         </p:nvSpPr>
@@ -2346,7 +2292,7 @@
       </p:sp>
       <p:sp>
         <p:nvSpPr>
-          <p:cNvPr id="21" name="Shape 18"/>
+          <p:cNvPr id="21" name="Shape 17"/>
           <p:cNvSpPr/>
           <p:nvPr/>
         </p:nvSpPr>
@@ -2373,7 +2319,7 @@
       </p:sp>
       <p:sp>
         <p:nvSpPr>
-          <p:cNvPr id="22" name="Shape 19"/>
+          <p:cNvPr id="22" name="Shape 18"/>
           <p:cNvSpPr/>
           <p:nvPr/>
         </p:nvSpPr>
@@ -2398,7 +2344,7 @@
       </p:sp>
       <p:sp>
         <p:nvSpPr>
-          <p:cNvPr id="23" name="Text 20"/>
+          <p:cNvPr id="23" name="Text 19"/>
           <p:cNvSpPr/>
           <p:nvPr/>
         </p:nvSpPr>
@@ -2437,7 +2383,7 @@
       </p:sp>
       <p:sp>
         <p:nvSpPr>
-          <p:cNvPr id="24" name="Text 21"/>
+          <p:cNvPr id="24" name="Text 20"/>
           <p:cNvSpPr/>
           <p:nvPr/>
         </p:nvSpPr>
@@ -2476,7 +2422,7 @@
       </p:sp>
       <p:sp>
         <p:nvSpPr>
-          <p:cNvPr id="25" name="Shape 22"/>
+          <p:cNvPr id="25" name="Shape 21"/>
           <p:cNvSpPr/>
           <p:nvPr/>
         </p:nvSpPr>
@@ -2501,7 +2447,7 @@
       </p:sp>
       <p:sp>
         <p:nvSpPr>
-          <p:cNvPr id="26" name="Text 23"/>
+          <p:cNvPr id="26" name="Text 22"/>
           <p:cNvSpPr/>
           <p:nvPr/>
         </p:nvSpPr>
@@ -2540,7 +2486,7 @@
       </p:sp>
       <p:sp>
         <p:nvSpPr>
-          <p:cNvPr id="27" name="Text 24"/>
+          <p:cNvPr id="27" name="Text 23"/>
           <p:cNvSpPr/>
           <p:nvPr/>
         </p:nvSpPr>
@@ -2579,7 +2525,7 @@
       </p:sp>
       <p:sp>
         <p:nvSpPr>
-          <p:cNvPr id="28" name="Shape 25"/>
+          <p:cNvPr id="28" name="Shape 24"/>
           <p:cNvSpPr/>
           <p:nvPr/>
         </p:nvSpPr>
@@ -2604,7 +2550,7 @@
       </p:sp>
       <p:sp>
         <p:nvSpPr>
-          <p:cNvPr id="29" name="Text 26"/>
+          <p:cNvPr id="29" name="Text 25"/>
           <p:cNvSpPr/>
           <p:nvPr/>
         </p:nvSpPr>
@@ -2643,7 +2589,7 @@
       </p:sp>
       <p:sp>
         <p:nvSpPr>
-          <p:cNvPr id="30" name="Text 27"/>
+          <p:cNvPr id="30" name="Text 26"/>
           <p:cNvSpPr/>
           <p:nvPr/>
         </p:nvSpPr>
@@ -2682,7 +2628,7 @@
       </p:sp>
       <p:sp>
         <p:nvSpPr>
-          <p:cNvPr id="31" name="Shape 28"/>
+          <p:cNvPr id="31" name="Shape 27"/>
           <p:cNvSpPr/>
           <p:nvPr/>
         </p:nvSpPr>
@@ -2707,7 +2653,7 @@
       </p:sp>
       <p:sp>
         <p:nvSpPr>
-          <p:cNvPr id="32" name="Text 29"/>
+          <p:cNvPr id="32" name="Text 28"/>
           <p:cNvSpPr/>
           <p:nvPr/>
         </p:nvSpPr>
@@ -2746,7 +2692,7 @@
       </p:sp>
       <p:sp>
         <p:nvSpPr>
-          <p:cNvPr id="33" name="Text 30"/>
+          <p:cNvPr id="33" name="Text 29"/>
           <p:cNvSpPr/>
           <p:nvPr/>
         </p:nvSpPr>
@@ -2785,7 +2731,7 @@
       </p:sp>
       <p:sp>
         <p:nvSpPr>
-          <p:cNvPr id="34" name="Shape 31"/>
+          <p:cNvPr id="34" name="Shape 30"/>
           <p:cNvSpPr/>
           <p:nvPr/>
         </p:nvSpPr>
@@ -2810,7 +2756,7 @@
       </p:sp>
       <p:sp>
         <p:nvSpPr>
-          <p:cNvPr id="35" name="Text 32"/>
+          <p:cNvPr id="35" name="Text 31"/>
           <p:cNvSpPr/>
           <p:nvPr/>
         </p:nvSpPr>
@@ -2849,7 +2795,7 @@
       </p:sp>
       <p:sp>
         <p:nvSpPr>
-          <p:cNvPr id="36" name="Text 33"/>
+          <p:cNvPr id="36" name="Text 32"/>
           <p:cNvSpPr/>
           <p:nvPr/>
         </p:nvSpPr>
@@ -2970,278 +2916,19 @@
       </p:sp>
       <p:sp>
         <p:nvSpPr>
-          <p:cNvPr id="4" name="Text 2"/>
-          <p:cNvSpPr/>
-          <p:nvPr/>
-        </p:nvSpPr>
-        <p:spPr>
-          <a:xfrm>
-            <a:off x="320040" y="146304"/>
-            <a:ext cx="1828800" cy="274320"/>
-          </a:xfrm>
-          <a:prstGeom prst="rect">
-            <a:avLst/>
-          </a:prstGeom>
-          <a:noFill/>
-          <a:ln/>
-        </p:spPr>
-        <p:txBody>
-          <a:bodyPr wrap="square" rtlCol="0" anchor="ctr"/>
-          <a:lstStyle/>
-          <a:p>
-            <a:pPr indent="0" marL="0">
-              <a:buNone/>
-            </a:pPr>
-            <a:r>
-              <a:rPr lang="en-US" sz="1300" b="1" dirty="0">
-                <a:solidFill>
-                  <a:srgbClr val="FFFFFF"/>
-                </a:solidFill>
-                <a:latin typeface="Arial" pitchFamily="34" charset="0"/>
-                <a:ea typeface="Arial" pitchFamily="34" charset="-122"/>
-                <a:cs typeface="Arial" pitchFamily="34" charset="-120"/>
-              </a:rPr>
-              <a:t>Danantara</a:t>
-            </a:r>
-            <a:endParaRPr lang="en-US" sz="1300" dirty="0"/>
-          </a:p>
-        </p:txBody>
-      </p:sp>
-      <p:sp>
-        <p:nvSpPr>
-          <p:cNvPr id="5" name="Text 3"/>
-          <p:cNvSpPr/>
-          <p:nvPr/>
-        </p:nvSpPr>
-        <p:spPr>
-          <a:xfrm>
-            <a:off x="320040" y="384048"/>
-            <a:ext cx="1828800" cy="274320"/>
-          </a:xfrm>
-          <a:prstGeom prst="rect">
-            <a:avLst/>
-          </a:prstGeom>
-          <a:noFill/>
-          <a:ln/>
-        </p:spPr>
-        <p:txBody>
-          <a:bodyPr wrap="square" rtlCol="0" anchor="ctr"/>
-          <a:lstStyle/>
-          <a:p>
-            <a:pPr indent="0" marL="0">
-              <a:buNone/>
-            </a:pPr>
-            <a:r>
-              <a:rPr lang="en-US" sz="1300" b="1" dirty="0">
-                <a:solidFill>
-                  <a:srgbClr val="FFFFFF"/>
-                </a:solidFill>
-                <a:latin typeface="Arial" pitchFamily="34" charset="0"/>
-                <a:ea typeface="Arial" pitchFamily="34" charset="-122"/>
-                <a:cs typeface="Arial" pitchFamily="34" charset="-120"/>
-              </a:rPr>
-              <a:t>Indonesia</a:t>
-            </a:r>
-            <a:endParaRPr lang="en-US" sz="1300" dirty="0"/>
-          </a:p>
-        </p:txBody>
-      </p:sp>
-      <p:sp>
-        <p:nvSpPr>
-          <p:cNvPr id="6" name="Text 4"/>
-          <p:cNvSpPr/>
-          <p:nvPr/>
-        </p:nvSpPr>
-        <p:spPr>
-          <a:xfrm>
-            <a:off x="10820095" y="201168"/>
-            <a:ext cx="1051560" cy="502920"/>
-          </a:xfrm>
-          <a:prstGeom prst="rect">
-            <a:avLst/>
-          </a:prstGeom>
-          <a:noFill/>
-          <a:ln/>
-        </p:spPr>
-        <p:txBody>
-          <a:bodyPr wrap="square" rtlCol="0" anchor="ctr"/>
-          <a:lstStyle/>
-          <a:p>
-            <a:pPr algn="r" indent="0" marL="0">
-              <a:buNone/>
-            </a:pPr>
-            <a:r>
-              <a:rPr lang="en-US" sz="3400" b="1" dirty="0">
-                <a:solidFill>
-                  <a:srgbClr val="FFFFFF"/>
-                </a:solidFill>
-                <a:latin typeface="Arial" pitchFamily="34" charset="0"/>
-                <a:ea typeface="Arial" pitchFamily="34" charset="-122"/>
-                <a:cs typeface="Arial" pitchFamily="34" charset="-120"/>
-              </a:rPr>
-              <a:t>btn</a:t>
-            </a:r>
-            <a:endParaRPr lang="en-US" sz="3400" dirty="0"/>
-          </a:p>
-        </p:txBody>
-      </p:sp>
-      <p:sp>
-        <p:nvSpPr>
-          <p:cNvPr id="7" name="Text 5"/>
-          <p:cNvSpPr/>
-          <p:nvPr/>
-        </p:nvSpPr>
-        <p:spPr>
-          <a:xfrm>
-            <a:off x="0" y="237744"/>
-            <a:ext cx="12191695" cy="685800"/>
-          </a:xfrm>
-          <a:prstGeom prst="rect">
-            <a:avLst/>
-          </a:prstGeom>
-          <a:noFill/>
-          <a:ln/>
-        </p:spPr>
-        <p:txBody>
-          <a:bodyPr wrap="square" rtlCol="0" anchor="ctr"/>
-          <a:lstStyle/>
-          <a:p>
-            <a:pPr algn="ctr" indent="0" marL="0">
-              <a:buNone/>
-            </a:pPr>
-            <a:r>
-              <a:rPr lang="en-US" sz="3400" b="1" dirty="0">
-                <a:solidFill>
-                  <a:srgbClr val="FFFFFF"/>
-                </a:solidFill>
-                <a:latin typeface="Arial" pitchFamily="34" charset="0"/>
-                <a:ea typeface="Arial" pitchFamily="34" charset="-122"/>
-                <a:cs typeface="Arial" pitchFamily="34" charset="-120"/>
-              </a:rPr>
-              <a:t>Service Drill Ranking</a:t>
-            </a:r>
-            <a:endParaRPr lang="en-US" sz="3400" dirty="0"/>
-          </a:p>
-        </p:txBody>
-      </p:sp>
-      <p:sp>
-        <p:nvSpPr>
-          <p:cNvPr id="8" name="Shape 6"/>
-          <p:cNvSpPr/>
-          <p:nvPr/>
-        </p:nvSpPr>
-        <p:spPr>
-          <a:xfrm>
-            <a:off x="4358488" y="1051560"/>
-            <a:ext cx="3474720" cy="457200"/>
+          <p:cNvPr id="4" name="Shape 2"/>
+          <p:cNvSpPr/>
+          <p:nvPr/>
+        </p:nvSpPr>
+        <p:spPr>
+          <a:xfrm>
+            <a:off x="274320" y="201168"/>
+            <a:ext cx="713232" cy="713232"/>
           </a:xfrm>
           <a:prstGeom prst="roundRect">
             <a:avLst>
-              <a:gd name="adj" fmla="val 50000"/>
+              <a:gd name="adj" fmla="val 15385"/>
             </a:avLst>
-          </a:prstGeom>
-          <a:solidFill>
-            <a:srgbClr val="2E5CD6"/>
-          </a:solidFill>
-          <a:ln w="12700">
-            <a:solidFill>
-              <a:srgbClr val="2E5CD6"/>
-            </a:solidFill>
-            <a:prstDash val="solid"/>
-          </a:ln>
-        </p:spPr>
-      </p:sp>
-      <p:sp>
-        <p:nvSpPr>
-          <p:cNvPr id="9" name="Text 7"/>
-          <p:cNvSpPr/>
-          <p:nvPr/>
-        </p:nvSpPr>
-        <p:spPr>
-          <a:xfrm>
-            <a:off x="4358488" y="1051560"/>
-            <a:ext cx="3474720" cy="457200"/>
-          </a:xfrm>
-          <a:prstGeom prst="rect">
-            <a:avLst/>
-          </a:prstGeom>
-          <a:noFill/>
-          <a:ln/>
-        </p:spPr>
-        <p:txBody>
-          <a:bodyPr wrap="square" rtlCol="0" anchor="ctr"/>
-          <a:lstStyle/>
-          <a:p>
-            <a:pPr algn="ctr" indent="0" marL="0">
-              <a:buNone/>
-            </a:pPr>
-            <a:r>
-              <a:rPr lang="en-US" sz="1700" dirty="0">
-                <a:solidFill>
-                  <a:srgbClr val="FFFFFF"/>
-                </a:solidFill>
-                <a:latin typeface="Arial" pitchFamily="34" charset="0"/>
-                <a:ea typeface="Arial" pitchFamily="34" charset="-122"/>
-                <a:cs typeface="Arial" pitchFamily="34" charset="-120"/>
-              </a:rPr>
-              <a:t>RO-SMP KANWIL SULAMPUA</a:t>
-            </a:r>
-            <a:endParaRPr lang="en-US" sz="1700" dirty="0"/>
-          </a:p>
-        </p:txBody>
-      </p:sp>
-      <p:sp>
-        <p:nvSpPr>
-          <p:cNvPr id="10" name="Text 8"/>
-          <p:cNvSpPr/>
-          <p:nvPr/>
-        </p:nvSpPr>
-        <p:spPr>
-          <a:xfrm>
-            <a:off x="0" y="1536192"/>
-            <a:ext cx="12191695" cy="320040"/>
-          </a:xfrm>
-          <a:prstGeom prst="rect">
-            <a:avLst/>
-          </a:prstGeom>
-          <a:noFill/>
-          <a:ln/>
-        </p:spPr>
-        <p:txBody>
-          <a:bodyPr wrap="square" rtlCol="0" anchor="ctr"/>
-          <a:lstStyle/>
-          <a:p>
-            <a:pPr algn="ctr" indent="0" marL="0">
-              <a:buNone/>
-            </a:pPr>
-            <a:r>
-              <a:rPr lang="en-US" sz="1500" dirty="0">
-                <a:solidFill>
-                  <a:srgbClr val="FFFFFF"/>
-                </a:solidFill>
-                <a:latin typeface="Arial" pitchFamily="34" charset="0"/>
-                <a:ea typeface="Arial" pitchFamily="34" charset="-122"/>
-                <a:cs typeface="Arial" pitchFamily="34" charset="-120"/>
-              </a:rPr>
-              <a:t>Teller</a:t>
-            </a:r>
-            <a:endParaRPr lang="en-US" sz="1500" dirty="0"/>
-          </a:p>
-        </p:txBody>
-      </p:sp>
-      <p:sp>
-        <p:nvSpPr>
-          <p:cNvPr id="11" name="Shape 9"/>
-          <p:cNvSpPr/>
-          <p:nvPr/>
-        </p:nvSpPr>
-        <p:spPr>
-          <a:xfrm>
-            <a:off x="2798064" y="2011680"/>
-            <a:ext cx="13716" cy="1627632"/>
-          </a:xfrm>
-          <a:prstGeom prst="rect">
-            <a:avLst/>
           </a:prstGeom>
           <a:solidFill>
             <a:srgbClr val="FFFFFF"/>
@@ -3254,36 +2941,9 @@
           </a:ln>
         </p:spPr>
       </p:sp>
-      <p:sp>
-        <p:nvSpPr>
-          <p:cNvPr id="12" name="Shape 10"/>
-          <p:cNvSpPr/>
-          <p:nvPr/>
-        </p:nvSpPr>
-        <p:spPr>
-          <a:xfrm>
-            <a:off x="621792" y="2029968"/>
-            <a:ext cx="731520" cy="731520"/>
-          </a:xfrm>
-          <a:prstGeom prst="roundRect">
-            <a:avLst>
-              <a:gd name="adj" fmla="val 6250"/>
-            </a:avLst>
-          </a:prstGeom>
-          <a:solidFill>
-            <a:srgbClr val="FFFFFF"/>
-          </a:solidFill>
-          <a:ln w="12700">
-            <a:solidFill>
-              <a:srgbClr val="FFFFFF"/>
-            </a:solidFill>
-            <a:prstDash val="solid"/>
-          </a:ln>
-        </p:spPr>
-      </p:sp>
       <p:pic>
         <p:nvPicPr>
-          <p:cNvPr id="13" name="Image 0" descr="preencoded.png">    </p:cNvPr>
+          <p:cNvPr id="5" name="Image 0" descr="preencoded.png">    </p:cNvPr>
           <p:cNvPicPr>
             <a:picLocks noChangeAspect="1"/>
           </p:cNvPicPr>
@@ -3297,7 +2957,7 @@
         </p:blipFill>
         <p:spPr>
           <a:xfrm>
-            <a:off x="667512" y="2075688"/>
+            <a:off x="310896" y="237744"/>
             <a:ext cx="640080" cy="640080"/>
           </a:xfrm>
           <a:prstGeom prst="rect">
@@ -3307,32 +2967,30 @@
       </p:pic>
       <p:sp>
         <p:nvSpPr>
-          <p:cNvPr id="14" name="Text 11"/>
-          <p:cNvSpPr/>
-          <p:nvPr/>
-        </p:nvSpPr>
-        <p:spPr>
-          <a:xfrm>
-            <a:off x="1536192" y="2029968"/>
-            <a:ext cx="1234440" cy="731520"/>
-          </a:xfrm>
-          <a:prstGeom prst="rect">
-            <a:avLst/>
-          </a:prstGeom>
-          <a:noFill/>
-          <a:ln/>
-        </p:spPr>
-        <p:txBody>
-          <a:bodyPr wrap="none" rtlCol="0" anchor="ctr">
-            <a:normAutofit/>
-          </a:bodyPr>
-          <a:lstStyle/>
-          <a:p>
-            <a:pPr indent="0" marL="0">
-              <a:buNone/>
-            </a:pPr>
-            <a:r>
-              <a:rPr lang="en-US" sz="1400" b="1" dirty="0">
+          <p:cNvPr id="6" name="Text 3"/>
+          <p:cNvSpPr/>
+          <p:nvPr/>
+        </p:nvSpPr>
+        <p:spPr>
+          <a:xfrm>
+            <a:off x="10820095" y="201168"/>
+            <a:ext cx="1051560" cy="502920"/>
+          </a:xfrm>
+          <a:prstGeom prst="rect">
+            <a:avLst/>
+          </a:prstGeom>
+          <a:noFill/>
+          <a:ln/>
+        </p:spPr>
+        <p:txBody>
+          <a:bodyPr wrap="square" rtlCol="0" anchor="ctr"/>
+          <a:lstStyle/>
+          <a:p>
+            <a:pPr algn="r" indent="0" marL="0">
+              <a:buNone/>
+            </a:pPr>
+            <a:r>
+              <a:rPr lang="en-US" sz="3400" b="1" dirty="0">
                 <a:solidFill>
                   <a:srgbClr val="FFFFFF"/>
                 </a:solidFill>
@@ -3340,63 +2998,38 @@
                 <a:ea typeface="Arial" pitchFamily="34" charset="-122"/>
                 <a:cs typeface="Arial" pitchFamily="34" charset="-120"/>
               </a:rPr>
-              <a:t>Teller Satu</a:t>
-            </a:r>
-            <a:endParaRPr lang="en-US" sz="1400" dirty="0"/>
-          </a:p>
-        </p:txBody>
-      </p:sp>
-      <p:sp>
-        <p:nvSpPr>
-          <p:cNvPr id="15" name="Shape 12"/>
-          <p:cNvSpPr/>
-          <p:nvPr/>
-        </p:nvSpPr>
-        <p:spPr>
-          <a:xfrm>
-            <a:off x="2852928" y="2212848"/>
-            <a:ext cx="3509101" cy="365760"/>
-          </a:xfrm>
-          <a:prstGeom prst="rect">
-            <a:avLst/>
-          </a:prstGeom>
-          <a:solidFill>
-            <a:srgbClr val="1E4FC8"/>
-          </a:solidFill>
-          <a:ln w="9525">
-            <a:solidFill>
-              <a:srgbClr val="FFFFFF"/>
-            </a:solidFill>
-            <a:prstDash val="solid"/>
-          </a:ln>
-        </p:spPr>
-      </p:sp>
-      <p:sp>
-        <p:nvSpPr>
-          <p:cNvPr id="16" name="Text 13"/>
-          <p:cNvSpPr/>
-          <p:nvPr/>
-        </p:nvSpPr>
-        <p:spPr>
-          <a:xfrm>
-            <a:off x="6528816" y="2029968"/>
-            <a:ext cx="658368" cy="731520"/>
-          </a:xfrm>
-          <a:prstGeom prst="rect">
-            <a:avLst/>
-          </a:prstGeom>
-          <a:noFill/>
-          <a:ln/>
-        </p:spPr>
-        <p:txBody>
-          <a:bodyPr wrap="square" rtlCol="0" anchor="ctr"/>
-          <a:lstStyle/>
-          <a:p>
-            <a:pPr algn="r" indent="0" marL="0">
-              <a:buNone/>
-            </a:pPr>
-            <a:r>
-              <a:rPr lang="en-US" sz="1500" b="1" dirty="0">
+              <a:t>btn</a:t>
+            </a:r>
+            <a:endParaRPr lang="en-US" sz="3400" dirty="0"/>
+          </a:p>
+        </p:txBody>
+      </p:sp>
+      <p:sp>
+        <p:nvSpPr>
+          <p:cNvPr id="7" name="Text 4"/>
+          <p:cNvSpPr/>
+          <p:nvPr/>
+        </p:nvSpPr>
+        <p:spPr>
+          <a:xfrm>
+            <a:off x="0" y="237744"/>
+            <a:ext cx="12191695" cy="685800"/>
+          </a:xfrm>
+          <a:prstGeom prst="rect">
+            <a:avLst/>
+          </a:prstGeom>
+          <a:noFill/>
+          <a:ln/>
+        </p:spPr>
+        <p:txBody>
+          <a:bodyPr wrap="square" rtlCol="0" anchor="ctr"/>
+          <a:lstStyle/>
+          <a:p>
+            <a:pPr algn="ctr" indent="0" marL="0">
+              <a:buNone/>
+            </a:pPr>
+            <a:r>
+              <a:rPr lang="en-US" sz="3400" b="1" dirty="0">
                 <a:solidFill>
                   <a:srgbClr val="FFFFFF"/>
                 </a:solidFill>
@@ -3404,22 +3037,22 @@
                 <a:ea typeface="Arial" pitchFamily="34" charset="-122"/>
                 <a:cs typeface="Arial" pitchFamily="34" charset="-120"/>
               </a:rPr>
-              <a:t>4,92</a:t>
-            </a:r>
-            <a:endParaRPr lang="en-US" sz="1500" dirty="0"/>
-          </a:p>
-        </p:txBody>
-      </p:sp>
-      <p:sp>
-        <p:nvSpPr>
-          <p:cNvPr id="17" name="Shape 14"/>
-          <p:cNvSpPr/>
-          <p:nvPr/>
-        </p:nvSpPr>
-        <p:spPr>
-          <a:xfrm>
-            <a:off x="7095744" y="2194560"/>
-            <a:ext cx="1298448" cy="402336"/>
+              <a:t>Service Drill Ranking</a:t>
+            </a:r>
+            <a:endParaRPr lang="en-US" sz="3400" dirty="0"/>
+          </a:p>
+        </p:txBody>
+      </p:sp>
+      <p:sp>
+        <p:nvSpPr>
+          <p:cNvPr id="8" name="Shape 5"/>
+          <p:cNvSpPr/>
+          <p:nvPr/>
+        </p:nvSpPr>
+        <p:spPr>
+          <a:xfrm>
+            <a:off x="4358488" y="1051560"/>
+            <a:ext cx="3474720" cy="457200"/>
           </a:xfrm>
           <a:prstGeom prst="roundRect">
             <a:avLst>
@@ -3427,11 +3060,11 @@
             </a:avLst>
           </a:prstGeom>
           <a:solidFill>
-            <a:srgbClr val="00B050"/>
+            <a:srgbClr val="2E5CD6"/>
           </a:solidFill>
           <a:ln w="12700">
             <a:solidFill>
-              <a:srgbClr val="00B050"/>
+              <a:srgbClr val="2E5CD6"/>
             </a:solidFill>
             <a:prstDash val="solid"/>
           </a:ln>
@@ -3439,14 +3072,14 @@
       </p:sp>
       <p:sp>
         <p:nvSpPr>
-          <p:cNvPr id="18" name="Text 15"/>
-          <p:cNvSpPr/>
-          <p:nvPr/>
-        </p:nvSpPr>
-        <p:spPr>
-          <a:xfrm>
-            <a:off x="7095744" y="2194560"/>
-            <a:ext cx="1298448" cy="402336"/>
+          <p:cNvPr id="9" name="Text 6"/>
+          <p:cNvSpPr/>
+          <p:nvPr/>
+        </p:nvSpPr>
+        <p:spPr>
+          <a:xfrm>
+            <a:off x="4358488" y="1051560"/>
+            <a:ext cx="3474720" cy="457200"/>
           </a:xfrm>
           <a:prstGeom prst="rect">
             <a:avLst/>
@@ -3462,7 +3095,7 @@
               <a:buNone/>
             </a:pPr>
             <a:r>
-              <a:rPr lang="en-US" sz="1100" b="1" dirty="0">
+              <a:rPr lang="en-US" sz="1700" dirty="0">
                 <a:solidFill>
                   <a:srgbClr val="FFFFFF"/>
                 </a:solidFill>
@@ -3470,27 +3103,64 @@
                 <a:ea typeface="Arial" pitchFamily="34" charset="-122"/>
                 <a:cs typeface="Arial" pitchFamily="34" charset="-120"/>
               </a:rPr>
-              <a:t>Istimewa</a:t>
-            </a:r>
-            <a:endParaRPr lang="en-US" sz="1100" dirty="0"/>
-          </a:p>
-        </p:txBody>
-      </p:sp>
-      <p:sp>
-        <p:nvSpPr>
-          <p:cNvPr id="19" name="Shape 16"/>
-          <p:cNvSpPr/>
-          <p:nvPr/>
-        </p:nvSpPr>
-        <p:spPr>
-          <a:xfrm>
-            <a:off x="621792" y="2898648"/>
-            <a:ext cx="731520" cy="731520"/>
-          </a:xfrm>
-          <a:prstGeom prst="roundRect">
-            <a:avLst>
-              <a:gd name="adj" fmla="val 6250"/>
-            </a:avLst>
+              <a:t>RO-SMP KANWIL SULAMPUA</a:t>
+            </a:r>
+            <a:endParaRPr lang="en-US" sz="1700" dirty="0"/>
+          </a:p>
+        </p:txBody>
+      </p:sp>
+      <p:sp>
+        <p:nvSpPr>
+          <p:cNvPr id="10" name="Text 7"/>
+          <p:cNvSpPr/>
+          <p:nvPr/>
+        </p:nvSpPr>
+        <p:spPr>
+          <a:xfrm>
+            <a:off x="0" y="1536192"/>
+            <a:ext cx="12191695" cy="320040"/>
+          </a:xfrm>
+          <a:prstGeom prst="rect">
+            <a:avLst/>
+          </a:prstGeom>
+          <a:noFill/>
+          <a:ln/>
+        </p:spPr>
+        <p:txBody>
+          <a:bodyPr wrap="square" rtlCol="0" anchor="ctr"/>
+          <a:lstStyle/>
+          <a:p>
+            <a:pPr algn="ctr" indent="0" marL="0">
+              <a:buNone/>
+            </a:pPr>
+            <a:r>
+              <a:rPr lang="en-US" sz="1500" dirty="0">
+                <a:solidFill>
+                  <a:srgbClr val="FFFFFF"/>
+                </a:solidFill>
+                <a:latin typeface="Arial" pitchFamily="34" charset="0"/>
+                <a:ea typeface="Arial" pitchFamily="34" charset="-122"/>
+                <a:cs typeface="Arial" pitchFamily="34" charset="-120"/>
+              </a:rPr>
+              <a:t>Teller</a:t>
+            </a:r>
+            <a:endParaRPr lang="en-US" sz="1500" dirty="0"/>
+          </a:p>
+        </p:txBody>
+      </p:sp>
+      <p:sp>
+        <p:nvSpPr>
+          <p:cNvPr id="11" name="Shape 8"/>
+          <p:cNvSpPr/>
+          <p:nvPr/>
+        </p:nvSpPr>
+        <p:spPr>
+          <a:xfrm>
+            <a:off x="2798064" y="2011680"/>
+            <a:ext cx="13716" cy="1627632"/>
+          </a:xfrm>
+          <a:prstGeom prst="rect">
+            <a:avLst/>
           </a:prstGeom>
           <a:solidFill>
             <a:srgbClr val="FFFFFF"/>
@@ -3503,9 +3173,36 @@
           </a:ln>
         </p:spPr>
       </p:sp>
+      <p:sp>
+        <p:nvSpPr>
+          <p:cNvPr id="12" name="Shape 9"/>
+          <p:cNvSpPr/>
+          <p:nvPr/>
+        </p:nvSpPr>
+        <p:spPr>
+          <a:xfrm>
+            <a:off x="621792" y="2029968"/>
+            <a:ext cx="731520" cy="731520"/>
+          </a:xfrm>
+          <a:prstGeom prst="roundRect">
+            <a:avLst>
+              <a:gd name="adj" fmla="val 6250"/>
+            </a:avLst>
+          </a:prstGeom>
+          <a:solidFill>
+            <a:srgbClr val="FFFFFF"/>
+          </a:solidFill>
+          <a:ln w="12700">
+            <a:solidFill>
+              <a:srgbClr val="FFFFFF"/>
+            </a:solidFill>
+            <a:prstDash val="solid"/>
+          </a:ln>
+        </p:spPr>
+      </p:sp>
       <p:pic>
         <p:nvPicPr>
-          <p:cNvPr id="20" name="Image 1" descr="preencoded.png">    </p:cNvPr>
+          <p:cNvPr id="13" name="Image 1" descr="preencoded.png">    </p:cNvPr>
           <p:cNvPicPr>
             <a:picLocks noChangeAspect="1"/>
           </p:cNvPicPr>
@@ -3519,7 +3216,7 @@
         </p:blipFill>
         <p:spPr>
           <a:xfrm>
-            <a:off x="667512" y="2944368"/>
+            <a:off x="667512" y="2075688"/>
             <a:ext cx="640080" cy="640080"/>
           </a:xfrm>
           <a:prstGeom prst="rect">
@@ -3529,13 +3226,13 @@
       </p:pic>
       <p:sp>
         <p:nvSpPr>
-          <p:cNvPr id="21" name="Text 17"/>
-          <p:cNvSpPr/>
-          <p:nvPr/>
-        </p:nvSpPr>
-        <p:spPr>
-          <a:xfrm>
-            <a:off x="1536192" y="2898648"/>
+          <p:cNvPr id="14" name="Text 10"/>
+          <p:cNvSpPr/>
+          <p:nvPr/>
+        </p:nvSpPr>
+        <p:spPr>
+          <a:xfrm>
+            <a:off x="1536192" y="2029968"/>
             <a:ext cx="1234440" cy="731520"/>
           </a:xfrm>
           <a:prstGeom prst="rect">
@@ -3562,7 +3259,7 @@
                 <a:ea typeface="Arial" pitchFamily="34" charset="-122"/>
                 <a:cs typeface="Arial" pitchFamily="34" charset="-120"/>
               </a:rPr>
-              <a:t>Teller Dua</a:t>
+              <a:t>Teller Satu</a:t>
             </a:r>
             <a:endParaRPr lang="en-US" sz="1400" dirty="0"/>
           </a:p>
@@ -3570,14 +3267,14 @@
       </p:sp>
       <p:sp>
         <p:nvSpPr>
-          <p:cNvPr id="22" name="Shape 18"/>
-          <p:cNvSpPr/>
-          <p:nvPr/>
-        </p:nvSpPr>
-        <p:spPr>
-          <a:xfrm>
-            <a:off x="2852928" y="3081528"/>
-            <a:ext cx="2646091" cy="365760"/>
+          <p:cNvPr id="15" name="Shape 11"/>
+          <p:cNvSpPr/>
+          <p:nvPr/>
+        </p:nvSpPr>
+        <p:spPr>
+          <a:xfrm>
+            <a:off x="2852928" y="2212848"/>
+            <a:ext cx="3509101" cy="365760"/>
           </a:xfrm>
           <a:prstGeom prst="rect">
             <a:avLst/>
@@ -3595,7 +3292,229 @@
       </p:sp>
       <p:sp>
         <p:nvSpPr>
-          <p:cNvPr id="23" name="Text 19"/>
+          <p:cNvPr id="16" name="Text 12"/>
+          <p:cNvSpPr/>
+          <p:nvPr/>
+        </p:nvSpPr>
+        <p:spPr>
+          <a:xfrm>
+            <a:off x="6528816" y="2029968"/>
+            <a:ext cx="658368" cy="731520"/>
+          </a:xfrm>
+          <a:prstGeom prst="rect">
+            <a:avLst/>
+          </a:prstGeom>
+          <a:noFill/>
+          <a:ln/>
+        </p:spPr>
+        <p:txBody>
+          <a:bodyPr wrap="square" rtlCol="0" anchor="ctr"/>
+          <a:lstStyle/>
+          <a:p>
+            <a:pPr algn="r" indent="0" marL="0">
+              <a:buNone/>
+            </a:pPr>
+            <a:r>
+              <a:rPr lang="en-US" sz="1500" b="1" dirty="0">
+                <a:solidFill>
+                  <a:srgbClr val="FFFFFF"/>
+                </a:solidFill>
+                <a:latin typeface="Arial" pitchFamily="34" charset="0"/>
+                <a:ea typeface="Arial" pitchFamily="34" charset="-122"/>
+                <a:cs typeface="Arial" pitchFamily="34" charset="-120"/>
+              </a:rPr>
+              <a:t>4,92</a:t>
+            </a:r>
+            <a:endParaRPr lang="en-US" sz="1500" dirty="0"/>
+          </a:p>
+        </p:txBody>
+      </p:sp>
+      <p:sp>
+        <p:nvSpPr>
+          <p:cNvPr id="17" name="Shape 13"/>
+          <p:cNvSpPr/>
+          <p:nvPr/>
+        </p:nvSpPr>
+        <p:spPr>
+          <a:xfrm>
+            <a:off x="7095744" y="2194560"/>
+            <a:ext cx="1298448" cy="402336"/>
+          </a:xfrm>
+          <a:prstGeom prst="roundRect">
+            <a:avLst>
+              <a:gd name="adj" fmla="val 50000"/>
+            </a:avLst>
+          </a:prstGeom>
+          <a:solidFill>
+            <a:srgbClr val="00B050"/>
+          </a:solidFill>
+          <a:ln w="12700">
+            <a:solidFill>
+              <a:srgbClr val="00B050"/>
+            </a:solidFill>
+            <a:prstDash val="solid"/>
+          </a:ln>
+        </p:spPr>
+      </p:sp>
+      <p:sp>
+        <p:nvSpPr>
+          <p:cNvPr id="18" name="Text 14"/>
+          <p:cNvSpPr/>
+          <p:nvPr/>
+        </p:nvSpPr>
+        <p:spPr>
+          <a:xfrm>
+            <a:off x="7095744" y="2194560"/>
+            <a:ext cx="1298448" cy="402336"/>
+          </a:xfrm>
+          <a:prstGeom prst="rect">
+            <a:avLst/>
+          </a:prstGeom>
+          <a:noFill/>
+          <a:ln/>
+        </p:spPr>
+        <p:txBody>
+          <a:bodyPr wrap="square" rtlCol="0" anchor="ctr"/>
+          <a:lstStyle/>
+          <a:p>
+            <a:pPr algn="ctr" indent="0" marL="0">
+              <a:buNone/>
+            </a:pPr>
+            <a:r>
+              <a:rPr lang="en-US" sz="1100" b="1" dirty="0">
+                <a:solidFill>
+                  <a:srgbClr val="FFFFFF"/>
+                </a:solidFill>
+                <a:latin typeface="Arial" pitchFamily="34" charset="0"/>
+                <a:ea typeface="Arial" pitchFamily="34" charset="-122"/>
+                <a:cs typeface="Arial" pitchFamily="34" charset="-120"/>
+              </a:rPr>
+              <a:t>Istimewa</a:t>
+            </a:r>
+            <a:endParaRPr lang="en-US" sz="1100" dirty="0"/>
+          </a:p>
+        </p:txBody>
+      </p:sp>
+      <p:sp>
+        <p:nvSpPr>
+          <p:cNvPr id="19" name="Shape 15"/>
+          <p:cNvSpPr/>
+          <p:nvPr/>
+        </p:nvSpPr>
+        <p:spPr>
+          <a:xfrm>
+            <a:off x="621792" y="2898648"/>
+            <a:ext cx="731520" cy="731520"/>
+          </a:xfrm>
+          <a:prstGeom prst="roundRect">
+            <a:avLst>
+              <a:gd name="adj" fmla="val 6250"/>
+            </a:avLst>
+          </a:prstGeom>
+          <a:solidFill>
+            <a:srgbClr val="FFFFFF"/>
+          </a:solidFill>
+          <a:ln w="12700">
+            <a:solidFill>
+              <a:srgbClr val="FFFFFF"/>
+            </a:solidFill>
+            <a:prstDash val="solid"/>
+          </a:ln>
+        </p:spPr>
+      </p:sp>
+      <p:pic>
+        <p:nvPicPr>
+          <p:cNvPr id="20" name="Image 2" descr="preencoded.png">    </p:cNvPr>
+          <p:cNvPicPr>
+            <a:picLocks noChangeAspect="1"/>
+          </p:cNvPicPr>
+          <p:nvPr/>
+        </p:nvPicPr>
+        <p:blipFill>
+          <a:blip r:embed="rId3"/>
+          <a:stretch>
+            <a:fillRect/>
+          </a:stretch>
+        </p:blipFill>
+        <p:spPr>
+          <a:xfrm>
+            <a:off x="667512" y="2944368"/>
+            <a:ext cx="640080" cy="640080"/>
+          </a:xfrm>
+          <a:prstGeom prst="rect">
+            <a:avLst/>
+          </a:prstGeom>
+        </p:spPr>
+      </p:pic>
+      <p:sp>
+        <p:nvSpPr>
+          <p:cNvPr id="21" name="Text 16"/>
+          <p:cNvSpPr/>
+          <p:nvPr/>
+        </p:nvSpPr>
+        <p:spPr>
+          <a:xfrm>
+            <a:off x="1536192" y="2898648"/>
+            <a:ext cx="1234440" cy="731520"/>
+          </a:xfrm>
+          <a:prstGeom prst="rect">
+            <a:avLst/>
+          </a:prstGeom>
+          <a:noFill/>
+          <a:ln/>
+        </p:spPr>
+        <p:txBody>
+          <a:bodyPr wrap="none" rtlCol="0" anchor="ctr">
+            <a:normAutofit/>
+          </a:bodyPr>
+          <a:lstStyle/>
+          <a:p>
+            <a:pPr indent="0" marL="0">
+              <a:buNone/>
+            </a:pPr>
+            <a:r>
+              <a:rPr lang="en-US" sz="1400" b="1" dirty="0">
+                <a:solidFill>
+                  <a:srgbClr val="FFFFFF"/>
+                </a:solidFill>
+                <a:latin typeface="Arial" pitchFamily="34" charset="0"/>
+                <a:ea typeface="Arial" pitchFamily="34" charset="-122"/>
+                <a:cs typeface="Arial" pitchFamily="34" charset="-120"/>
+              </a:rPr>
+              <a:t>Teller Dua</a:t>
+            </a:r>
+            <a:endParaRPr lang="en-US" sz="1400" dirty="0"/>
+          </a:p>
+        </p:txBody>
+      </p:sp>
+      <p:sp>
+        <p:nvSpPr>
+          <p:cNvPr id="22" name="Shape 17"/>
+          <p:cNvSpPr/>
+          <p:nvPr/>
+        </p:nvSpPr>
+        <p:spPr>
+          <a:xfrm>
+            <a:off x="2852928" y="3081528"/>
+            <a:ext cx="2646091" cy="365760"/>
+          </a:xfrm>
+          <a:prstGeom prst="rect">
+            <a:avLst/>
+          </a:prstGeom>
+          <a:solidFill>
+            <a:srgbClr val="1E4FC8"/>
+          </a:solidFill>
+          <a:ln w="9525">
+            <a:solidFill>
+              <a:srgbClr val="FFFFFF"/>
+            </a:solidFill>
+            <a:prstDash val="solid"/>
+          </a:ln>
+        </p:spPr>
+      </p:sp>
+      <p:sp>
+        <p:nvSpPr>
+          <p:cNvPr id="23" name="Text 18"/>
           <p:cNvSpPr/>
           <p:nvPr/>
         </p:nvSpPr>
@@ -3634,7 +3553,7 @@
       </p:sp>
       <p:sp>
         <p:nvSpPr>
-          <p:cNvPr id="24" name="Shape 20"/>
+          <p:cNvPr id="24" name="Shape 19"/>
           <p:cNvSpPr/>
           <p:nvPr/>
         </p:nvSpPr>
@@ -3661,7 +3580,7 @@
       </p:sp>
       <p:sp>
         <p:nvSpPr>
-          <p:cNvPr id="25" name="Text 21"/>
+          <p:cNvPr id="25" name="Text 20"/>
           <p:cNvSpPr/>
           <p:nvPr/>
         </p:nvSpPr>
@@ -3700,7 +3619,7 @@
       </p:sp>
       <p:sp>
         <p:nvSpPr>
-          <p:cNvPr id="26" name="Shape 22"/>
+          <p:cNvPr id="26" name="Shape 21"/>
           <p:cNvSpPr/>
           <p:nvPr/>
         </p:nvSpPr>
@@ -3727,7 +3646,7 @@
       </p:sp>
       <p:sp>
         <p:nvSpPr>
-          <p:cNvPr id="27" name="Text 23"/>
+          <p:cNvPr id="27" name="Text 22"/>
           <p:cNvSpPr/>
           <p:nvPr/>
         </p:nvSpPr>
@@ -3766,7 +3685,7 @@
       </p:sp>
       <p:sp>
         <p:nvSpPr>
-          <p:cNvPr id="28" name="Shape 24"/>
+          <p:cNvPr id="28" name="Shape 23"/>
           <p:cNvSpPr/>
           <p:nvPr/>
         </p:nvSpPr>
@@ -3793,7 +3712,7 @@
       </p:sp>
       <p:sp>
         <p:nvSpPr>
-          <p:cNvPr id="29" name="Shape 25"/>
+          <p:cNvPr id="29" name="Shape 24"/>
           <p:cNvSpPr/>
           <p:nvPr/>
         </p:nvSpPr>
@@ -3818,7 +3737,7 @@
       </p:sp>
       <p:sp>
         <p:nvSpPr>
-          <p:cNvPr id="30" name="Text 26"/>
+          <p:cNvPr id="30" name="Text 25"/>
           <p:cNvSpPr/>
           <p:nvPr/>
         </p:nvSpPr>
@@ -3857,7 +3776,7 @@
       </p:sp>
       <p:sp>
         <p:nvSpPr>
-          <p:cNvPr id="31" name="Text 27"/>
+          <p:cNvPr id="31" name="Text 26"/>
           <p:cNvSpPr/>
           <p:nvPr/>
         </p:nvSpPr>
@@ -3896,7 +3815,7 @@
       </p:sp>
       <p:sp>
         <p:nvSpPr>
-          <p:cNvPr id="32" name="Shape 28"/>
+          <p:cNvPr id="32" name="Shape 27"/>
           <p:cNvSpPr/>
           <p:nvPr/>
         </p:nvSpPr>
@@ -3921,7 +3840,7 @@
       </p:sp>
       <p:sp>
         <p:nvSpPr>
-          <p:cNvPr id="33" name="Text 29"/>
+          <p:cNvPr id="33" name="Text 28"/>
           <p:cNvSpPr/>
           <p:nvPr/>
         </p:nvSpPr>
@@ -3960,7 +3879,7 @@
       </p:sp>
       <p:sp>
         <p:nvSpPr>
-          <p:cNvPr id="34" name="Text 30"/>
+          <p:cNvPr id="34" name="Text 29"/>
           <p:cNvSpPr/>
           <p:nvPr/>
         </p:nvSpPr>
@@ -3999,7 +3918,7 @@
       </p:sp>
       <p:sp>
         <p:nvSpPr>
-          <p:cNvPr id="35" name="Shape 31"/>
+          <p:cNvPr id="35" name="Shape 30"/>
           <p:cNvSpPr/>
           <p:nvPr/>
         </p:nvSpPr>
@@ -4024,7 +3943,7 @@
       </p:sp>
       <p:sp>
         <p:nvSpPr>
-          <p:cNvPr id="36" name="Text 32"/>
+          <p:cNvPr id="36" name="Text 31"/>
           <p:cNvSpPr/>
           <p:nvPr/>
         </p:nvSpPr>
@@ -4063,7 +3982,7 @@
       </p:sp>
       <p:sp>
         <p:nvSpPr>
-          <p:cNvPr id="37" name="Text 33"/>
+          <p:cNvPr id="37" name="Text 32"/>
           <p:cNvSpPr/>
           <p:nvPr/>
         </p:nvSpPr>
@@ -4102,7 +4021,7 @@
       </p:sp>
       <p:sp>
         <p:nvSpPr>
-          <p:cNvPr id="38" name="Shape 34"/>
+          <p:cNvPr id="38" name="Shape 33"/>
           <p:cNvSpPr/>
           <p:nvPr/>
         </p:nvSpPr>
@@ -4127,7 +4046,7 @@
       </p:sp>
       <p:sp>
         <p:nvSpPr>
-          <p:cNvPr id="39" name="Text 35"/>
+          <p:cNvPr id="39" name="Text 34"/>
           <p:cNvSpPr/>
           <p:nvPr/>
         </p:nvSpPr>
@@ -4166,7 +4085,7 @@
       </p:sp>
       <p:sp>
         <p:nvSpPr>
-          <p:cNvPr id="40" name="Text 36"/>
+          <p:cNvPr id="40" name="Text 35"/>
           <p:cNvSpPr/>
           <p:nvPr/>
         </p:nvSpPr>
@@ -4205,7 +4124,7 @@
       </p:sp>
       <p:sp>
         <p:nvSpPr>
-          <p:cNvPr id="41" name="Shape 37"/>
+          <p:cNvPr id="41" name="Shape 36"/>
           <p:cNvSpPr/>
           <p:nvPr/>
         </p:nvSpPr>
@@ -4230,7 +4149,7 @@
       </p:sp>
       <p:sp>
         <p:nvSpPr>
-          <p:cNvPr id="42" name="Text 38"/>
+          <p:cNvPr id="42" name="Text 37"/>
           <p:cNvSpPr/>
           <p:nvPr/>
         </p:nvSpPr>
@@ -4269,7 +4188,7 @@
       </p:sp>
       <p:sp>
         <p:nvSpPr>
-          <p:cNvPr id="43" name="Text 39"/>
+          <p:cNvPr id="43" name="Text 38"/>
           <p:cNvSpPr/>
           <p:nvPr/>
         </p:nvSpPr>

--- a/ranking-uji-route.pptx
+++ b/ranking-uji-route.pptx
@@ -12,8 +12,8 @@
   <p:notesMasterIdLst>
     <p:notesMasterId r:id="rId5"/>
   </p:notesMasterIdLst>
-  <p:sldSz cx="12191695" cy="6858000"/>
-  <p:notesSz cx="6858000" cy="12191695"/>
+  <p:sldSz cx="12191695" cy="7048287"/>
+  <p:notesSz cx="7048287" cy="12191695"/>
   <p:defaultTextStyle>
     <a:lvl1pPr marL="0" algn="l" defTabSz="914400" rtl="0" eaLnBrk="1" latinLnBrk="0" hangingPunct="1">
       <a:defRPr sz="1800" kern="1200">
@@ -1053,86 +1053,9 @@
           <a:chExt cx="0" cy="0"/>
         </a:xfrm>
       </p:grpSpPr>
-      <p:sp>
-        <p:nvSpPr>
-          <p:cNvPr id="2" name="Shape 0"/>
-          <p:cNvSpPr/>
-          <p:nvPr/>
-        </p:nvSpPr>
-        <p:spPr>
-          <a:xfrm>
-            <a:off x="0" y="6172200"/>
-            <a:ext cx="12191695" cy="685800"/>
-          </a:xfrm>
-          <a:prstGeom prst="rect">
-            <a:avLst/>
-          </a:prstGeom>
-          <a:solidFill>
-            <a:srgbClr val="D4112E"/>
-          </a:solidFill>
-          <a:ln w="12700">
-            <a:solidFill>
-              <a:srgbClr val="D4112E"/>
-            </a:solidFill>
-            <a:prstDash val="solid"/>
-          </a:ln>
-        </p:spPr>
-      </p:sp>
-      <p:sp>
-        <p:nvSpPr>
-          <p:cNvPr id="3" name="Shape 1"/>
-          <p:cNvSpPr/>
-          <p:nvPr/>
-        </p:nvSpPr>
-        <p:spPr>
-          <a:xfrm>
-            <a:off x="-1097280" y="5806440"/>
-            <a:ext cx="14386255" cy="822960"/>
-          </a:xfrm>
-          <a:prstGeom prst="ellipse">
-            <a:avLst/>
-          </a:prstGeom>
-          <a:solidFill>
-            <a:srgbClr val="D4112E"/>
-          </a:solidFill>
-          <a:ln w="12700">
-            <a:solidFill>
-              <a:srgbClr val="D4112E"/>
-            </a:solidFill>
-            <a:prstDash val="solid"/>
-          </a:ln>
-        </p:spPr>
-      </p:sp>
-      <p:sp>
-        <p:nvSpPr>
-          <p:cNvPr id="4" name="Shape 2"/>
-          <p:cNvSpPr/>
-          <p:nvPr/>
-        </p:nvSpPr>
-        <p:spPr>
-          <a:xfrm>
-            <a:off x="274320" y="201168"/>
-            <a:ext cx="713232" cy="713232"/>
-          </a:xfrm>
-          <a:prstGeom prst="roundRect">
-            <a:avLst>
-              <a:gd name="adj" fmla="val 15385"/>
-            </a:avLst>
-          </a:prstGeom>
-          <a:solidFill>
-            <a:srgbClr val="FFFFFF"/>
-          </a:solidFill>
-          <a:ln w="12700">
-            <a:solidFill>
-              <a:srgbClr val="FFFFFF"/>
-            </a:solidFill>
-            <a:prstDash val="solid"/>
-          </a:ln>
-        </p:spPr>
-      </p:sp>
       <p:pic>
         <p:nvPicPr>
-          <p:cNvPr id="5" name="Image 0" descr="preencoded.png">    </p:cNvPr>
+          <p:cNvPr id="2" name="Image 0" descr="preencoded.png">    </p:cNvPr>
           <p:cNvPicPr>
             <a:picLocks noChangeAspect="1"/>
           </p:cNvPicPr>
@@ -1146,8 +1069,8 @@
         </p:blipFill>
         <p:spPr>
           <a:xfrm>
-            <a:off x="310896" y="237744"/>
-            <a:ext cx="640080" cy="640080"/>
+            <a:off x="0" y="0"/>
+            <a:ext cx="12191695" cy="7048287"/>
           </a:xfrm>
           <a:prstGeom prst="rect">
             <a:avLst/>
@@ -1156,46 +1079,7 @@
       </p:pic>
       <p:sp>
         <p:nvSpPr>
-          <p:cNvPr id="6" name="Text 3"/>
-          <p:cNvSpPr/>
-          <p:nvPr/>
-        </p:nvSpPr>
-        <p:spPr>
-          <a:xfrm>
-            <a:off x="10820095" y="201168"/>
-            <a:ext cx="1051560" cy="502920"/>
-          </a:xfrm>
-          <a:prstGeom prst="rect">
-            <a:avLst/>
-          </a:prstGeom>
-          <a:noFill/>
-          <a:ln/>
-        </p:spPr>
-        <p:txBody>
-          <a:bodyPr wrap="square" rtlCol="0" anchor="ctr"/>
-          <a:lstStyle/>
-          <a:p>
-            <a:pPr algn="r" indent="0" marL="0">
-              <a:buNone/>
-            </a:pPr>
-            <a:r>
-              <a:rPr lang="en-US" sz="3400" b="1" dirty="0">
-                <a:solidFill>
-                  <a:srgbClr val="FFFFFF"/>
-                </a:solidFill>
-                <a:latin typeface="Arial" pitchFamily="34" charset="0"/>
-                <a:ea typeface="Arial" pitchFamily="34" charset="-122"/>
-                <a:cs typeface="Arial" pitchFamily="34" charset="-120"/>
-              </a:rPr>
-              <a:t>btn</a:t>
-            </a:r>
-            <a:endParaRPr lang="en-US" sz="3400" dirty="0"/>
-          </a:p>
-        </p:txBody>
-      </p:sp>
-      <p:sp>
-        <p:nvSpPr>
-          <p:cNvPr id="7" name="Text 4"/>
+          <p:cNvPr id="3" name="Text 0"/>
           <p:cNvSpPr/>
           <p:nvPr/>
         </p:nvSpPr>
@@ -1234,7 +1118,7 @@
       </p:sp>
       <p:sp>
         <p:nvSpPr>
-          <p:cNvPr id="8" name="Text 5"/>
+          <p:cNvPr id="4" name="Text 1"/>
           <p:cNvSpPr/>
           <p:nvPr/>
         </p:nvSpPr>
@@ -1273,7 +1157,7 @@
       </p:sp>
       <p:sp>
         <p:nvSpPr>
-          <p:cNvPr id="9" name="Text 6"/>
+          <p:cNvPr id="5" name="Text 2"/>
           <p:cNvSpPr/>
           <p:nvPr/>
         </p:nvSpPr>
@@ -1312,7 +1196,7 @@
       </p:sp>
       <p:sp>
         <p:nvSpPr>
-          <p:cNvPr id="10" name="Text 7"/>
+          <p:cNvPr id="6" name="Text 3"/>
           <p:cNvSpPr/>
           <p:nvPr/>
         </p:nvSpPr>
@@ -1351,7 +1235,7 @@
       </p:sp>
       <p:sp>
         <p:nvSpPr>
-          <p:cNvPr id="11" name="Text 8"/>
+          <p:cNvPr id="7" name="Text 4"/>
           <p:cNvSpPr/>
           <p:nvPr/>
         </p:nvSpPr>
@@ -1390,7 +1274,7 @@
       </p:sp>
       <p:sp>
         <p:nvSpPr>
-          <p:cNvPr id="12" name="Text 9"/>
+          <p:cNvPr id="8" name="Text 5"/>
           <p:cNvSpPr/>
           <p:nvPr/>
         </p:nvSpPr>
@@ -1429,7 +1313,7 @@
       </p:sp>
       <p:sp>
         <p:nvSpPr>
-          <p:cNvPr id="13" name="Text 10"/>
+          <p:cNvPr id="9" name="Text 6"/>
           <p:cNvSpPr/>
           <p:nvPr/>
         </p:nvSpPr>
@@ -1468,7 +1352,7 @@
       </p:sp>
       <p:sp>
         <p:nvSpPr>
-          <p:cNvPr id="14" name="Text 11"/>
+          <p:cNvPr id="10" name="Text 7"/>
           <p:cNvSpPr/>
           <p:nvPr/>
         </p:nvSpPr>
@@ -1507,7 +1391,7 @@
       </p:sp>
       <p:sp>
         <p:nvSpPr>
-          <p:cNvPr id="15" name="Text 12"/>
+          <p:cNvPr id="11" name="Text 8"/>
           <p:cNvSpPr/>
           <p:nvPr/>
         </p:nvSpPr>
@@ -1546,7 +1430,7 @@
       </p:sp>
       <p:sp>
         <p:nvSpPr>
-          <p:cNvPr id="16" name="Text 13"/>
+          <p:cNvPr id="12" name="Text 9"/>
           <p:cNvSpPr/>
           <p:nvPr/>
         </p:nvSpPr>
@@ -1585,7 +1469,7 @@
       </p:sp>
       <p:sp>
         <p:nvSpPr>
-          <p:cNvPr id="17" name="Text 14"/>
+          <p:cNvPr id="13" name="Text 10"/>
           <p:cNvSpPr/>
           <p:nvPr/>
         </p:nvSpPr>
@@ -1624,7 +1508,7 @@
       </p:sp>
       <p:sp>
         <p:nvSpPr>
-          <p:cNvPr id="18" name="Text 15"/>
+          <p:cNvPr id="14" name="Text 11"/>
           <p:cNvSpPr/>
           <p:nvPr/>
         </p:nvSpPr>
@@ -1693,86 +1577,9 @@
           <a:chExt cx="0" cy="0"/>
         </a:xfrm>
       </p:grpSpPr>
-      <p:sp>
-        <p:nvSpPr>
-          <p:cNvPr id="2" name="Shape 0"/>
-          <p:cNvSpPr/>
-          <p:nvPr/>
-        </p:nvSpPr>
-        <p:spPr>
-          <a:xfrm>
-            <a:off x="0" y="6172200"/>
-            <a:ext cx="12191695" cy="685800"/>
-          </a:xfrm>
-          <a:prstGeom prst="rect">
-            <a:avLst/>
-          </a:prstGeom>
-          <a:solidFill>
-            <a:srgbClr val="D4112E"/>
-          </a:solidFill>
-          <a:ln w="12700">
-            <a:solidFill>
-              <a:srgbClr val="D4112E"/>
-            </a:solidFill>
-            <a:prstDash val="solid"/>
-          </a:ln>
-        </p:spPr>
-      </p:sp>
-      <p:sp>
-        <p:nvSpPr>
-          <p:cNvPr id="3" name="Shape 1"/>
-          <p:cNvSpPr/>
-          <p:nvPr/>
-        </p:nvSpPr>
-        <p:spPr>
-          <a:xfrm>
-            <a:off x="-1097280" y="5806440"/>
-            <a:ext cx="14386255" cy="822960"/>
-          </a:xfrm>
-          <a:prstGeom prst="ellipse">
-            <a:avLst/>
-          </a:prstGeom>
-          <a:solidFill>
-            <a:srgbClr val="D4112E"/>
-          </a:solidFill>
-          <a:ln w="12700">
-            <a:solidFill>
-              <a:srgbClr val="D4112E"/>
-            </a:solidFill>
-            <a:prstDash val="solid"/>
-          </a:ln>
-        </p:spPr>
-      </p:sp>
-      <p:sp>
-        <p:nvSpPr>
-          <p:cNvPr id="4" name="Shape 2"/>
-          <p:cNvSpPr/>
-          <p:nvPr/>
-        </p:nvSpPr>
-        <p:spPr>
-          <a:xfrm>
-            <a:off x="274320" y="201168"/>
-            <a:ext cx="713232" cy="713232"/>
-          </a:xfrm>
-          <a:prstGeom prst="roundRect">
-            <a:avLst>
-              <a:gd name="adj" fmla="val 15385"/>
-            </a:avLst>
-          </a:prstGeom>
-          <a:solidFill>
-            <a:srgbClr val="FFFFFF"/>
-          </a:solidFill>
-          <a:ln w="12700">
-            <a:solidFill>
-              <a:srgbClr val="FFFFFF"/>
-            </a:solidFill>
-            <a:prstDash val="solid"/>
-          </a:ln>
-        </p:spPr>
-      </p:sp>
       <p:pic>
         <p:nvPicPr>
-          <p:cNvPr id="5" name="Image 0" descr="preencoded.png">    </p:cNvPr>
+          <p:cNvPr id="2" name="Image 0" descr="preencoded.png">    </p:cNvPr>
           <p:cNvPicPr>
             <a:picLocks noChangeAspect="1"/>
           </p:cNvPicPr>
@@ -1786,8 +1593,8 @@
         </p:blipFill>
         <p:spPr>
           <a:xfrm>
-            <a:off x="310896" y="237744"/>
-            <a:ext cx="640080" cy="640080"/>
+            <a:off x="0" y="0"/>
+            <a:ext cx="12191695" cy="7048287"/>
           </a:xfrm>
           <a:prstGeom prst="rect">
             <a:avLst/>
@@ -1796,46 +1603,7 @@
       </p:pic>
       <p:sp>
         <p:nvSpPr>
-          <p:cNvPr id="6" name="Text 3"/>
-          <p:cNvSpPr/>
-          <p:nvPr/>
-        </p:nvSpPr>
-        <p:spPr>
-          <a:xfrm>
-            <a:off x="10820095" y="201168"/>
-            <a:ext cx="1051560" cy="502920"/>
-          </a:xfrm>
-          <a:prstGeom prst="rect">
-            <a:avLst/>
-          </a:prstGeom>
-          <a:noFill/>
-          <a:ln/>
-        </p:spPr>
-        <p:txBody>
-          <a:bodyPr wrap="square" rtlCol="0" anchor="ctr"/>
-          <a:lstStyle/>
-          <a:p>
-            <a:pPr algn="r" indent="0" marL="0">
-              <a:buNone/>
-            </a:pPr>
-            <a:r>
-              <a:rPr lang="en-US" sz="3400" b="1" dirty="0">
-                <a:solidFill>
-                  <a:srgbClr val="FFFFFF"/>
-                </a:solidFill>
-                <a:latin typeface="Arial" pitchFamily="34" charset="0"/>
-                <a:ea typeface="Arial" pitchFamily="34" charset="-122"/>
-                <a:cs typeface="Arial" pitchFamily="34" charset="-120"/>
-              </a:rPr>
-              <a:t>btn</a:t>
-            </a:r>
-            <a:endParaRPr lang="en-US" sz="3400" dirty="0"/>
-          </a:p>
-        </p:txBody>
-      </p:sp>
-      <p:sp>
-        <p:nvSpPr>
-          <p:cNvPr id="7" name="Text 4"/>
+          <p:cNvPr id="3" name="Text 0"/>
           <p:cNvSpPr/>
           <p:nvPr/>
         </p:nvSpPr>
@@ -1874,7 +1642,7 @@
       </p:sp>
       <p:sp>
         <p:nvSpPr>
-          <p:cNvPr id="8" name="Shape 5"/>
+          <p:cNvPr id="4" name="Shape 1"/>
           <p:cNvSpPr/>
           <p:nvPr/>
         </p:nvSpPr>
@@ -1901,7 +1669,7 @@
       </p:sp>
       <p:sp>
         <p:nvSpPr>
-          <p:cNvPr id="9" name="Text 6"/>
+          <p:cNvPr id="5" name="Text 2"/>
           <p:cNvSpPr/>
           <p:nvPr/>
         </p:nvSpPr>
@@ -1940,7 +1708,7 @@
       </p:sp>
       <p:sp>
         <p:nvSpPr>
-          <p:cNvPr id="10" name="Text 7"/>
+          <p:cNvPr id="6" name="Text 3"/>
           <p:cNvSpPr/>
           <p:nvPr/>
         </p:nvSpPr>
@@ -1979,7 +1747,7 @@
       </p:sp>
       <p:sp>
         <p:nvSpPr>
-          <p:cNvPr id="11" name="Shape 8"/>
+          <p:cNvPr id="7" name="Shape 4"/>
           <p:cNvSpPr/>
           <p:nvPr/>
         </p:nvSpPr>
@@ -2004,7 +1772,7 @@
       </p:sp>
       <p:sp>
         <p:nvSpPr>
-          <p:cNvPr id="12" name="Shape 9"/>
+          <p:cNvPr id="8" name="Shape 5"/>
           <p:cNvSpPr/>
           <p:nvPr/>
         </p:nvSpPr>
@@ -2031,7 +1799,7 @@
       </p:sp>
       <p:pic>
         <p:nvPicPr>
-          <p:cNvPr id="13" name="Image 1" descr="preencoded.png">    </p:cNvPr>
+          <p:cNvPr id="9" name="Image 1" descr="preencoded.png">    </p:cNvPr>
           <p:cNvPicPr>
             <a:picLocks noChangeAspect="1"/>
           </p:cNvPicPr>
@@ -2055,7 +1823,7 @@
       </p:pic>
       <p:sp>
         <p:nvSpPr>
-          <p:cNvPr id="14" name="Text 10"/>
+          <p:cNvPr id="10" name="Text 6"/>
           <p:cNvSpPr/>
           <p:nvPr/>
         </p:nvSpPr>
@@ -2096,7 +1864,7 @@
       </p:sp>
       <p:sp>
         <p:nvSpPr>
-          <p:cNvPr id="15" name="Shape 11"/>
+          <p:cNvPr id="11" name="Shape 7"/>
           <p:cNvSpPr/>
           <p:nvPr/>
         </p:nvSpPr>
@@ -2121,7 +1889,7 @@
       </p:sp>
       <p:sp>
         <p:nvSpPr>
-          <p:cNvPr id="16" name="Text 12"/>
+          <p:cNvPr id="12" name="Text 8"/>
           <p:cNvSpPr/>
           <p:nvPr/>
         </p:nvSpPr>
@@ -2160,7 +1928,7 @@
       </p:sp>
       <p:sp>
         <p:nvSpPr>
-          <p:cNvPr id="17" name="Shape 13"/>
+          <p:cNvPr id="13" name="Shape 9"/>
           <p:cNvSpPr/>
           <p:nvPr/>
         </p:nvSpPr>
@@ -2187,7 +1955,7 @@
       </p:sp>
       <p:sp>
         <p:nvSpPr>
-          <p:cNvPr id="18" name="Text 14"/>
+          <p:cNvPr id="14" name="Text 10"/>
           <p:cNvSpPr/>
           <p:nvPr/>
         </p:nvSpPr>
@@ -2226,13 +1994,13 @@
       </p:sp>
       <p:sp>
         <p:nvSpPr>
-          <p:cNvPr id="19" name="Shape 15"/>
-          <p:cNvSpPr/>
-          <p:nvPr/>
-        </p:nvSpPr>
-        <p:spPr>
-          <a:xfrm>
-            <a:off x="5254600" y="5925312"/>
+          <p:cNvPr id="15" name="Shape 11"/>
+          <p:cNvSpPr/>
+          <p:nvPr/>
+        </p:nvSpPr>
+        <p:spPr>
+          <a:xfrm>
+            <a:off x="5254600" y="6115599"/>
             <a:ext cx="1691640" cy="256032"/>
           </a:xfrm>
           <a:prstGeom prst="roundRect">
@@ -2253,13 +2021,13 @@
       </p:sp>
       <p:sp>
         <p:nvSpPr>
-          <p:cNvPr id="20" name="Text 16"/>
-          <p:cNvSpPr/>
-          <p:nvPr/>
-        </p:nvSpPr>
-        <p:spPr>
-          <a:xfrm>
-            <a:off x="5254600" y="5925312"/>
+          <p:cNvPr id="16" name="Text 12"/>
+          <p:cNvSpPr/>
+          <p:nvPr/>
+        </p:nvSpPr>
+        <p:spPr>
+          <a:xfrm>
+            <a:off x="5254600" y="6115599"/>
             <a:ext cx="1691640" cy="256032"/>
           </a:xfrm>
           <a:prstGeom prst="rect">
@@ -2292,13 +2060,13 @@
       </p:sp>
       <p:sp>
         <p:nvSpPr>
-          <p:cNvPr id="21" name="Shape 17"/>
-          <p:cNvSpPr/>
-          <p:nvPr/>
-        </p:nvSpPr>
-        <p:spPr>
-          <a:xfrm>
-            <a:off x="3883000" y="6199632"/>
+          <p:cNvPr id="17" name="Shape 13"/>
+          <p:cNvSpPr/>
+          <p:nvPr/>
+        </p:nvSpPr>
+        <p:spPr>
+          <a:xfrm>
+            <a:off x="3883000" y="6389919"/>
             <a:ext cx="4434840" cy="457200"/>
           </a:xfrm>
           <a:prstGeom prst="roundRect">
@@ -2319,13 +2087,13 @@
       </p:sp>
       <p:sp>
         <p:nvSpPr>
-          <p:cNvPr id="22" name="Shape 18"/>
-          <p:cNvSpPr/>
-          <p:nvPr/>
-        </p:nvSpPr>
-        <p:spPr>
-          <a:xfrm>
-            <a:off x="4084168" y="6309360"/>
+          <p:cNvPr id="18" name="Shape 14"/>
+          <p:cNvSpPr/>
+          <p:nvPr/>
+        </p:nvSpPr>
+        <p:spPr>
+          <a:xfrm>
+            <a:off x="4084168" y="6499647"/>
             <a:ext cx="91440" cy="91440"/>
           </a:xfrm>
           <a:prstGeom prst="ellipse">
@@ -2344,13 +2112,13 @@
       </p:sp>
       <p:sp>
         <p:nvSpPr>
-          <p:cNvPr id="23" name="Text 19"/>
-          <p:cNvSpPr/>
-          <p:nvPr/>
-        </p:nvSpPr>
-        <p:spPr>
-          <a:xfrm>
-            <a:off x="4212184" y="6263640"/>
+          <p:cNvPr id="19" name="Text 15"/>
+          <p:cNvSpPr/>
+          <p:nvPr/>
+        </p:nvSpPr>
+        <p:spPr>
+          <a:xfrm>
+            <a:off x="4212184" y="6453927"/>
             <a:ext cx="713232" cy="155448"/>
           </a:xfrm>
           <a:prstGeom prst="rect">
@@ -2383,13 +2151,13 @@
       </p:sp>
       <p:sp>
         <p:nvSpPr>
-          <p:cNvPr id="24" name="Text 20"/>
-          <p:cNvSpPr/>
-          <p:nvPr/>
-        </p:nvSpPr>
-        <p:spPr>
-          <a:xfrm>
-            <a:off x="4212184" y="6409944"/>
+          <p:cNvPr id="20" name="Text 16"/>
+          <p:cNvSpPr/>
+          <p:nvPr/>
+        </p:nvSpPr>
+        <p:spPr>
+          <a:xfrm>
+            <a:off x="4212184" y="6600231"/>
             <a:ext cx="713232" cy="155448"/>
           </a:xfrm>
           <a:prstGeom prst="rect">
@@ -2422,13 +2190,13 @@
       </p:sp>
       <p:sp>
         <p:nvSpPr>
-          <p:cNvPr id="25" name="Shape 21"/>
-          <p:cNvSpPr/>
-          <p:nvPr/>
-        </p:nvSpPr>
-        <p:spPr>
-          <a:xfrm>
-            <a:off x="4952848" y="6309360"/>
+          <p:cNvPr id="21" name="Shape 17"/>
+          <p:cNvSpPr/>
+          <p:nvPr/>
+        </p:nvSpPr>
+        <p:spPr>
+          <a:xfrm>
+            <a:off x="4952848" y="6499647"/>
             <a:ext cx="91440" cy="91440"/>
           </a:xfrm>
           <a:prstGeom prst="ellipse">
@@ -2447,13 +2215,13 @@
       </p:sp>
       <p:sp>
         <p:nvSpPr>
-          <p:cNvPr id="26" name="Text 22"/>
-          <p:cNvSpPr/>
-          <p:nvPr/>
-        </p:nvSpPr>
-        <p:spPr>
-          <a:xfrm>
-            <a:off x="5080864" y="6263640"/>
+          <p:cNvPr id="22" name="Text 18"/>
+          <p:cNvSpPr/>
+          <p:nvPr/>
+        </p:nvSpPr>
+        <p:spPr>
+          <a:xfrm>
+            <a:off x="5080864" y="6453927"/>
             <a:ext cx="713232" cy="155448"/>
           </a:xfrm>
           <a:prstGeom prst="rect">
@@ -2486,13 +2254,13 @@
       </p:sp>
       <p:sp>
         <p:nvSpPr>
-          <p:cNvPr id="27" name="Text 23"/>
-          <p:cNvSpPr/>
-          <p:nvPr/>
-        </p:nvSpPr>
-        <p:spPr>
-          <a:xfrm>
-            <a:off x="5080864" y="6409944"/>
+          <p:cNvPr id="23" name="Text 19"/>
+          <p:cNvSpPr/>
+          <p:nvPr/>
+        </p:nvSpPr>
+        <p:spPr>
+          <a:xfrm>
+            <a:off x="5080864" y="6600231"/>
             <a:ext cx="713232" cy="155448"/>
           </a:xfrm>
           <a:prstGeom prst="rect">
@@ -2525,13 +2293,13 @@
       </p:sp>
       <p:sp>
         <p:nvSpPr>
-          <p:cNvPr id="28" name="Shape 24"/>
-          <p:cNvSpPr/>
-          <p:nvPr/>
-        </p:nvSpPr>
-        <p:spPr>
-          <a:xfrm>
-            <a:off x="5821528" y="6309360"/>
+          <p:cNvPr id="24" name="Shape 20"/>
+          <p:cNvSpPr/>
+          <p:nvPr/>
+        </p:nvSpPr>
+        <p:spPr>
+          <a:xfrm>
+            <a:off x="5821528" y="6499647"/>
             <a:ext cx="91440" cy="91440"/>
           </a:xfrm>
           <a:prstGeom prst="ellipse">
@@ -2550,13 +2318,13 @@
       </p:sp>
       <p:sp>
         <p:nvSpPr>
-          <p:cNvPr id="29" name="Text 25"/>
-          <p:cNvSpPr/>
-          <p:nvPr/>
-        </p:nvSpPr>
-        <p:spPr>
-          <a:xfrm>
-            <a:off x="5949544" y="6263640"/>
+          <p:cNvPr id="25" name="Text 21"/>
+          <p:cNvSpPr/>
+          <p:nvPr/>
+        </p:nvSpPr>
+        <p:spPr>
+          <a:xfrm>
+            <a:off x="5949544" y="6453927"/>
             <a:ext cx="713232" cy="155448"/>
           </a:xfrm>
           <a:prstGeom prst="rect">
@@ -2589,13 +2357,13 @@
       </p:sp>
       <p:sp>
         <p:nvSpPr>
-          <p:cNvPr id="30" name="Text 26"/>
-          <p:cNvSpPr/>
-          <p:nvPr/>
-        </p:nvSpPr>
-        <p:spPr>
-          <a:xfrm>
-            <a:off x="5949544" y="6409944"/>
+          <p:cNvPr id="26" name="Text 22"/>
+          <p:cNvSpPr/>
+          <p:nvPr/>
+        </p:nvSpPr>
+        <p:spPr>
+          <a:xfrm>
+            <a:off x="5949544" y="6600231"/>
             <a:ext cx="713232" cy="155448"/>
           </a:xfrm>
           <a:prstGeom prst="rect">
@@ -2628,13 +2396,13 @@
       </p:sp>
       <p:sp>
         <p:nvSpPr>
-          <p:cNvPr id="31" name="Shape 27"/>
-          <p:cNvSpPr/>
-          <p:nvPr/>
-        </p:nvSpPr>
-        <p:spPr>
-          <a:xfrm>
-            <a:off x="6690208" y="6309360"/>
+          <p:cNvPr id="27" name="Shape 23"/>
+          <p:cNvSpPr/>
+          <p:nvPr/>
+        </p:nvSpPr>
+        <p:spPr>
+          <a:xfrm>
+            <a:off x="6690208" y="6499647"/>
             <a:ext cx="91440" cy="91440"/>
           </a:xfrm>
           <a:prstGeom prst="ellipse">
@@ -2653,13 +2421,13 @@
       </p:sp>
       <p:sp>
         <p:nvSpPr>
-          <p:cNvPr id="32" name="Text 28"/>
-          <p:cNvSpPr/>
-          <p:nvPr/>
-        </p:nvSpPr>
-        <p:spPr>
-          <a:xfrm>
-            <a:off x="6818224" y="6263640"/>
+          <p:cNvPr id="28" name="Text 24"/>
+          <p:cNvSpPr/>
+          <p:nvPr/>
+        </p:nvSpPr>
+        <p:spPr>
+          <a:xfrm>
+            <a:off x="6818224" y="6453927"/>
             <a:ext cx="713232" cy="155448"/>
           </a:xfrm>
           <a:prstGeom prst="rect">
@@ -2692,13 +2460,13 @@
       </p:sp>
       <p:sp>
         <p:nvSpPr>
-          <p:cNvPr id="33" name="Text 29"/>
-          <p:cNvSpPr/>
-          <p:nvPr/>
-        </p:nvSpPr>
-        <p:spPr>
-          <a:xfrm>
-            <a:off x="6818224" y="6409944"/>
+          <p:cNvPr id="29" name="Text 25"/>
+          <p:cNvSpPr/>
+          <p:nvPr/>
+        </p:nvSpPr>
+        <p:spPr>
+          <a:xfrm>
+            <a:off x="6818224" y="6600231"/>
             <a:ext cx="713232" cy="155448"/>
           </a:xfrm>
           <a:prstGeom prst="rect">
@@ -2731,13 +2499,13 @@
       </p:sp>
       <p:sp>
         <p:nvSpPr>
-          <p:cNvPr id="34" name="Shape 30"/>
-          <p:cNvSpPr/>
-          <p:nvPr/>
-        </p:nvSpPr>
-        <p:spPr>
-          <a:xfrm>
-            <a:off x="7558888" y="6309360"/>
+          <p:cNvPr id="30" name="Shape 26"/>
+          <p:cNvSpPr/>
+          <p:nvPr/>
+        </p:nvSpPr>
+        <p:spPr>
+          <a:xfrm>
+            <a:off x="7558888" y="6499647"/>
             <a:ext cx="91440" cy="91440"/>
           </a:xfrm>
           <a:prstGeom prst="ellipse">
@@ -2756,13 +2524,13 @@
       </p:sp>
       <p:sp>
         <p:nvSpPr>
-          <p:cNvPr id="35" name="Text 31"/>
-          <p:cNvSpPr/>
-          <p:nvPr/>
-        </p:nvSpPr>
-        <p:spPr>
-          <a:xfrm>
-            <a:off x="7686904" y="6263640"/>
+          <p:cNvPr id="31" name="Text 27"/>
+          <p:cNvSpPr/>
+          <p:nvPr/>
+        </p:nvSpPr>
+        <p:spPr>
+          <a:xfrm>
+            <a:off x="7686904" y="6453927"/>
             <a:ext cx="713232" cy="155448"/>
           </a:xfrm>
           <a:prstGeom prst="rect">
@@ -2795,13 +2563,13 @@
       </p:sp>
       <p:sp>
         <p:nvSpPr>
-          <p:cNvPr id="36" name="Text 32"/>
-          <p:cNvSpPr/>
-          <p:nvPr/>
-        </p:nvSpPr>
-        <p:spPr>
-          <a:xfrm>
-            <a:off x="7686904" y="6409944"/>
+          <p:cNvPr id="32" name="Text 28"/>
+          <p:cNvSpPr/>
+          <p:nvPr/>
+        </p:nvSpPr>
+        <p:spPr>
+          <a:xfrm>
+            <a:off x="7686904" y="6600231"/>
             <a:ext cx="713232" cy="155448"/>
           </a:xfrm>
           <a:prstGeom prst="rect">
@@ -2864,86 +2632,9 @@
           <a:chExt cx="0" cy="0"/>
         </a:xfrm>
       </p:grpSpPr>
-      <p:sp>
-        <p:nvSpPr>
-          <p:cNvPr id="2" name="Shape 0"/>
-          <p:cNvSpPr/>
-          <p:nvPr/>
-        </p:nvSpPr>
-        <p:spPr>
-          <a:xfrm>
-            <a:off x="0" y="6172200"/>
-            <a:ext cx="12191695" cy="685800"/>
-          </a:xfrm>
-          <a:prstGeom prst="rect">
-            <a:avLst/>
-          </a:prstGeom>
-          <a:solidFill>
-            <a:srgbClr val="D4112E"/>
-          </a:solidFill>
-          <a:ln w="12700">
-            <a:solidFill>
-              <a:srgbClr val="D4112E"/>
-            </a:solidFill>
-            <a:prstDash val="solid"/>
-          </a:ln>
-        </p:spPr>
-      </p:sp>
-      <p:sp>
-        <p:nvSpPr>
-          <p:cNvPr id="3" name="Shape 1"/>
-          <p:cNvSpPr/>
-          <p:nvPr/>
-        </p:nvSpPr>
-        <p:spPr>
-          <a:xfrm>
-            <a:off x="-1097280" y="5806440"/>
-            <a:ext cx="14386255" cy="822960"/>
-          </a:xfrm>
-          <a:prstGeom prst="ellipse">
-            <a:avLst/>
-          </a:prstGeom>
-          <a:solidFill>
-            <a:srgbClr val="D4112E"/>
-          </a:solidFill>
-          <a:ln w="12700">
-            <a:solidFill>
-              <a:srgbClr val="D4112E"/>
-            </a:solidFill>
-            <a:prstDash val="solid"/>
-          </a:ln>
-        </p:spPr>
-      </p:sp>
-      <p:sp>
-        <p:nvSpPr>
-          <p:cNvPr id="4" name="Shape 2"/>
-          <p:cNvSpPr/>
-          <p:nvPr/>
-        </p:nvSpPr>
-        <p:spPr>
-          <a:xfrm>
-            <a:off x="274320" y="201168"/>
-            <a:ext cx="713232" cy="713232"/>
-          </a:xfrm>
-          <a:prstGeom prst="roundRect">
-            <a:avLst>
-              <a:gd name="adj" fmla="val 15385"/>
-            </a:avLst>
-          </a:prstGeom>
-          <a:solidFill>
-            <a:srgbClr val="FFFFFF"/>
-          </a:solidFill>
-          <a:ln w="12700">
-            <a:solidFill>
-              <a:srgbClr val="FFFFFF"/>
-            </a:solidFill>
-            <a:prstDash val="solid"/>
-          </a:ln>
-        </p:spPr>
-      </p:sp>
       <p:pic>
         <p:nvPicPr>
-          <p:cNvPr id="5" name="Image 0" descr="preencoded.png">    </p:cNvPr>
+          <p:cNvPr id="2" name="Image 0" descr="preencoded.png">    </p:cNvPr>
           <p:cNvPicPr>
             <a:picLocks noChangeAspect="1"/>
           </p:cNvPicPr>
@@ -2957,8 +2648,8 @@
         </p:blipFill>
         <p:spPr>
           <a:xfrm>
-            <a:off x="310896" y="237744"/>
-            <a:ext cx="640080" cy="640080"/>
+            <a:off x="0" y="0"/>
+            <a:ext cx="12191695" cy="7048287"/>
           </a:xfrm>
           <a:prstGeom prst="rect">
             <a:avLst/>
@@ -2967,46 +2658,7 @@
       </p:pic>
       <p:sp>
         <p:nvSpPr>
-          <p:cNvPr id="6" name="Text 3"/>
-          <p:cNvSpPr/>
-          <p:nvPr/>
-        </p:nvSpPr>
-        <p:spPr>
-          <a:xfrm>
-            <a:off x="10820095" y="201168"/>
-            <a:ext cx="1051560" cy="502920"/>
-          </a:xfrm>
-          <a:prstGeom prst="rect">
-            <a:avLst/>
-          </a:prstGeom>
-          <a:noFill/>
-          <a:ln/>
-        </p:spPr>
-        <p:txBody>
-          <a:bodyPr wrap="square" rtlCol="0" anchor="ctr"/>
-          <a:lstStyle/>
-          <a:p>
-            <a:pPr algn="r" indent="0" marL="0">
-              <a:buNone/>
-            </a:pPr>
-            <a:r>
-              <a:rPr lang="en-US" sz="3400" b="1" dirty="0">
-                <a:solidFill>
-                  <a:srgbClr val="FFFFFF"/>
-                </a:solidFill>
-                <a:latin typeface="Arial" pitchFamily="34" charset="0"/>
-                <a:ea typeface="Arial" pitchFamily="34" charset="-122"/>
-                <a:cs typeface="Arial" pitchFamily="34" charset="-120"/>
-              </a:rPr>
-              <a:t>btn</a:t>
-            </a:r>
-            <a:endParaRPr lang="en-US" sz="3400" dirty="0"/>
-          </a:p>
-        </p:txBody>
-      </p:sp>
-      <p:sp>
-        <p:nvSpPr>
-          <p:cNvPr id="7" name="Text 4"/>
+          <p:cNvPr id="3" name="Text 0"/>
           <p:cNvSpPr/>
           <p:nvPr/>
         </p:nvSpPr>
@@ -3045,7 +2697,7 @@
       </p:sp>
       <p:sp>
         <p:nvSpPr>
-          <p:cNvPr id="8" name="Shape 5"/>
+          <p:cNvPr id="4" name="Shape 1"/>
           <p:cNvSpPr/>
           <p:nvPr/>
         </p:nvSpPr>
@@ -3072,7 +2724,7 @@
       </p:sp>
       <p:sp>
         <p:nvSpPr>
-          <p:cNvPr id="9" name="Text 6"/>
+          <p:cNvPr id="5" name="Text 2"/>
           <p:cNvSpPr/>
           <p:nvPr/>
         </p:nvSpPr>
@@ -3111,7 +2763,7 @@
       </p:sp>
       <p:sp>
         <p:nvSpPr>
-          <p:cNvPr id="10" name="Text 7"/>
+          <p:cNvPr id="6" name="Text 3"/>
           <p:cNvSpPr/>
           <p:nvPr/>
         </p:nvSpPr>
@@ -3150,7 +2802,7 @@
       </p:sp>
       <p:sp>
         <p:nvSpPr>
-          <p:cNvPr id="11" name="Shape 8"/>
+          <p:cNvPr id="7" name="Shape 4"/>
           <p:cNvSpPr/>
           <p:nvPr/>
         </p:nvSpPr>
@@ -3175,7 +2827,7 @@
       </p:sp>
       <p:sp>
         <p:nvSpPr>
-          <p:cNvPr id="12" name="Shape 9"/>
+          <p:cNvPr id="8" name="Shape 5"/>
           <p:cNvSpPr/>
           <p:nvPr/>
         </p:nvSpPr>
@@ -3202,7 +2854,7 @@
       </p:sp>
       <p:pic>
         <p:nvPicPr>
-          <p:cNvPr id="13" name="Image 1" descr="preencoded.png">    </p:cNvPr>
+          <p:cNvPr id="9" name="Image 1" descr="preencoded.png">    </p:cNvPr>
           <p:cNvPicPr>
             <a:picLocks noChangeAspect="1"/>
           </p:cNvPicPr>
@@ -3226,7 +2878,7 @@
       </p:pic>
       <p:sp>
         <p:nvSpPr>
-          <p:cNvPr id="14" name="Text 10"/>
+          <p:cNvPr id="10" name="Text 6"/>
           <p:cNvSpPr/>
           <p:nvPr/>
         </p:nvSpPr>
@@ -3267,7 +2919,7 @@
       </p:sp>
       <p:sp>
         <p:nvSpPr>
-          <p:cNvPr id="15" name="Shape 11"/>
+          <p:cNvPr id="11" name="Shape 7"/>
           <p:cNvSpPr/>
           <p:nvPr/>
         </p:nvSpPr>
@@ -3292,7 +2944,7 @@
       </p:sp>
       <p:sp>
         <p:nvSpPr>
-          <p:cNvPr id="16" name="Text 12"/>
+          <p:cNvPr id="12" name="Text 8"/>
           <p:cNvSpPr/>
           <p:nvPr/>
         </p:nvSpPr>
@@ -3331,7 +2983,7 @@
       </p:sp>
       <p:sp>
         <p:nvSpPr>
-          <p:cNvPr id="17" name="Shape 13"/>
+          <p:cNvPr id="13" name="Shape 9"/>
           <p:cNvSpPr/>
           <p:nvPr/>
         </p:nvSpPr>
@@ -3358,7 +3010,7 @@
       </p:sp>
       <p:sp>
         <p:nvSpPr>
-          <p:cNvPr id="18" name="Text 14"/>
+          <p:cNvPr id="14" name="Text 10"/>
           <p:cNvSpPr/>
           <p:nvPr/>
         </p:nvSpPr>
@@ -3397,7 +3049,7 @@
       </p:sp>
       <p:sp>
         <p:nvSpPr>
-          <p:cNvPr id="19" name="Shape 15"/>
+          <p:cNvPr id="15" name="Shape 11"/>
           <p:cNvSpPr/>
           <p:nvPr/>
         </p:nvSpPr>
@@ -3424,7 +3076,7 @@
       </p:sp>
       <p:pic>
         <p:nvPicPr>
-          <p:cNvPr id="20" name="Image 2" descr="preencoded.png">    </p:cNvPr>
+          <p:cNvPr id="16" name="Image 2" descr="preencoded.png">    </p:cNvPr>
           <p:cNvPicPr>
             <a:picLocks noChangeAspect="1"/>
           </p:cNvPicPr>
@@ -3448,7 +3100,7 @@
       </p:pic>
       <p:sp>
         <p:nvSpPr>
-          <p:cNvPr id="21" name="Text 16"/>
+          <p:cNvPr id="17" name="Text 12"/>
           <p:cNvSpPr/>
           <p:nvPr/>
         </p:nvSpPr>
@@ -3489,7 +3141,7 @@
       </p:sp>
       <p:sp>
         <p:nvSpPr>
-          <p:cNvPr id="22" name="Shape 17"/>
+          <p:cNvPr id="18" name="Shape 13"/>
           <p:cNvSpPr/>
           <p:nvPr/>
         </p:nvSpPr>
@@ -3514,7 +3166,7 @@
       </p:sp>
       <p:sp>
         <p:nvSpPr>
-          <p:cNvPr id="23" name="Text 18"/>
+          <p:cNvPr id="19" name="Text 14"/>
           <p:cNvSpPr/>
           <p:nvPr/>
         </p:nvSpPr>
@@ -3553,7 +3205,7 @@
       </p:sp>
       <p:sp>
         <p:nvSpPr>
-          <p:cNvPr id="24" name="Shape 19"/>
+          <p:cNvPr id="20" name="Shape 15"/>
           <p:cNvSpPr/>
           <p:nvPr/>
         </p:nvSpPr>
@@ -3580,7 +3232,7 @@
       </p:sp>
       <p:sp>
         <p:nvSpPr>
-          <p:cNvPr id="25" name="Text 20"/>
+          <p:cNvPr id="21" name="Text 16"/>
           <p:cNvSpPr/>
           <p:nvPr/>
         </p:nvSpPr>
@@ -3619,13 +3271,13 @@
       </p:sp>
       <p:sp>
         <p:nvSpPr>
-          <p:cNvPr id="26" name="Shape 21"/>
-          <p:cNvSpPr/>
-          <p:nvPr/>
-        </p:nvSpPr>
-        <p:spPr>
-          <a:xfrm>
-            <a:off x="5254600" y="5925312"/>
+          <p:cNvPr id="22" name="Shape 17"/>
+          <p:cNvSpPr/>
+          <p:nvPr/>
+        </p:nvSpPr>
+        <p:spPr>
+          <a:xfrm>
+            <a:off x="5254600" y="6115599"/>
             <a:ext cx="1691640" cy="256032"/>
           </a:xfrm>
           <a:prstGeom prst="roundRect">
@@ -3646,13 +3298,13 @@
       </p:sp>
       <p:sp>
         <p:nvSpPr>
-          <p:cNvPr id="27" name="Text 22"/>
-          <p:cNvSpPr/>
-          <p:nvPr/>
-        </p:nvSpPr>
-        <p:spPr>
-          <a:xfrm>
-            <a:off x="5254600" y="5925312"/>
+          <p:cNvPr id="23" name="Text 18"/>
+          <p:cNvSpPr/>
+          <p:nvPr/>
+        </p:nvSpPr>
+        <p:spPr>
+          <a:xfrm>
+            <a:off x="5254600" y="6115599"/>
             <a:ext cx="1691640" cy="256032"/>
           </a:xfrm>
           <a:prstGeom prst="rect">
@@ -3685,13 +3337,13 @@
       </p:sp>
       <p:sp>
         <p:nvSpPr>
-          <p:cNvPr id="28" name="Shape 23"/>
-          <p:cNvSpPr/>
-          <p:nvPr/>
-        </p:nvSpPr>
-        <p:spPr>
-          <a:xfrm>
-            <a:off x="3883000" y="6199632"/>
+          <p:cNvPr id="24" name="Shape 19"/>
+          <p:cNvSpPr/>
+          <p:nvPr/>
+        </p:nvSpPr>
+        <p:spPr>
+          <a:xfrm>
+            <a:off x="3883000" y="6389919"/>
             <a:ext cx="4434840" cy="457200"/>
           </a:xfrm>
           <a:prstGeom prst="roundRect">
@@ -3712,13 +3364,13 @@
       </p:sp>
       <p:sp>
         <p:nvSpPr>
-          <p:cNvPr id="29" name="Shape 24"/>
-          <p:cNvSpPr/>
-          <p:nvPr/>
-        </p:nvSpPr>
-        <p:spPr>
-          <a:xfrm>
-            <a:off x="4084168" y="6309360"/>
+          <p:cNvPr id="25" name="Shape 20"/>
+          <p:cNvSpPr/>
+          <p:nvPr/>
+        </p:nvSpPr>
+        <p:spPr>
+          <a:xfrm>
+            <a:off x="4084168" y="6499647"/>
             <a:ext cx="91440" cy="91440"/>
           </a:xfrm>
           <a:prstGeom prst="ellipse">
@@ -3737,13 +3389,13 @@
       </p:sp>
       <p:sp>
         <p:nvSpPr>
-          <p:cNvPr id="30" name="Text 25"/>
-          <p:cNvSpPr/>
-          <p:nvPr/>
-        </p:nvSpPr>
-        <p:spPr>
-          <a:xfrm>
-            <a:off x="4212184" y="6263640"/>
+          <p:cNvPr id="26" name="Text 21"/>
+          <p:cNvSpPr/>
+          <p:nvPr/>
+        </p:nvSpPr>
+        <p:spPr>
+          <a:xfrm>
+            <a:off x="4212184" y="6453927"/>
             <a:ext cx="713232" cy="155448"/>
           </a:xfrm>
           <a:prstGeom prst="rect">
@@ -3776,13 +3428,13 @@
       </p:sp>
       <p:sp>
         <p:nvSpPr>
-          <p:cNvPr id="31" name="Text 26"/>
-          <p:cNvSpPr/>
-          <p:nvPr/>
-        </p:nvSpPr>
-        <p:spPr>
-          <a:xfrm>
-            <a:off x="4212184" y="6409944"/>
+          <p:cNvPr id="27" name="Text 22"/>
+          <p:cNvSpPr/>
+          <p:nvPr/>
+        </p:nvSpPr>
+        <p:spPr>
+          <a:xfrm>
+            <a:off x="4212184" y="6600231"/>
             <a:ext cx="713232" cy="155448"/>
           </a:xfrm>
           <a:prstGeom prst="rect">
@@ -3815,13 +3467,13 @@
       </p:sp>
       <p:sp>
         <p:nvSpPr>
-          <p:cNvPr id="32" name="Shape 27"/>
-          <p:cNvSpPr/>
-          <p:nvPr/>
-        </p:nvSpPr>
-        <p:spPr>
-          <a:xfrm>
-            <a:off x="4952848" y="6309360"/>
+          <p:cNvPr id="28" name="Shape 23"/>
+          <p:cNvSpPr/>
+          <p:nvPr/>
+        </p:nvSpPr>
+        <p:spPr>
+          <a:xfrm>
+            <a:off x="4952848" y="6499647"/>
             <a:ext cx="91440" cy="91440"/>
           </a:xfrm>
           <a:prstGeom prst="ellipse">
@@ -3840,13 +3492,13 @@
       </p:sp>
       <p:sp>
         <p:nvSpPr>
-          <p:cNvPr id="33" name="Text 28"/>
-          <p:cNvSpPr/>
-          <p:nvPr/>
-        </p:nvSpPr>
-        <p:spPr>
-          <a:xfrm>
-            <a:off x="5080864" y="6263640"/>
+          <p:cNvPr id="29" name="Text 24"/>
+          <p:cNvSpPr/>
+          <p:nvPr/>
+        </p:nvSpPr>
+        <p:spPr>
+          <a:xfrm>
+            <a:off x="5080864" y="6453927"/>
             <a:ext cx="713232" cy="155448"/>
           </a:xfrm>
           <a:prstGeom prst="rect">
@@ -3879,13 +3531,13 @@
       </p:sp>
       <p:sp>
         <p:nvSpPr>
-          <p:cNvPr id="34" name="Text 29"/>
-          <p:cNvSpPr/>
-          <p:nvPr/>
-        </p:nvSpPr>
-        <p:spPr>
-          <a:xfrm>
-            <a:off x="5080864" y="6409944"/>
+          <p:cNvPr id="30" name="Text 25"/>
+          <p:cNvSpPr/>
+          <p:nvPr/>
+        </p:nvSpPr>
+        <p:spPr>
+          <a:xfrm>
+            <a:off x="5080864" y="6600231"/>
             <a:ext cx="713232" cy="155448"/>
           </a:xfrm>
           <a:prstGeom prst="rect">
@@ -3918,13 +3570,13 @@
       </p:sp>
       <p:sp>
         <p:nvSpPr>
-          <p:cNvPr id="35" name="Shape 30"/>
-          <p:cNvSpPr/>
-          <p:nvPr/>
-        </p:nvSpPr>
-        <p:spPr>
-          <a:xfrm>
-            <a:off x="5821528" y="6309360"/>
+          <p:cNvPr id="31" name="Shape 26"/>
+          <p:cNvSpPr/>
+          <p:nvPr/>
+        </p:nvSpPr>
+        <p:spPr>
+          <a:xfrm>
+            <a:off x="5821528" y="6499647"/>
             <a:ext cx="91440" cy="91440"/>
           </a:xfrm>
           <a:prstGeom prst="ellipse">
@@ -3943,13 +3595,13 @@
       </p:sp>
       <p:sp>
         <p:nvSpPr>
-          <p:cNvPr id="36" name="Text 31"/>
-          <p:cNvSpPr/>
-          <p:nvPr/>
-        </p:nvSpPr>
-        <p:spPr>
-          <a:xfrm>
-            <a:off x="5949544" y="6263640"/>
+          <p:cNvPr id="32" name="Text 27"/>
+          <p:cNvSpPr/>
+          <p:nvPr/>
+        </p:nvSpPr>
+        <p:spPr>
+          <a:xfrm>
+            <a:off x="5949544" y="6453927"/>
             <a:ext cx="713232" cy="155448"/>
           </a:xfrm>
           <a:prstGeom prst="rect">
@@ -3982,13 +3634,13 @@
       </p:sp>
       <p:sp>
         <p:nvSpPr>
-          <p:cNvPr id="37" name="Text 32"/>
-          <p:cNvSpPr/>
-          <p:nvPr/>
-        </p:nvSpPr>
-        <p:spPr>
-          <a:xfrm>
-            <a:off x="5949544" y="6409944"/>
+          <p:cNvPr id="33" name="Text 28"/>
+          <p:cNvSpPr/>
+          <p:nvPr/>
+        </p:nvSpPr>
+        <p:spPr>
+          <a:xfrm>
+            <a:off x="5949544" y="6600231"/>
             <a:ext cx="713232" cy="155448"/>
           </a:xfrm>
           <a:prstGeom prst="rect">
@@ -4021,13 +3673,13 @@
       </p:sp>
       <p:sp>
         <p:nvSpPr>
-          <p:cNvPr id="38" name="Shape 33"/>
-          <p:cNvSpPr/>
-          <p:nvPr/>
-        </p:nvSpPr>
-        <p:spPr>
-          <a:xfrm>
-            <a:off x="6690208" y="6309360"/>
+          <p:cNvPr id="34" name="Shape 29"/>
+          <p:cNvSpPr/>
+          <p:nvPr/>
+        </p:nvSpPr>
+        <p:spPr>
+          <a:xfrm>
+            <a:off x="6690208" y="6499647"/>
             <a:ext cx="91440" cy="91440"/>
           </a:xfrm>
           <a:prstGeom prst="ellipse">
@@ -4046,13 +3698,13 @@
       </p:sp>
       <p:sp>
         <p:nvSpPr>
-          <p:cNvPr id="39" name="Text 34"/>
-          <p:cNvSpPr/>
-          <p:nvPr/>
-        </p:nvSpPr>
-        <p:spPr>
-          <a:xfrm>
-            <a:off x="6818224" y="6263640"/>
+          <p:cNvPr id="35" name="Text 30"/>
+          <p:cNvSpPr/>
+          <p:nvPr/>
+        </p:nvSpPr>
+        <p:spPr>
+          <a:xfrm>
+            <a:off x="6818224" y="6453927"/>
             <a:ext cx="713232" cy="155448"/>
           </a:xfrm>
           <a:prstGeom prst="rect">
@@ -4085,13 +3737,13 @@
       </p:sp>
       <p:sp>
         <p:nvSpPr>
-          <p:cNvPr id="40" name="Text 35"/>
-          <p:cNvSpPr/>
-          <p:nvPr/>
-        </p:nvSpPr>
-        <p:spPr>
-          <a:xfrm>
-            <a:off x="6818224" y="6409944"/>
+          <p:cNvPr id="36" name="Text 31"/>
+          <p:cNvSpPr/>
+          <p:nvPr/>
+        </p:nvSpPr>
+        <p:spPr>
+          <a:xfrm>
+            <a:off x="6818224" y="6600231"/>
             <a:ext cx="713232" cy="155448"/>
           </a:xfrm>
           <a:prstGeom prst="rect">
@@ -4124,13 +3776,13 @@
       </p:sp>
       <p:sp>
         <p:nvSpPr>
-          <p:cNvPr id="41" name="Shape 36"/>
-          <p:cNvSpPr/>
-          <p:nvPr/>
-        </p:nvSpPr>
-        <p:spPr>
-          <a:xfrm>
-            <a:off x="7558888" y="6309360"/>
+          <p:cNvPr id="37" name="Shape 32"/>
+          <p:cNvSpPr/>
+          <p:nvPr/>
+        </p:nvSpPr>
+        <p:spPr>
+          <a:xfrm>
+            <a:off x="7558888" y="6499647"/>
             <a:ext cx="91440" cy="91440"/>
           </a:xfrm>
           <a:prstGeom prst="ellipse">
@@ -4149,13 +3801,13 @@
       </p:sp>
       <p:sp>
         <p:nvSpPr>
-          <p:cNvPr id="42" name="Text 37"/>
-          <p:cNvSpPr/>
-          <p:nvPr/>
-        </p:nvSpPr>
-        <p:spPr>
-          <a:xfrm>
-            <a:off x="7686904" y="6263640"/>
+          <p:cNvPr id="38" name="Text 33"/>
+          <p:cNvSpPr/>
+          <p:nvPr/>
+        </p:nvSpPr>
+        <p:spPr>
+          <a:xfrm>
+            <a:off x="7686904" y="6453927"/>
             <a:ext cx="713232" cy="155448"/>
           </a:xfrm>
           <a:prstGeom prst="rect">
@@ -4188,13 +3840,13 @@
       </p:sp>
       <p:sp>
         <p:nvSpPr>
-          <p:cNvPr id="43" name="Text 38"/>
-          <p:cNvSpPr/>
-          <p:nvPr/>
-        </p:nvSpPr>
-        <p:spPr>
-          <a:xfrm>
-            <a:off x="7686904" y="6409944"/>
+          <p:cNvPr id="39" name="Text 34"/>
+          <p:cNvSpPr/>
+          <p:nvPr/>
+        </p:nvSpPr>
+        <p:spPr>
+          <a:xfrm>
+            <a:off x="7686904" y="6600231"/>
             <a:ext cx="713232" cy="155448"/>
           </a:xfrm>
           <a:prstGeom prst="rect">

--- a/ranking-uji-route.pptx
+++ b/ranking-uji-route.pptx
@@ -1156,9 +1156,9 @@
                 <a:solidFill>
                   <a:srgbClr val="FFFFFF"/>
                 </a:solidFill>
-                <a:latin typeface="Arial" pitchFamily="34" charset="0"/>
-                <a:ea typeface="Arial" pitchFamily="34" charset="-122"/>
-                <a:cs typeface="Arial" pitchFamily="34" charset="-120"/>
+                <a:latin typeface="Aptos" pitchFamily="34" charset="0"/>
+                <a:ea typeface="Aptos" pitchFamily="34" charset="-122"/>
+                <a:cs typeface="Aptos" pitchFamily="34" charset="-120"/>
               </a:rPr>
               <a:t>Service Drill Ranking</a:t>
             </a:r>
@@ -1224,9 +1224,9 @@
                 <a:solidFill>
                   <a:srgbClr val="FFFFFF"/>
                 </a:solidFill>
-                <a:latin typeface="Arial" pitchFamily="34" charset="0"/>
-                <a:ea typeface="Arial" pitchFamily="34" charset="-122"/>
-                <a:cs typeface="Arial" pitchFamily="34" charset="-120"/>
+                <a:latin typeface="Aptos" pitchFamily="34" charset="0"/>
+                <a:ea typeface="Aptos" pitchFamily="34" charset="-122"/>
+                <a:cs typeface="Aptos" pitchFamily="34" charset="-120"/>
               </a:rPr>
               <a:t>Semua unit</a:t>
             </a:r>
@@ -1265,9 +1265,9 @@
                 <a:solidFill>
                   <a:srgbClr val="FFFFFF"/>
                 </a:solidFill>
-                <a:latin typeface="Arial" pitchFamily="34" charset="0"/>
-                <a:ea typeface="Arial" pitchFamily="34" charset="-122"/>
-                <a:cs typeface="Arial" pitchFamily="34" charset="-120"/>
+                <a:latin typeface="Aptos" pitchFamily="34" charset="0"/>
+                <a:ea typeface="Aptos" pitchFamily="34" charset="-122"/>
+                <a:cs typeface="Aptos" pitchFamily="34" charset="-120"/>
               </a:rPr>
               <a:t>Semua posisi</a:t>
             </a:r>
@@ -1304,9 +1304,9 @@
                 <a:solidFill>
                   <a:srgbClr val="FFFFFF"/>
                 </a:solidFill>
-                <a:latin typeface="Arial" pitchFamily="34" charset="0"/>
-                <a:ea typeface="Arial" pitchFamily="34" charset="-122"/>
-                <a:cs typeface="Arial" pitchFamily="34" charset="-120"/>
+                <a:latin typeface="Aptos" pitchFamily="34" charset="0"/>
+                <a:ea typeface="Aptos" pitchFamily="34" charset="-122"/>
+                <a:cs typeface="Aptos" pitchFamily="34" charset="-120"/>
               </a:rPr>
               <a:t>Uji Ranking</a:t>
             </a:r>
@@ -1343,9 +1343,9 @@
                 <a:solidFill>
                   <a:srgbClr val="FFFFFF"/>
                 </a:solidFill>
-                <a:latin typeface="Arial" pitchFamily="34" charset="0"/>
-                <a:ea typeface="Arial" pitchFamily="34" charset="-122"/>
-                <a:cs typeface="Arial" pitchFamily="34" charset="-120"/>
+                <a:latin typeface="Aptos" pitchFamily="34" charset="0"/>
+                <a:ea typeface="Aptos" pitchFamily="34" charset="-122"/>
+                <a:cs typeface="Aptos" pitchFamily="34" charset="-120"/>
               </a:rPr>
               <a:t>Jenis kantor</a:t>
             </a:r>
@@ -1382,9 +1382,9 @@
                 <a:solidFill>
                   <a:srgbClr val="FFFFFF"/>
                 </a:solidFill>
-                <a:latin typeface="Arial" pitchFamily="34" charset="0"/>
-                <a:ea typeface="Arial" pitchFamily="34" charset="-122"/>
-                <a:cs typeface="Arial" pitchFamily="34" charset="-120"/>
+                <a:latin typeface="Aptos" pitchFamily="34" charset="0"/>
+                <a:ea typeface="Aptos" pitchFamily="34" charset="-122"/>
+                <a:cs typeface="Aptos" pitchFamily="34" charset="-120"/>
               </a:rPr>
               <a:t>: Semua jenis</a:t>
             </a:r>
@@ -1421,9 +1421,9 @@
                 <a:solidFill>
                   <a:srgbClr val="FFFFFF"/>
                 </a:solidFill>
-                <a:latin typeface="Arial" pitchFamily="34" charset="0"/>
-                <a:ea typeface="Arial" pitchFamily="34" charset="-122"/>
-                <a:cs typeface="Arial" pitchFamily="34" charset="-120"/>
+                <a:latin typeface="Aptos" pitchFamily="34" charset="0"/>
+                <a:ea typeface="Aptos" pitchFamily="34" charset="-122"/>
+                <a:cs typeface="Aptos" pitchFamily="34" charset="-120"/>
               </a:rPr>
               <a:t>Unit / cabang</a:t>
             </a:r>
@@ -1460,9 +1460,9 @@
                 <a:solidFill>
                   <a:srgbClr val="FFFFFF"/>
                 </a:solidFill>
-                <a:latin typeface="Arial" pitchFamily="34" charset="0"/>
-                <a:ea typeface="Arial" pitchFamily="34" charset="-122"/>
-                <a:cs typeface="Arial" pitchFamily="34" charset="-120"/>
+                <a:latin typeface="Aptos" pitchFamily="34" charset="0"/>
+                <a:ea typeface="Aptos" pitchFamily="34" charset="-122"/>
+                <a:cs typeface="Aptos" pitchFamily="34" charset="-120"/>
               </a:rPr>
               <a:t>: Semua unit</a:t>
             </a:r>
@@ -1499,9 +1499,9 @@
                 <a:solidFill>
                   <a:srgbClr val="FFFFFF"/>
                 </a:solidFill>
-                <a:latin typeface="Arial" pitchFamily="34" charset="0"/>
-                <a:ea typeface="Arial" pitchFamily="34" charset="-122"/>
-                <a:cs typeface="Arial" pitchFamily="34" charset="-120"/>
+                <a:latin typeface="Aptos" pitchFamily="34" charset="0"/>
+                <a:ea typeface="Aptos" pitchFamily="34" charset="-122"/>
+                <a:cs typeface="Aptos" pitchFamily="34" charset="-120"/>
               </a:rPr>
               <a:t>Posisi dinilai</a:t>
             </a:r>
@@ -1538,9 +1538,9 @@
                 <a:solidFill>
                   <a:srgbClr val="FFFFFF"/>
                 </a:solidFill>
-                <a:latin typeface="Arial" pitchFamily="34" charset="0"/>
-                <a:ea typeface="Arial" pitchFamily="34" charset="-122"/>
-                <a:cs typeface="Arial" pitchFamily="34" charset="-120"/>
+                <a:latin typeface="Aptos" pitchFamily="34" charset="0"/>
+                <a:ea typeface="Aptos" pitchFamily="34" charset="-122"/>
+                <a:cs typeface="Aptos" pitchFamily="34" charset="-120"/>
               </a:rPr>
               <a:t>: Semua posisi</a:t>
             </a:r>
@@ -1577,9 +1577,9 @@
                 <a:solidFill>
                   <a:srgbClr val="FFFFFF"/>
                 </a:solidFill>
-                <a:latin typeface="Arial" pitchFamily="34" charset="0"/>
-                <a:ea typeface="Arial" pitchFamily="34" charset="-122"/>
-                <a:cs typeface="Arial" pitchFamily="34" charset="-120"/>
+                <a:latin typeface="Aptos" pitchFamily="34" charset="0"/>
+                <a:ea typeface="Aptos" pitchFamily="34" charset="-122"/>
+                <a:cs typeface="Aptos" pitchFamily="34" charset="-120"/>
               </a:rPr>
               <a:t>Periode</a:t>
             </a:r>
@@ -1616,9 +1616,9 @@
                 <a:solidFill>
                   <a:srgbClr val="FFFFFF"/>
                 </a:solidFill>
-                <a:latin typeface="Arial" pitchFamily="34" charset="0"/>
-                <a:ea typeface="Arial" pitchFamily="34" charset="-122"/>
-                <a:cs typeface="Arial" pitchFamily="34" charset="-120"/>
+                <a:latin typeface="Aptos" pitchFamily="34" charset="0"/>
+                <a:ea typeface="Aptos" pitchFamily="34" charset="-122"/>
+                <a:cs typeface="Aptos" pitchFamily="34" charset="-120"/>
               </a:rPr>
               <a:t>: Uji Ranking</a:t>
             </a:r>
@@ -1655,9 +1655,9 @@
                 <a:solidFill>
                   <a:srgbClr val="FFFFFF"/>
                 </a:solidFill>
-                <a:latin typeface="Arial" pitchFamily="34" charset="0"/>
-                <a:ea typeface="Arial" pitchFamily="34" charset="-122"/>
-                <a:cs typeface="Arial" pitchFamily="34" charset="-120"/>
+                <a:latin typeface="Aptos" pitchFamily="34" charset="0"/>
+                <a:ea typeface="Aptos" pitchFamily="34" charset="-122"/>
+                <a:cs typeface="Aptos" pitchFamily="34" charset="-120"/>
               </a:rPr>
               <a:t>Jumlah peserta</a:t>
             </a:r>
@@ -1694,9 +1694,9 @@
                 <a:solidFill>
                   <a:srgbClr val="FFFFFF"/>
                 </a:solidFill>
-                <a:latin typeface="Arial" pitchFamily="34" charset="0"/>
-                <a:ea typeface="Arial" pitchFamily="34" charset="-122"/>
-                <a:cs typeface="Arial" pitchFamily="34" charset="-120"/>
+                <a:latin typeface="Aptos" pitchFamily="34" charset="0"/>
+                <a:ea typeface="Aptos" pitchFamily="34" charset="-122"/>
+                <a:cs typeface="Aptos" pitchFamily="34" charset="-120"/>
               </a:rPr>
               <a:t>: 3</a:t>
             </a:r>
@@ -1787,9 +1787,9 @@
                 <a:solidFill>
                   <a:srgbClr val="FFFFFF"/>
                 </a:solidFill>
-                <a:latin typeface="Arial" pitchFamily="34" charset="0"/>
-                <a:ea typeface="Arial" pitchFamily="34" charset="-122"/>
-                <a:cs typeface="Arial" pitchFamily="34" charset="-120"/>
+                <a:latin typeface="Aptos" pitchFamily="34" charset="0"/>
+                <a:ea typeface="Aptos" pitchFamily="34" charset="-122"/>
+                <a:cs typeface="Aptos" pitchFamily="34" charset="-120"/>
               </a:rPr>
               <a:t>SKALA PENILAIAN</a:t>
             </a:r>
@@ -1853,9 +1853,9 @@
                 <a:solidFill>
                   <a:srgbClr val="222222"/>
                 </a:solidFill>
-                <a:latin typeface="Arial" pitchFamily="34" charset="0"/>
-                <a:ea typeface="Arial" pitchFamily="34" charset="-122"/>
-                <a:cs typeface="Arial" pitchFamily="34" charset="-120"/>
+                <a:latin typeface="Aptos" pitchFamily="34" charset="0"/>
+                <a:ea typeface="Aptos" pitchFamily="34" charset="-122"/>
+                <a:cs typeface="Aptos" pitchFamily="34" charset="-120"/>
               </a:rPr>
               <a:t>4,80-5,00</a:t>
             </a:r>
@@ -1894,9 +1894,9 @@
                 <a:solidFill>
                   <a:srgbClr val="333333"/>
                 </a:solidFill>
-                <a:latin typeface="Arial" pitchFamily="34" charset="0"/>
-                <a:ea typeface="Arial" pitchFamily="34" charset="-122"/>
-                <a:cs typeface="Arial" pitchFamily="34" charset="-120"/>
+                <a:latin typeface="Aptos" pitchFamily="34" charset="0"/>
+                <a:ea typeface="Aptos" pitchFamily="34" charset="-122"/>
+                <a:cs typeface="Aptos" pitchFamily="34" charset="-120"/>
               </a:rPr>
               <a:t>Istimewa</a:t>
             </a:r>
@@ -1960,9 +1960,9 @@
                 <a:solidFill>
                   <a:srgbClr val="222222"/>
                 </a:solidFill>
-                <a:latin typeface="Arial" pitchFamily="34" charset="0"/>
-                <a:ea typeface="Arial" pitchFamily="34" charset="-122"/>
-                <a:cs typeface="Arial" pitchFamily="34" charset="-120"/>
+                <a:latin typeface="Aptos" pitchFamily="34" charset="0"/>
+                <a:ea typeface="Aptos" pitchFamily="34" charset="-122"/>
+                <a:cs typeface="Aptos" pitchFamily="34" charset="-120"/>
               </a:rPr>
               <a:t>4,60-4,79</a:t>
             </a:r>
@@ -2001,9 +2001,9 @@
                 <a:solidFill>
                   <a:srgbClr val="333333"/>
                 </a:solidFill>
-                <a:latin typeface="Arial" pitchFamily="34" charset="0"/>
-                <a:ea typeface="Arial" pitchFamily="34" charset="-122"/>
-                <a:cs typeface="Arial" pitchFamily="34" charset="-120"/>
+                <a:latin typeface="Aptos" pitchFamily="34" charset="0"/>
+                <a:ea typeface="Aptos" pitchFamily="34" charset="-122"/>
+                <a:cs typeface="Aptos" pitchFamily="34" charset="-120"/>
               </a:rPr>
               <a:t>Sangat Baik</a:t>
             </a:r>
@@ -2067,9 +2067,9 @@
                 <a:solidFill>
                   <a:srgbClr val="222222"/>
                 </a:solidFill>
-                <a:latin typeface="Arial" pitchFamily="34" charset="0"/>
-                <a:ea typeface="Arial" pitchFamily="34" charset="-122"/>
-                <a:cs typeface="Arial" pitchFamily="34" charset="-120"/>
+                <a:latin typeface="Aptos" pitchFamily="34" charset="0"/>
+                <a:ea typeface="Aptos" pitchFamily="34" charset="-122"/>
+                <a:cs typeface="Aptos" pitchFamily="34" charset="-120"/>
               </a:rPr>
               <a:t>4,00-4,59</a:t>
             </a:r>
@@ -2108,9 +2108,9 @@
                 <a:solidFill>
                   <a:srgbClr val="333333"/>
                 </a:solidFill>
-                <a:latin typeface="Arial" pitchFamily="34" charset="0"/>
-                <a:ea typeface="Arial" pitchFamily="34" charset="-122"/>
-                <a:cs typeface="Arial" pitchFamily="34" charset="-120"/>
+                <a:latin typeface="Aptos" pitchFamily="34" charset="0"/>
+                <a:ea typeface="Aptos" pitchFamily="34" charset="-122"/>
+                <a:cs typeface="Aptos" pitchFamily="34" charset="-120"/>
               </a:rPr>
               <a:t>Baik</a:t>
             </a:r>
@@ -2174,9 +2174,9 @@
                 <a:solidFill>
                   <a:srgbClr val="222222"/>
                 </a:solidFill>
-                <a:latin typeface="Arial" pitchFamily="34" charset="0"/>
-                <a:ea typeface="Arial" pitchFamily="34" charset="-122"/>
-                <a:cs typeface="Arial" pitchFamily="34" charset="-120"/>
+                <a:latin typeface="Aptos" pitchFamily="34" charset="0"/>
+                <a:ea typeface="Aptos" pitchFamily="34" charset="-122"/>
+                <a:cs typeface="Aptos" pitchFamily="34" charset="-120"/>
               </a:rPr>
               <a:t>3,60-3,99</a:t>
             </a:r>
@@ -2215,9 +2215,9 @@
                 <a:solidFill>
                   <a:srgbClr val="333333"/>
                 </a:solidFill>
-                <a:latin typeface="Arial" pitchFamily="34" charset="0"/>
-                <a:ea typeface="Arial" pitchFamily="34" charset="-122"/>
-                <a:cs typeface="Arial" pitchFamily="34" charset="-120"/>
+                <a:latin typeface="Aptos" pitchFamily="34" charset="0"/>
+                <a:ea typeface="Aptos" pitchFamily="34" charset="-122"/>
+                <a:cs typeface="Aptos" pitchFamily="34" charset="-120"/>
               </a:rPr>
               <a:t>Cukup</a:t>
             </a:r>
@@ -2281,9 +2281,9 @@
                 <a:solidFill>
                   <a:srgbClr val="222222"/>
                 </a:solidFill>
-                <a:latin typeface="Arial" pitchFamily="34" charset="0"/>
-                <a:ea typeface="Arial" pitchFamily="34" charset="-122"/>
-                <a:cs typeface="Arial" pitchFamily="34" charset="-120"/>
+                <a:latin typeface="Aptos" pitchFamily="34" charset="0"/>
+                <a:ea typeface="Aptos" pitchFamily="34" charset="-122"/>
+                <a:cs typeface="Aptos" pitchFamily="34" charset="-120"/>
               </a:rPr>
               <a:t>&lt;3,59</a:t>
             </a:r>
@@ -2322,9 +2322,9 @@
                 <a:solidFill>
                   <a:srgbClr val="333333"/>
                 </a:solidFill>
-                <a:latin typeface="Arial" pitchFamily="34" charset="0"/>
-                <a:ea typeface="Arial" pitchFamily="34" charset="-122"/>
-                <a:cs typeface="Arial" pitchFamily="34" charset="-120"/>
+                <a:latin typeface="Aptos" pitchFamily="34" charset="0"/>
+                <a:ea typeface="Aptos" pitchFamily="34" charset="-122"/>
+                <a:cs typeface="Aptos" pitchFamily="34" charset="-120"/>
               </a:rPr>
               <a:t>Kurang</a:t>
             </a:r>
@@ -2467,9 +2467,9 @@
                 <a:solidFill>
                   <a:srgbClr val="FFFFFF"/>
                 </a:solidFill>
-                <a:latin typeface="Arial" pitchFamily="34" charset="0"/>
-                <a:ea typeface="Arial" pitchFamily="34" charset="-122"/>
-                <a:cs typeface="Arial" pitchFamily="34" charset="-120"/>
+                <a:latin typeface="Aptos" pitchFamily="34" charset="0"/>
+                <a:ea typeface="Aptos" pitchFamily="34" charset="-122"/>
+                <a:cs typeface="Aptos" pitchFamily="34" charset="-120"/>
               </a:rPr>
               <a:t>Service Drill Ranking</a:t>
             </a:r>
@@ -2535,9 +2535,9 @@
                 <a:solidFill>
                   <a:srgbClr val="FFFFFF"/>
                 </a:solidFill>
-                <a:latin typeface="Arial" pitchFamily="34" charset="0"/>
-                <a:ea typeface="Arial" pitchFamily="34" charset="-122"/>
-                <a:cs typeface="Arial" pitchFamily="34" charset="-120"/>
+                <a:latin typeface="Aptos" pitchFamily="34" charset="0"/>
+                <a:ea typeface="Aptos" pitchFamily="34" charset="-122"/>
+                <a:cs typeface="Aptos" pitchFamily="34" charset="-120"/>
               </a:rPr>
               <a:t>RO-SMP KANWIL SULAMPUA</a:t>
             </a:r>
@@ -2576,9 +2576,9 @@
                 <a:solidFill>
                   <a:srgbClr val="FFFFFF"/>
                 </a:solidFill>
-                <a:latin typeface="Arial" pitchFamily="34" charset="0"/>
-                <a:ea typeface="Arial" pitchFamily="34" charset="-122"/>
-                <a:cs typeface="Arial" pitchFamily="34" charset="-120"/>
+                <a:latin typeface="Aptos" pitchFamily="34" charset="0"/>
+                <a:ea typeface="Aptos" pitchFamily="34" charset="-122"/>
+                <a:cs typeface="Aptos" pitchFamily="34" charset="-120"/>
               </a:rPr>
               <a:t>Customer Service</a:t>
             </a:r>
@@ -2693,9 +2693,9 @@
                 <a:solidFill>
                   <a:srgbClr val="FFFFFF"/>
                 </a:solidFill>
-                <a:latin typeface="Arial" pitchFamily="34" charset="0"/>
-                <a:ea typeface="Arial" pitchFamily="34" charset="-122"/>
-                <a:cs typeface="Arial" pitchFamily="34" charset="-120"/>
+                <a:latin typeface="Aptos" pitchFamily="34" charset="0"/>
+                <a:ea typeface="Aptos" pitchFamily="34" charset="-122"/>
+                <a:cs typeface="Aptos" pitchFamily="34" charset="-120"/>
               </a:rPr>
               <a:t>CS Satu</a:t>
             </a:r>
@@ -2757,9 +2757,9 @@
                 <a:solidFill>
                   <a:srgbClr val="FFFFFF"/>
                 </a:solidFill>
-                <a:latin typeface="Arial" pitchFamily="34" charset="0"/>
-                <a:ea typeface="Arial" pitchFamily="34" charset="-122"/>
-                <a:cs typeface="Arial" pitchFamily="34" charset="-120"/>
+                <a:latin typeface="Aptos" pitchFamily="34" charset="0"/>
+                <a:ea typeface="Aptos" pitchFamily="34" charset="-122"/>
+                <a:cs typeface="Aptos" pitchFamily="34" charset="-120"/>
               </a:rPr>
               <a:t>4,61</a:t>
             </a:r>
@@ -2825,9 +2825,9 @@
                 <a:solidFill>
                   <a:srgbClr val="FFFFFF"/>
                 </a:solidFill>
-                <a:latin typeface="Arial" pitchFamily="34" charset="0"/>
-                <a:ea typeface="Arial" pitchFamily="34" charset="-122"/>
-                <a:cs typeface="Arial" pitchFamily="34" charset="-120"/>
+                <a:latin typeface="Aptos" pitchFamily="34" charset="0"/>
+                <a:ea typeface="Aptos" pitchFamily="34" charset="-122"/>
+                <a:cs typeface="Aptos" pitchFamily="34" charset="-120"/>
               </a:rPr>
               <a:t>Sangat Baik</a:t>
             </a:r>
@@ -2918,9 +2918,9 @@
                 <a:solidFill>
                   <a:srgbClr val="FFFFFF"/>
                 </a:solidFill>
-                <a:latin typeface="Arial" pitchFamily="34" charset="0"/>
-                <a:ea typeface="Arial" pitchFamily="34" charset="-122"/>
-                <a:cs typeface="Arial" pitchFamily="34" charset="-120"/>
+                <a:latin typeface="Aptos" pitchFamily="34" charset="0"/>
+                <a:ea typeface="Aptos" pitchFamily="34" charset="-122"/>
+                <a:cs typeface="Aptos" pitchFamily="34" charset="-120"/>
               </a:rPr>
               <a:t>SKALA PENILAIAN</a:t>
             </a:r>
@@ -2984,9 +2984,9 @@
                 <a:solidFill>
                   <a:srgbClr val="222222"/>
                 </a:solidFill>
-                <a:latin typeface="Arial" pitchFamily="34" charset="0"/>
-                <a:ea typeface="Arial" pitchFamily="34" charset="-122"/>
-                <a:cs typeface="Arial" pitchFamily="34" charset="-120"/>
+                <a:latin typeface="Aptos" pitchFamily="34" charset="0"/>
+                <a:ea typeface="Aptos" pitchFamily="34" charset="-122"/>
+                <a:cs typeface="Aptos" pitchFamily="34" charset="-120"/>
               </a:rPr>
               <a:t>4,80-5,00</a:t>
             </a:r>
@@ -3025,9 +3025,9 @@
                 <a:solidFill>
                   <a:srgbClr val="333333"/>
                 </a:solidFill>
-                <a:latin typeface="Arial" pitchFamily="34" charset="0"/>
-                <a:ea typeface="Arial" pitchFamily="34" charset="-122"/>
-                <a:cs typeface="Arial" pitchFamily="34" charset="-120"/>
+                <a:latin typeface="Aptos" pitchFamily="34" charset="0"/>
+                <a:ea typeface="Aptos" pitchFamily="34" charset="-122"/>
+                <a:cs typeface="Aptos" pitchFamily="34" charset="-120"/>
               </a:rPr>
               <a:t>Istimewa</a:t>
             </a:r>
@@ -3091,9 +3091,9 @@
                 <a:solidFill>
                   <a:srgbClr val="222222"/>
                 </a:solidFill>
-                <a:latin typeface="Arial" pitchFamily="34" charset="0"/>
-                <a:ea typeface="Arial" pitchFamily="34" charset="-122"/>
-                <a:cs typeface="Arial" pitchFamily="34" charset="-120"/>
+                <a:latin typeface="Aptos" pitchFamily="34" charset="0"/>
+                <a:ea typeface="Aptos" pitchFamily="34" charset="-122"/>
+                <a:cs typeface="Aptos" pitchFamily="34" charset="-120"/>
               </a:rPr>
               <a:t>4,60-4,79</a:t>
             </a:r>
@@ -3132,9 +3132,9 @@
                 <a:solidFill>
                   <a:srgbClr val="333333"/>
                 </a:solidFill>
-                <a:latin typeface="Arial" pitchFamily="34" charset="0"/>
-                <a:ea typeface="Arial" pitchFamily="34" charset="-122"/>
-                <a:cs typeface="Arial" pitchFamily="34" charset="-120"/>
+                <a:latin typeface="Aptos" pitchFamily="34" charset="0"/>
+                <a:ea typeface="Aptos" pitchFamily="34" charset="-122"/>
+                <a:cs typeface="Aptos" pitchFamily="34" charset="-120"/>
               </a:rPr>
               <a:t>Sangat Baik</a:t>
             </a:r>
@@ -3198,9 +3198,9 @@
                 <a:solidFill>
                   <a:srgbClr val="222222"/>
                 </a:solidFill>
-                <a:latin typeface="Arial" pitchFamily="34" charset="0"/>
-                <a:ea typeface="Arial" pitchFamily="34" charset="-122"/>
-                <a:cs typeface="Arial" pitchFamily="34" charset="-120"/>
+                <a:latin typeface="Aptos" pitchFamily="34" charset="0"/>
+                <a:ea typeface="Aptos" pitchFamily="34" charset="-122"/>
+                <a:cs typeface="Aptos" pitchFamily="34" charset="-120"/>
               </a:rPr>
               <a:t>4,00-4,59</a:t>
             </a:r>
@@ -3239,9 +3239,9 @@
                 <a:solidFill>
                   <a:srgbClr val="333333"/>
                 </a:solidFill>
-                <a:latin typeface="Arial" pitchFamily="34" charset="0"/>
-                <a:ea typeface="Arial" pitchFamily="34" charset="-122"/>
-                <a:cs typeface="Arial" pitchFamily="34" charset="-120"/>
+                <a:latin typeface="Aptos" pitchFamily="34" charset="0"/>
+                <a:ea typeface="Aptos" pitchFamily="34" charset="-122"/>
+                <a:cs typeface="Aptos" pitchFamily="34" charset="-120"/>
               </a:rPr>
               <a:t>Baik</a:t>
             </a:r>
@@ -3305,9 +3305,9 @@
                 <a:solidFill>
                   <a:srgbClr val="222222"/>
                 </a:solidFill>
-                <a:latin typeface="Arial" pitchFamily="34" charset="0"/>
-                <a:ea typeface="Arial" pitchFamily="34" charset="-122"/>
-                <a:cs typeface="Arial" pitchFamily="34" charset="-120"/>
+                <a:latin typeface="Aptos" pitchFamily="34" charset="0"/>
+                <a:ea typeface="Aptos" pitchFamily="34" charset="-122"/>
+                <a:cs typeface="Aptos" pitchFamily="34" charset="-120"/>
               </a:rPr>
               <a:t>3,60-3,99</a:t>
             </a:r>
@@ -3346,9 +3346,9 @@
                 <a:solidFill>
                   <a:srgbClr val="333333"/>
                 </a:solidFill>
-                <a:latin typeface="Arial" pitchFamily="34" charset="0"/>
-                <a:ea typeface="Arial" pitchFamily="34" charset="-122"/>
-                <a:cs typeface="Arial" pitchFamily="34" charset="-120"/>
+                <a:latin typeface="Aptos" pitchFamily="34" charset="0"/>
+                <a:ea typeface="Aptos" pitchFamily="34" charset="-122"/>
+                <a:cs typeface="Aptos" pitchFamily="34" charset="-120"/>
               </a:rPr>
               <a:t>Cukup</a:t>
             </a:r>
@@ -3412,9 +3412,9 @@
                 <a:solidFill>
                   <a:srgbClr val="222222"/>
                 </a:solidFill>
-                <a:latin typeface="Arial" pitchFamily="34" charset="0"/>
-                <a:ea typeface="Arial" pitchFamily="34" charset="-122"/>
-                <a:cs typeface="Arial" pitchFamily="34" charset="-120"/>
+                <a:latin typeface="Aptos" pitchFamily="34" charset="0"/>
+                <a:ea typeface="Aptos" pitchFamily="34" charset="-122"/>
+                <a:cs typeface="Aptos" pitchFamily="34" charset="-120"/>
               </a:rPr>
               <a:t>&lt;3,59</a:t>
             </a:r>
@@ -3453,9 +3453,9 @@
                 <a:solidFill>
                   <a:srgbClr val="333333"/>
                 </a:solidFill>
-                <a:latin typeface="Arial" pitchFamily="34" charset="0"/>
-                <a:ea typeface="Arial" pitchFamily="34" charset="-122"/>
-                <a:cs typeface="Arial" pitchFamily="34" charset="-120"/>
+                <a:latin typeface="Aptos" pitchFamily="34" charset="0"/>
+                <a:ea typeface="Aptos" pitchFamily="34" charset="-122"/>
+                <a:cs typeface="Aptos" pitchFamily="34" charset="-120"/>
               </a:rPr>
               <a:t>Kurang</a:t>
             </a:r>
@@ -3598,9 +3598,9 @@
                 <a:solidFill>
                   <a:srgbClr val="FFFFFF"/>
                 </a:solidFill>
-                <a:latin typeface="Arial" pitchFamily="34" charset="0"/>
-                <a:ea typeface="Arial" pitchFamily="34" charset="-122"/>
-                <a:cs typeface="Arial" pitchFamily="34" charset="-120"/>
+                <a:latin typeface="Aptos" pitchFamily="34" charset="0"/>
+                <a:ea typeface="Aptos" pitchFamily="34" charset="-122"/>
+                <a:cs typeface="Aptos" pitchFamily="34" charset="-120"/>
               </a:rPr>
               <a:t>Service Drill Ranking</a:t>
             </a:r>
@@ -3666,9 +3666,9 @@
                 <a:solidFill>
                   <a:srgbClr val="FFFFFF"/>
                 </a:solidFill>
-                <a:latin typeface="Arial" pitchFamily="34" charset="0"/>
-                <a:ea typeface="Arial" pitchFamily="34" charset="-122"/>
-                <a:cs typeface="Arial" pitchFamily="34" charset="-120"/>
+                <a:latin typeface="Aptos" pitchFamily="34" charset="0"/>
+                <a:ea typeface="Aptos" pitchFamily="34" charset="-122"/>
+                <a:cs typeface="Aptos" pitchFamily="34" charset="-120"/>
               </a:rPr>
               <a:t>RO-SMP KANWIL SULAMPUA</a:t>
             </a:r>
@@ -3707,9 +3707,9 @@
                 <a:solidFill>
                   <a:srgbClr val="FFFFFF"/>
                 </a:solidFill>
-                <a:latin typeface="Arial" pitchFamily="34" charset="0"/>
-                <a:ea typeface="Arial" pitchFamily="34" charset="-122"/>
-                <a:cs typeface="Arial" pitchFamily="34" charset="-120"/>
+                <a:latin typeface="Aptos" pitchFamily="34" charset="0"/>
+                <a:ea typeface="Aptos" pitchFamily="34" charset="-122"/>
+                <a:cs typeface="Aptos" pitchFamily="34" charset="-120"/>
               </a:rPr>
               <a:t>Teller</a:t>
             </a:r>
@@ -3824,9 +3824,9 @@
                 <a:solidFill>
                   <a:srgbClr val="FFFFFF"/>
                 </a:solidFill>
-                <a:latin typeface="Arial" pitchFamily="34" charset="0"/>
-                <a:ea typeface="Arial" pitchFamily="34" charset="-122"/>
-                <a:cs typeface="Arial" pitchFamily="34" charset="-120"/>
+                <a:latin typeface="Aptos" pitchFamily="34" charset="0"/>
+                <a:ea typeface="Aptos" pitchFamily="34" charset="-122"/>
+                <a:cs typeface="Aptos" pitchFamily="34" charset="-120"/>
               </a:rPr>
               <a:t>Teller Satu</a:t>
             </a:r>
@@ -3888,9 +3888,9 @@
                 <a:solidFill>
                   <a:srgbClr val="FFFFFF"/>
                 </a:solidFill>
-                <a:latin typeface="Arial" pitchFamily="34" charset="0"/>
-                <a:ea typeface="Arial" pitchFamily="34" charset="-122"/>
-                <a:cs typeface="Arial" pitchFamily="34" charset="-120"/>
+                <a:latin typeface="Aptos" pitchFamily="34" charset="0"/>
+                <a:ea typeface="Aptos" pitchFamily="34" charset="-122"/>
+                <a:cs typeface="Aptos" pitchFamily="34" charset="-120"/>
               </a:rPr>
               <a:t>4,92</a:t>
             </a:r>
@@ -3956,9 +3956,9 @@
                 <a:solidFill>
                   <a:srgbClr val="FFFFFF"/>
                 </a:solidFill>
-                <a:latin typeface="Arial" pitchFamily="34" charset="0"/>
-                <a:ea typeface="Arial" pitchFamily="34" charset="-122"/>
-                <a:cs typeface="Arial" pitchFamily="34" charset="-120"/>
+                <a:latin typeface="Aptos" pitchFamily="34" charset="0"/>
+                <a:ea typeface="Aptos" pitchFamily="34" charset="-122"/>
+                <a:cs typeface="Aptos" pitchFamily="34" charset="-120"/>
               </a:rPr>
               <a:t>Istimewa</a:t>
             </a:r>
@@ -4048,9 +4048,9 @@
                 <a:solidFill>
                   <a:srgbClr val="FFFFFF"/>
                 </a:solidFill>
-                <a:latin typeface="Arial" pitchFamily="34" charset="0"/>
-                <a:ea typeface="Arial" pitchFamily="34" charset="-122"/>
-                <a:cs typeface="Arial" pitchFamily="34" charset="-120"/>
+                <a:latin typeface="Aptos" pitchFamily="34" charset="0"/>
+                <a:ea typeface="Aptos" pitchFamily="34" charset="-122"/>
+                <a:cs typeface="Aptos" pitchFamily="34" charset="-120"/>
               </a:rPr>
               <a:t>Teller Dua</a:t>
             </a:r>
@@ -4112,9 +4112,9 @@
                 <a:solidFill>
                   <a:srgbClr val="FFFFFF"/>
                 </a:solidFill>
-                <a:latin typeface="Arial" pitchFamily="34" charset="0"/>
-                <a:ea typeface="Arial" pitchFamily="34" charset="-122"/>
-                <a:cs typeface="Arial" pitchFamily="34" charset="-120"/>
+                <a:latin typeface="Aptos" pitchFamily="34" charset="0"/>
+                <a:ea typeface="Aptos" pitchFamily="34" charset="-122"/>
+                <a:cs typeface="Aptos" pitchFamily="34" charset="-120"/>
               </a:rPr>
               <a:t>3,71</a:t>
             </a:r>
@@ -4180,9 +4180,9 @@
                 <a:solidFill>
                   <a:srgbClr val="FFFFFF"/>
                 </a:solidFill>
-                <a:latin typeface="Arial" pitchFamily="34" charset="0"/>
-                <a:ea typeface="Arial" pitchFamily="34" charset="-122"/>
-                <a:cs typeface="Arial" pitchFamily="34" charset="-120"/>
+                <a:latin typeface="Aptos" pitchFamily="34" charset="0"/>
+                <a:ea typeface="Aptos" pitchFamily="34" charset="-122"/>
+                <a:cs typeface="Aptos" pitchFamily="34" charset="-120"/>
               </a:rPr>
               <a:t>Cukup</a:t>
             </a:r>
@@ -4273,9 +4273,9 @@
                 <a:solidFill>
                   <a:srgbClr val="FFFFFF"/>
                 </a:solidFill>
-                <a:latin typeface="Arial" pitchFamily="34" charset="0"/>
-                <a:ea typeface="Arial" pitchFamily="34" charset="-122"/>
-                <a:cs typeface="Arial" pitchFamily="34" charset="-120"/>
+                <a:latin typeface="Aptos" pitchFamily="34" charset="0"/>
+                <a:ea typeface="Aptos" pitchFamily="34" charset="-122"/>
+                <a:cs typeface="Aptos" pitchFamily="34" charset="-120"/>
               </a:rPr>
               <a:t>SKALA PENILAIAN</a:t>
             </a:r>
@@ -4339,9 +4339,9 @@
                 <a:solidFill>
                   <a:srgbClr val="222222"/>
                 </a:solidFill>
-                <a:latin typeface="Arial" pitchFamily="34" charset="0"/>
-                <a:ea typeface="Arial" pitchFamily="34" charset="-122"/>
-                <a:cs typeface="Arial" pitchFamily="34" charset="-120"/>
+                <a:latin typeface="Aptos" pitchFamily="34" charset="0"/>
+                <a:ea typeface="Aptos" pitchFamily="34" charset="-122"/>
+                <a:cs typeface="Aptos" pitchFamily="34" charset="-120"/>
               </a:rPr>
               <a:t>4,80-5,00</a:t>
             </a:r>
@@ -4380,9 +4380,9 @@
                 <a:solidFill>
                   <a:srgbClr val="333333"/>
                 </a:solidFill>
-                <a:latin typeface="Arial" pitchFamily="34" charset="0"/>
-                <a:ea typeface="Arial" pitchFamily="34" charset="-122"/>
-                <a:cs typeface="Arial" pitchFamily="34" charset="-120"/>
+                <a:latin typeface="Aptos" pitchFamily="34" charset="0"/>
+                <a:ea typeface="Aptos" pitchFamily="34" charset="-122"/>
+                <a:cs typeface="Aptos" pitchFamily="34" charset="-120"/>
               </a:rPr>
               <a:t>Istimewa</a:t>
             </a:r>
@@ -4446,9 +4446,9 @@
                 <a:solidFill>
                   <a:srgbClr val="222222"/>
                 </a:solidFill>
-                <a:latin typeface="Arial" pitchFamily="34" charset="0"/>
-                <a:ea typeface="Arial" pitchFamily="34" charset="-122"/>
-                <a:cs typeface="Arial" pitchFamily="34" charset="-120"/>
+                <a:latin typeface="Aptos" pitchFamily="34" charset="0"/>
+                <a:ea typeface="Aptos" pitchFamily="34" charset="-122"/>
+                <a:cs typeface="Aptos" pitchFamily="34" charset="-120"/>
               </a:rPr>
               <a:t>4,60-4,79</a:t>
             </a:r>
@@ -4487,9 +4487,9 @@
                 <a:solidFill>
                   <a:srgbClr val="333333"/>
                 </a:solidFill>
-                <a:latin typeface="Arial" pitchFamily="34" charset="0"/>
-                <a:ea typeface="Arial" pitchFamily="34" charset="-122"/>
-                <a:cs typeface="Arial" pitchFamily="34" charset="-120"/>
+                <a:latin typeface="Aptos" pitchFamily="34" charset="0"/>
+                <a:ea typeface="Aptos" pitchFamily="34" charset="-122"/>
+                <a:cs typeface="Aptos" pitchFamily="34" charset="-120"/>
               </a:rPr>
               <a:t>Sangat Baik</a:t>
             </a:r>
@@ -4553,9 +4553,9 @@
                 <a:solidFill>
                   <a:srgbClr val="222222"/>
                 </a:solidFill>
-                <a:latin typeface="Arial" pitchFamily="34" charset="0"/>
-                <a:ea typeface="Arial" pitchFamily="34" charset="-122"/>
-                <a:cs typeface="Arial" pitchFamily="34" charset="-120"/>
+                <a:latin typeface="Aptos" pitchFamily="34" charset="0"/>
+                <a:ea typeface="Aptos" pitchFamily="34" charset="-122"/>
+                <a:cs typeface="Aptos" pitchFamily="34" charset="-120"/>
               </a:rPr>
               <a:t>4,00-4,59</a:t>
             </a:r>
@@ -4594,9 +4594,9 @@
                 <a:solidFill>
                   <a:srgbClr val="333333"/>
                 </a:solidFill>
-                <a:latin typeface="Arial" pitchFamily="34" charset="0"/>
-                <a:ea typeface="Arial" pitchFamily="34" charset="-122"/>
-                <a:cs typeface="Arial" pitchFamily="34" charset="-120"/>
+                <a:latin typeface="Aptos" pitchFamily="34" charset="0"/>
+                <a:ea typeface="Aptos" pitchFamily="34" charset="-122"/>
+                <a:cs typeface="Aptos" pitchFamily="34" charset="-120"/>
               </a:rPr>
               <a:t>Baik</a:t>
             </a:r>
@@ -4660,9 +4660,9 @@
                 <a:solidFill>
                   <a:srgbClr val="222222"/>
                 </a:solidFill>
-                <a:latin typeface="Arial" pitchFamily="34" charset="0"/>
-                <a:ea typeface="Arial" pitchFamily="34" charset="-122"/>
-                <a:cs typeface="Arial" pitchFamily="34" charset="-120"/>
+                <a:latin typeface="Aptos" pitchFamily="34" charset="0"/>
+                <a:ea typeface="Aptos" pitchFamily="34" charset="-122"/>
+                <a:cs typeface="Aptos" pitchFamily="34" charset="-120"/>
               </a:rPr>
               <a:t>3,60-3,99</a:t>
             </a:r>
@@ -4701,9 +4701,9 @@
                 <a:solidFill>
                   <a:srgbClr val="333333"/>
                 </a:solidFill>
-                <a:latin typeface="Arial" pitchFamily="34" charset="0"/>
-                <a:ea typeface="Arial" pitchFamily="34" charset="-122"/>
-                <a:cs typeface="Arial" pitchFamily="34" charset="-120"/>
+                <a:latin typeface="Aptos" pitchFamily="34" charset="0"/>
+                <a:ea typeface="Aptos" pitchFamily="34" charset="-122"/>
+                <a:cs typeface="Aptos" pitchFamily="34" charset="-120"/>
               </a:rPr>
               <a:t>Cukup</a:t>
             </a:r>
@@ -4767,9 +4767,9 @@
                 <a:solidFill>
                   <a:srgbClr val="222222"/>
                 </a:solidFill>
-                <a:latin typeface="Arial" pitchFamily="34" charset="0"/>
-                <a:ea typeface="Arial" pitchFamily="34" charset="-122"/>
-                <a:cs typeface="Arial" pitchFamily="34" charset="-120"/>
+                <a:latin typeface="Aptos" pitchFamily="34" charset="0"/>
+                <a:ea typeface="Aptos" pitchFamily="34" charset="-122"/>
+                <a:cs typeface="Aptos" pitchFamily="34" charset="-120"/>
               </a:rPr>
               <a:t>&lt;3,59</a:t>
             </a:r>
@@ -4808,9 +4808,9 @@
                 <a:solidFill>
                   <a:srgbClr val="333333"/>
                 </a:solidFill>
-                <a:latin typeface="Arial" pitchFamily="34" charset="0"/>
-                <a:ea typeface="Arial" pitchFamily="34" charset="-122"/>
-                <a:cs typeface="Arial" pitchFamily="34" charset="-120"/>
+                <a:latin typeface="Aptos" pitchFamily="34" charset="0"/>
+                <a:ea typeface="Aptos" pitchFamily="34" charset="-122"/>
+                <a:cs typeface="Aptos" pitchFamily="34" charset="-120"/>
               </a:rPr>
               <a:t>Kurang</a:t>
             </a:r>

--- a/ranking-uji-route.pptx
+++ b/ranking-uji-route.pptx
@@ -1152,7 +1152,7 @@
               <a:buNone/>
             </a:pPr>
             <a:r>
-              <a:rPr lang="en-US" sz="4000" b="1" dirty="0">
+              <a:rPr lang="en-US" sz="4400" b="1" dirty="0">
                 <a:solidFill>
                   <a:srgbClr val="FFFFFF"/>
                 </a:solidFill>
@@ -1162,7 +1162,7 @@
               </a:rPr>
               <a:t>Service Drill Ranking</a:t>
             </a:r>
-            <a:endParaRPr lang="en-US" sz="4000" dirty="0"/>
+            <a:endParaRPr lang="en-US" sz="4400" dirty="0"/>
           </a:p>
         </p:txBody>
       </p:sp>
@@ -1179,11 +1179,546 @@
           </a:xfrm>
           <a:prstGeom prst="roundRect">
             <a:avLst>
-              <a:gd name="adj" fmla="val 15842"/>
+              <a:gd name="adj" fmla="val 19802"/>
             </a:avLst>
           </a:prstGeom>
-          <a:solidFill>
-            <a:srgbClr val="2E4FD6"/>
+          <a:ln w="15875">
+            <a:solidFill>
+              <a:srgbClr val="FFFFFF"/>
+            </a:solidFill>
+            <a:prstDash val="solid"/>
+          </a:ln>
+        </p:spPr>
+      </p:sp>
+      <p:sp>
+        <p:nvSpPr>
+          <p:cNvPr id="7" name="Text 2"/>
+          <p:cNvSpPr/>
+          <p:nvPr/>
+        </p:nvSpPr>
+        <p:spPr>
+          <a:xfrm>
+            <a:off x="4607662" y="1151230"/>
+            <a:ext cx="2991002" cy="461772"/>
+          </a:xfrm>
+          <a:prstGeom prst="rect">
+            <a:avLst/>
+          </a:prstGeom>
+          <a:noFill/>
+          <a:ln/>
+        </p:spPr>
+        <p:txBody>
+          <a:bodyPr wrap="square" rtlCol="0" anchor="ctr">
+            <a:normAutofit/>
+          </a:bodyPr>
+          <a:lstStyle/>
+          <a:p>
+            <a:pPr algn="ctr" indent="0" marL="0">
+              <a:buNone/>
+            </a:pPr>
+            <a:r>
+              <a:rPr lang="en-US" sz="2000" b="1" dirty="0">
+                <a:solidFill>
+                  <a:srgbClr val="FFFFFF"/>
+                </a:solidFill>
+                <a:latin typeface="Poppins" pitchFamily="34" charset="0"/>
+                <a:ea typeface="Poppins" pitchFamily="34" charset="-122"/>
+                <a:cs typeface="Poppins" pitchFamily="34" charset="-120"/>
+              </a:rPr>
+              <a:t>Semua unit</a:t>
+            </a:r>
+            <a:endParaRPr lang="en-US" sz="2000" dirty="0"/>
+          </a:p>
+        </p:txBody>
+      </p:sp>
+      <p:sp>
+        <p:nvSpPr>
+          <p:cNvPr id="8" name="Text 3"/>
+          <p:cNvSpPr/>
+          <p:nvPr/>
+        </p:nvSpPr>
+        <p:spPr>
+          <a:xfrm>
+            <a:off x="4772254" y="1681582"/>
+            <a:ext cx="2648102" cy="369418"/>
+          </a:xfrm>
+          <a:prstGeom prst="rect">
+            <a:avLst/>
+          </a:prstGeom>
+          <a:noFill/>
+          <a:ln/>
+        </p:spPr>
+        <p:txBody>
+          <a:bodyPr wrap="square" rtlCol="0" anchor="ctr">
+            <a:normAutofit/>
+          </a:bodyPr>
+          <a:lstStyle/>
+          <a:p>
+            <a:pPr algn="ctr" indent="0" marL="0">
+              <a:buNone/>
+            </a:pPr>
+            <a:r>
+              <a:rPr lang="en-US" sz="2400" dirty="0">
+                <a:solidFill>
+                  <a:srgbClr val="FFFFFF"/>
+                </a:solidFill>
+                <a:latin typeface="Aptos" pitchFamily="34" charset="0"/>
+                <a:ea typeface="Aptos" pitchFamily="34" charset="-122"/>
+                <a:cs typeface="Aptos" pitchFamily="34" charset="-120"/>
+              </a:rPr>
+              <a:t>Semua posisi</a:t>
+            </a:r>
+            <a:endParaRPr lang="en-US" sz="2400" dirty="0"/>
+          </a:p>
+        </p:txBody>
+      </p:sp>
+      <p:sp>
+        <p:nvSpPr>
+          <p:cNvPr id="9" name="Text 4"/>
+          <p:cNvSpPr/>
+          <p:nvPr/>
+        </p:nvSpPr>
+        <p:spPr>
+          <a:xfrm>
+            <a:off x="3269894" y="2176272"/>
+            <a:ext cx="5692140" cy="365760"/>
+          </a:xfrm>
+          <a:prstGeom prst="rect">
+            <a:avLst/>
+          </a:prstGeom>
+          <a:noFill/>
+          <a:ln/>
+        </p:spPr>
+        <p:txBody>
+          <a:bodyPr wrap="square" rtlCol="0" anchor="ctr"/>
+          <a:lstStyle/>
+          <a:p>
+            <a:pPr algn="ctr" indent="0" marL="0">
+              <a:buNone/>
+            </a:pPr>
+            <a:r>
+              <a:rPr lang="en-US" sz="1800" dirty="0">
+                <a:solidFill>
+                  <a:srgbClr val="FFFFFF"/>
+                </a:solidFill>
+                <a:latin typeface="Aptos" pitchFamily="34" charset="0"/>
+                <a:ea typeface="Aptos" pitchFamily="34" charset="-122"/>
+                <a:cs typeface="Aptos" pitchFamily="34" charset="-120"/>
+              </a:rPr>
+              <a:t>Uji Ranking</a:t>
+            </a:r>
+            <a:endParaRPr lang="en-US" sz="1800" dirty="0"/>
+          </a:p>
+        </p:txBody>
+      </p:sp>
+      <p:sp>
+        <p:nvSpPr>
+          <p:cNvPr id="10" name="Text 5"/>
+          <p:cNvSpPr/>
+          <p:nvPr/>
+        </p:nvSpPr>
+        <p:spPr>
+          <a:xfrm>
+            <a:off x="3566160" y="2697480"/>
+            <a:ext cx="2011680" cy="365760"/>
+          </a:xfrm>
+          <a:prstGeom prst="rect">
+            <a:avLst/>
+          </a:prstGeom>
+          <a:noFill/>
+          <a:ln/>
+        </p:spPr>
+        <p:txBody>
+          <a:bodyPr wrap="square" rtlCol="0" anchor="ctr"/>
+          <a:lstStyle/>
+          <a:p>
+            <a:pPr algn="r" indent="0" marL="0">
+              <a:buNone/>
+            </a:pPr>
+            <a:r>
+              <a:rPr lang="en-US" sz="1400" dirty="0">
+                <a:solidFill>
+                  <a:srgbClr val="FFFFFF"/>
+                </a:solidFill>
+                <a:latin typeface="Aptos" pitchFamily="34" charset="0"/>
+                <a:ea typeface="Aptos" pitchFamily="34" charset="-122"/>
+                <a:cs typeface="Aptos" pitchFamily="34" charset="-120"/>
+              </a:rPr>
+              <a:t>Jenis kantor</a:t>
+            </a:r>
+            <a:endParaRPr lang="en-US" sz="1400" dirty="0"/>
+          </a:p>
+        </p:txBody>
+      </p:sp>
+      <p:sp>
+        <p:nvSpPr>
+          <p:cNvPr id="11" name="Text 6"/>
+          <p:cNvSpPr/>
+          <p:nvPr/>
+        </p:nvSpPr>
+        <p:spPr>
+          <a:xfrm>
+            <a:off x="5669280" y="2697480"/>
+            <a:ext cx="3657600" cy="365760"/>
+          </a:xfrm>
+          <a:prstGeom prst="rect">
+            <a:avLst/>
+          </a:prstGeom>
+          <a:noFill/>
+          <a:ln/>
+        </p:spPr>
+        <p:txBody>
+          <a:bodyPr wrap="square" rtlCol="0" anchor="ctr"/>
+          <a:lstStyle/>
+          <a:p>
+            <a:pPr indent="0" marL="0">
+              <a:buNone/>
+            </a:pPr>
+            <a:r>
+              <a:rPr lang="en-US" sz="1400" b="1" dirty="0">
+                <a:solidFill>
+                  <a:srgbClr val="FFFFFF"/>
+                </a:solidFill>
+                <a:latin typeface="Aptos" pitchFamily="34" charset="0"/>
+                <a:ea typeface="Aptos" pitchFamily="34" charset="-122"/>
+                <a:cs typeface="Aptos" pitchFamily="34" charset="-120"/>
+              </a:rPr>
+              <a:t>: Semua jenis</a:t>
+            </a:r>
+            <a:endParaRPr lang="en-US" sz="1400" dirty="0"/>
+          </a:p>
+        </p:txBody>
+      </p:sp>
+      <p:sp>
+        <p:nvSpPr>
+          <p:cNvPr id="12" name="Text 7"/>
+          <p:cNvSpPr/>
+          <p:nvPr/>
+        </p:nvSpPr>
+        <p:spPr>
+          <a:xfrm>
+            <a:off x="3566160" y="3154680"/>
+            <a:ext cx="2011680" cy="365760"/>
+          </a:xfrm>
+          <a:prstGeom prst="rect">
+            <a:avLst/>
+          </a:prstGeom>
+          <a:noFill/>
+          <a:ln/>
+        </p:spPr>
+        <p:txBody>
+          <a:bodyPr wrap="square" rtlCol="0" anchor="ctr"/>
+          <a:lstStyle/>
+          <a:p>
+            <a:pPr algn="r" indent="0" marL="0">
+              <a:buNone/>
+            </a:pPr>
+            <a:r>
+              <a:rPr lang="en-US" sz="1400" dirty="0">
+                <a:solidFill>
+                  <a:srgbClr val="FFFFFF"/>
+                </a:solidFill>
+                <a:latin typeface="Aptos" pitchFamily="34" charset="0"/>
+                <a:ea typeface="Aptos" pitchFamily="34" charset="-122"/>
+                <a:cs typeface="Aptos" pitchFamily="34" charset="-120"/>
+              </a:rPr>
+              <a:t>Unit / cabang</a:t>
+            </a:r>
+            <a:endParaRPr lang="en-US" sz="1400" dirty="0"/>
+          </a:p>
+        </p:txBody>
+      </p:sp>
+      <p:sp>
+        <p:nvSpPr>
+          <p:cNvPr id="13" name="Text 8"/>
+          <p:cNvSpPr/>
+          <p:nvPr/>
+        </p:nvSpPr>
+        <p:spPr>
+          <a:xfrm>
+            <a:off x="5669280" y="3154680"/>
+            <a:ext cx="3657600" cy="365760"/>
+          </a:xfrm>
+          <a:prstGeom prst="rect">
+            <a:avLst/>
+          </a:prstGeom>
+          <a:noFill/>
+          <a:ln/>
+        </p:spPr>
+        <p:txBody>
+          <a:bodyPr wrap="square" rtlCol="0" anchor="ctr"/>
+          <a:lstStyle/>
+          <a:p>
+            <a:pPr indent="0" marL="0">
+              <a:buNone/>
+            </a:pPr>
+            <a:r>
+              <a:rPr lang="en-US" sz="1400" b="1" dirty="0">
+                <a:solidFill>
+                  <a:srgbClr val="FFFFFF"/>
+                </a:solidFill>
+                <a:latin typeface="Aptos" pitchFamily="34" charset="0"/>
+                <a:ea typeface="Aptos" pitchFamily="34" charset="-122"/>
+                <a:cs typeface="Aptos" pitchFamily="34" charset="-120"/>
+              </a:rPr>
+              <a:t>: Semua unit</a:t>
+            </a:r>
+            <a:endParaRPr lang="en-US" sz="1400" dirty="0"/>
+          </a:p>
+        </p:txBody>
+      </p:sp>
+      <p:sp>
+        <p:nvSpPr>
+          <p:cNvPr id="14" name="Text 9"/>
+          <p:cNvSpPr/>
+          <p:nvPr/>
+        </p:nvSpPr>
+        <p:spPr>
+          <a:xfrm>
+            <a:off x="3566160" y="3611880"/>
+            <a:ext cx="2011680" cy="365760"/>
+          </a:xfrm>
+          <a:prstGeom prst="rect">
+            <a:avLst/>
+          </a:prstGeom>
+          <a:noFill/>
+          <a:ln/>
+        </p:spPr>
+        <p:txBody>
+          <a:bodyPr wrap="square" rtlCol="0" anchor="ctr"/>
+          <a:lstStyle/>
+          <a:p>
+            <a:pPr algn="r" indent="0" marL="0">
+              <a:buNone/>
+            </a:pPr>
+            <a:r>
+              <a:rPr lang="en-US" sz="1400" dirty="0">
+                <a:solidFill>
+                  <a:srgbClr val="FFFFFF"/>
+                </a:solidFill>
+                <a:latin typeface="Aptos" pitchFamily="34" charset="0"/>
+                <a:ea typeface="Aptos" pitchFamily="34" charset="-122"/>
+                <a:cs typeface="Aptos" pitchFamily="34" charset="-120"/>
+              </a:rPr>
+              <a:t>Posisi dinilai</a:t>
+            </a:r>
+            <a:endParaRPr lang="en-US" sz="1400" dirty="0"/>
+          </a:p>
+        </p:txBody>
+      </p:sp>
+      <p:sp>
+        <p:nvSpPr>
+          <p:cNvPr id="15" name="Text 10"/>
+          <p:cNvSpPr/>
+          <p:nvPr/>
+        </p:nvSpPr>
+        <p:spPr>
+          <a:xfrm>
+            <a:off x="5669280" y="3611880"/>
+            <a:ext cx="3657600" cy="365760"/>
+          </a:xfrm>
+          <a:prstGeom prst="rect">
+            <a:avLst/>
+          </a:prstGeom>
+          <a:noFill/>
+          <a:ln/>
+        </p:spPr>
+        <p:txBody>
+          <a:bodyPr wrap="square" rtlCol="0" anchor="ctr"/>
+          <a:lstStyle/>
+          <a:p>
+            <a:pPr indent="0" marL="0">
+              <a:buNone/>
+            </a:pPr>
+            <a:r>
+              <a:rPr lang="en-US" sz="1400" b="1" dirty="0">
+                <a:solidFill>
+                  <a:srgbClr val="FFFFFF"/>
+                </a:solidFill>
+                <a:latin typeface="Aptos" pitchFamily="34" charset="0"/>
+                <a:ea typeface="Aptos" pitchFamily="34" charset="-122"/>
+                <a:cs typeface="Aptos" pitchFamily="34" charset="-120"/>
+              </a:rPr>
+              <a:t>: Semua posisi</a:t>
+            </a:r>
+            <a:endParaRPr lang="en-US" sz="1400" dirty="0"/>
+          </a:p>
+        </p:txBody>
+      </p:sp>
+      <p:sp>
+        <p:nvSpPr>
+          <p:cNvPr id="16" name="Text 11"/>
+          <p:cNvSpPr/>
+          <p:nvPr/>
+        </p:nvSpPr>
+        <p:spPr>
+          <a:xfrm>
+            <a:off x="3566160" y="4069080"/>
+            <a:ext cx="2011680" cy="365760"/>
+          </a:xfrm>
+          <a:prstGeom prst="rect">
+            <a:avLst/>
+          </a:prstGeom>
+          <a:noFill/>
+          <a:ln/>
+        </p:spPr>
+        <p:txBody>
+          <a:bodyPr wrap="square" rtlCol="0" anchor="ctr"/>
+          <a:lstStyle/>
+          <a:p>
+            <a:pPr algn="r" indent="0" marL="0">
+              <a:buNone/>
+            </a:pPr>
+            <a:r>
+              <a:rPr lang="en-US" sz="1400" dirty="0">
+                <a:solidFill>
+                  <a:srgbClr val="FFFFFF"/>
+                </a:solidFill>
+                <a:latin typeface="Aptos" pitchFamily="34" charset="0"/>
+                <a:ea typeface="Aptos" pitchFamily="34" charset="-122"/>
+                <a:cs typeface="Aptos" pitchFamily="34" charset="-120"/>
+              </a:rPr>
+              <a:t>Periode</a:t>
+            </a:r>
+            <a:endParaRPr lang="en-US" sz="1400" dirty="0"/>
+          </a:p>
+        </p:txBody>
+      </p:sp>
+      <p:sp>
+        <p:nvSpPr>
+          <p:cNvPr id="17" name="Text 12"/>
+          <p:cNvSpPr/>
+          <p:nvPr/>
+        </p:nvSpPr>
+        <p:spPr>
+          <a:xfrm>
+            <a:off x="5669280" y="4069080"/>
+            <a:ext cx="3657600" cy="365760"/>
+          </a:xfrm>
+          <a:prstGeom prst="rect">
+            <a:avLst/>
+          </a:prstGeom>
+          <a:noFill/>
+          <a:ln/>
+        </p:spPr>
+        <p:txBody>
+          <a:bodyPr wrap="square" rtlCol="0" anchor="ctr"/>
+          <a:lstStyle/>
+          <a:p>
+            <a:pPr indent="0" marL="0">
+              <a:buNone/>
+            </a:pPr>
+            <a:r>
+              <a:rPr lang="en-US" sz="1400" b="1" dirty="0">
+                <a:solidFill>
+                  <a:srgbClr val="FFFFFF"/>
+                </a:solidFill>
+                <a:latin typeface="Aptos" pitchFamily="34" charset="0"/>
+                <a:ea typeface="Aptos" pitchFamily="34" charset="-122"/>
+                <a:cs typeface="Aptos" pitchFamily="34" charset="-120"/>
+              </a:rPr>
+              <a:t>: Uji Ranking</a:t>
+            </a:r>
+            <a:endParaRPr lang="en-US" sz="1400" dirty="0"/>
+          </a:p>
+        </p:txBody>
+      </p:sp>
+      <p:sp>
+        <p:nvSpPr>
+          <p:cNvPr id="18" name="Text 13"/>
+          <p:cNvSpPr/>
+          <p:nvPr/>
+        </p:nvSpPr>
+        <p:spPr>
+          <a:xfrm>
+            <a:off x="3566160" y="4526280"/>
+            <a:ext cx="2011680" cy="365760"/>
+          </a:xfrm>
+          <a:prstGeom prst="rect">
+            <a:avLst/>
+          </a:prstGeom>
+          <a:noFill/>
+          <a:ln/>
+        </p:spPr>
+        <p:txBody>
+          <a:bodyPr wrap="square" rtlCol="0" anchor="ctr"/>
+          <a:lstStyle/>
+          <a:p>
+            <a:pPr algn="r" indent="0" marL="0">
+              <a:buNone/>
+            </a:pPr>
+            <a:r>
+              <a:rPr lang="en-US" sz="1400" dirty="0">
+                <a:solidFill>
+                  <a:srgbClr val="FFFFFF"/>
+                </a:solidFill>
+                <a:latin typeface="Aptos" pitchFamily="34" charset="0"/>
+                <a:ea typeface="Aptos" pitchFamily="34" charset="-122"/>
+                <a:cs typeface="Aptos" pitchFamily="34" charset="-120"/>
+              </a:rPr>
+              <a:t>Jumlah peserta</a:t>
+            </a:r>
+            <a:endParaRPr lang="en-US" sz="1400" dirty="0"/>
+          </a:p>
+        </p:txBody>
+      </p:sp>
+      <p:sp>
+        <p:nvSpPr>
+          <p:cNvPr id="19" name="Text 14"/>
+          <p:cNvSpPr/>
+          <p:nvPr/>
+        </p:nvSpPr>
+        <p:spPr>
+          <a:xfrm>
+            <a:off x="5669280" y="4526280"/>
+            <a:ext cx="3657600" cy="365760"/>
+          </a:xfrm>
+          <a:prstGeom prst="rect">
+            <a:avLst/>
+          </a:prstGeom>
+          <a:noFill/>
+          <a:ln/>
+        </p:spPr>
+        <p:txBody>
+          <a:bodyPr wrap="square" rtlCol="0" anchor="ctr"/>
+          <a:lstStyle/>
+          <a:p>
+            <a:pPr indent="0" marL="0">
+              <a:buNone/>
+            </a:pPr>
+            <a:r>
+              <a:rPr lang="en-US" sz="1400" b="1" dirty="0">
+                <a:solidFill>
+                  <a:srgbClr val="FFFFFF"/>
+                </a:solidFill>
+                <a:latin typeface="Aptos" pitchFamily="34" charset="0"/>
+                <a:ea typeface="Aptos" pitchFamily="34" charset="-122"/>
+                <a:cs typeface="Aptos" pitchFamily="34" charset="-120"/>
+              </a:rPr>
+              <a:t>: 3</a:t>
+            </a:r>
+            <a:endParaRPr lang="en-US" sz="1400" dirty="0"/>
+          </a:p>
+        </p:txBody>
+      </p:sp>
+      <p:sp>
+        <p:nvSpPr>
+          <p:cNvPr id="20" name="Shape 15"/>
+          <p:cNvSpPr/>
+          <p:nvPr/>
+        </p:nvSpPr>
+        <p:spPr>
+          <a:xfrm>
+            <a:off x="2832811" y="5922569"/>
+            <a:ext cx="6273698" cy="905256"/>
+          </a:xfrm>
+          <a:prstGeom prst="roundRect">
+            <a:avLst>
+              <a:gd name="adj" fmla="val 6061"/>
+            </a:avLst>
+          </a:prstGeom>
+          <a:solidFill>
+            <a:srgbClr val="FFFFFF"/>
           </a:solidFill>
           <a:ln w="12700">
             <a:solidFill>
@@ -1195,544 +1730,6 @@
       </p:sp>
       <p:sp>
         <p:nvSpPr>
-          <p:cNvPr id="7" name="Text 2"/>
-          <p:cNvSpPr/>
-          <p:nvPr/>
-        </p:nvSpPr>
-        <p:spPr>
-          <a:xfrm>
-            <a:off x="4607662" y="1151230"/>
-            <a:ext cx="2991002" cy="461772"/>
-          </a:xfrm>
-          <a:prstGeom prst="rect">
-            <a:avLst/>
-          </a:prstGeom>
-          <a:noFill/>
-          <a:ln/>
-        </p:spPr>
-        <p:txBody>
-          <a:bodyPr wrap="square" rtlCol="0" anchor="ctr">
-            <a:normAutofit/>
-          </a:bodyPr>
-          <a:lstStyle/>
-          <a:p>
-            <a:pPr algn="ctr" indent="0" marL="0">
-              <a:buNone/>
-            </a:pPr>
-            <a:r>
-              <a:rPr lang="en-US" sz="2000" b="1" dirty="0">
-                <a:solidFill>
-                  <a:srgbClr val="FFFFFF"/>
-                </a:solidFill>
-                <a:latin typeface="Aptos" pitchFamily="34" charset="0"/>
-                <a:ea typeface="Aptos" pitchFamily="34" charset="-122"/>
-                <a:cs typeface="Aptos" pitchFamily="34" charset="-120"/>
-              </a:rPr>
-              <a:t>Semua unit</a:t>
-            </a:r>
-            <a:endParaRPr lang="en-US" sz="2000" dirty="0"/>
-          </a:p>
-        </p:txBody>
-      </p:sp>
-      <p:sp>
-        <p:nvSpPr>
-          <p:cNvPr id="8" name="Text 3"/>
-          <p:cNvSpPr/>
-          <p:nvPr/>
-        </p:nvSpPr>
-        <p:spPr>
-          <a:xfrm>
-            <a:off x="4772254" y="1681582"/>
-            <a:ext cx="2648102" cy="369418"/>
-          </a:xfrm>
-          <a:prstGeom prst="rect">
-            <a:avLst/>
-          </a:prstGeom>
-          <a:noFill/>
-          <a:ln/>
-        </p:spPr>
-        <p:txBody>
-          <a:bodyPr wrap="square" rtlCol="0" anchor="ctr">
-            <a:normAutofit/>
-          </a:bodyPr>
-          <a:lstStyle/>
-          <a:p>
-            <a:pPr algn="ctr" indent="0" marL="0">
-              <a:buNone/>
-            </a:pPr>
-            <a:r>
-              <a:rPr lang="en-US" sz="2400" dirty="0">
-                <a:solidFill>
-                  <a:srgbClr val="FFFFFF"/>
-                </a:solidFill>
-                <a:latin typeface="Aptos" pitchFamily="34" charset="0"/>
-                <a:ea typeface="Aptos" pitchFamily="34" charset="-122"/>
-                <a:cs typeface="Aptos" pitchFamily="34" charset="-120"/>
-              </a:rPr>
-              <a:t>Semua posisi</a:t>
-            </a:r>
-            <a:endParaRPr lang="en-US" sz="2400" dirty="0"/>
-          </a:p>
-        </p:txBody>
-      </p:sp>
-      <p:sp>
-        <p:nvSpPr>
-          <p:cNvPr id="9" name="Text 4"/>
-          <p:cNvSpPr/>
-          <p:nvPr/>
-        </p:nvSpPr>
-        <p:spPr>
-          <a:xfrm>
-            <a:off x="3269894" y="2176272"/>
-            <a:ext cx="5692140" cy="365760"/>
-          </a:xfrm>
-          <a:prstGeom prst="rect">
-            <a:avLst/>
-          </a:prstGeom>
-          <a:noFill/>
-          <a:ln/>
-        </p:spPr>
-        <p:txBody>
-          <a:bodyPr wrap="square" rtlCol="0" anchor="ctr"/>
-          <a:lstStyle/>
-          <a:p>
-            <a:pPr algn="ctr" indent="0" marL="0">
-              <a:buNone/>
-            </a:pPr>
-            <a:r>
-              <a:rPr lang="en-US" sz="1800" dirty="0">
-                <a:solidFill>
-                  <a:srgbClr val="FFFFFF"/>
-                </a:solidFill>
-                <a:latin typeface="Aptos" pitchFamily="34" charset="0"/>
-                <a:ea typeface="Aptos" pitchFamily="34" charset="-122"/>
-                <a:cs typeface="Aptos" pitchFamily="34" charset="-120"/>
-              </a:rPr>
-              <a:t>Uji Ranking</a:t>
-            </a:r>
-            <a:endParaRPr lang="en-US" sz="1800" dirty="0"/>
-          </a:p>
-        </p:txBody>
-      </p:sp>
-      <p:sp>
-        <p:nvSpPr>
-          <p:cNvPr id="10" name="Text 5"/>
-          <p:cNvSpPr/>
-          <p:nvPr/>
-        </p:nvSpPr>
-        <p:spPr>
-          <a:xfrm>
-            <a:off x="3566160" y="2697480"/>
-            <a:ext cx="2011680" cy="365760"/>
-          </a:xfrm>
-          <a:prstGeom prst="rect">
-            <a:avLst/>
-          </a:prstGeom>
-          <a:noFill/>
-          <a:ln/>
-        </p:spPr>
-        <p:txBody>
-          <a:bodyPr wrap="square" rtlCol="0" anchor="ctr"/>
-          <a:lstStyle/>
-          <a:p>
-            <a:pPr algn="r" indent="0" marL="0">
-              <a:buNone/>
-            </a:pPr>
-            <a:r>
-              <a:rPr lang="en-US" sz="1400" dirty="0">
-                <a:solidFill>
-                  <a:srgbClr val="FFFFFF"/>
-                </a:solidFill>
-                <a:latin typeface="Aptos" pitchFamily="34" charset="0"/>
-                <a:ea typeface="Aptos" pitchFamily="34" charset="-122"/>
-                <a:cs typeface="Aptos" pitchFamily="34" charset="-120"/>
-              </a:rPr>
-              <a:t>Jenis kantor</a:t>
-            </a:r>
-            <a:endParaRPr lang="en-US" sz="1400" dirty="0"/>
-          </a:p>
-        </p:txBody>
-      </p:sp>
-      <p:sp>
-        <p:nvSpPr>
-          <p:cNvPr id="11" name="Text 6"/>
-          <p:cNvSpPr/>
-          <p:nvPr/>
-        </p:nvSpPr>
-        <p:spPr>
-          <a:xfrm>
-            <a:off x="5669280" y="2697480"/>
-            <a:ext cx="3657600" cy="365760"/>
-          </a:xfrm>
-          <a:prstGeom prst="rect">
-            <a:avLst/>
-          </a:prstGeom>
-          <a:noFill/>
-          <a:ln/>
-        </p:spPr>
-        <p:txBody>
-          <a:bodyPr wrap="square" rtlCol="0" anchor="ctr"/>
-          <a:lstStyle/>
-          <a:p>
-            <a:pPr indent="0" marL="0">
-              <a:buNone/>
-            </a:pPr>
-            <a:r>
-              <a:rPr lang="en-US" sz="1400" b="1" dirty="0">
-                <a:solidFill>
-                  <a:srgbClr val="FFFFFF"/>
-                </a:solidFill>
-                <a:latin typeface="Aptos" pitchFamily="34" charset="0"/>
-                <a:ea typeface="Aptos" pitchFamily="34" charset="-122"/>
-                <a:cs typeface="Aptos" pitchFamily="34" charset="-120"/>
-              </a:rPr>
-              <a:t>: Semua jenis</a:t>
-            </a:r>
-            <a:endParaRPr lang="en-US" sz="1400" dirty="0"/>
-          </a:p>
-        </p:txBody>
-      </p:sp>
-      <p:sp>
-        <p:nvSpPr>
-          <p:cNvPr id="12" name="Text 7"/>
-          <p:cNvSpPr/>
-          <p:nvPr/>
-        </p:nvSpPr>
-        <p:spPr>
-          <a:xfrm>
-            <a:off x="3566160" y="3154680"/>
-            <a:ext cx="2011680" cy="365760"/>
-          </a:xfrm>
-          <a:prstGeom prst="rect">
-            <a:avLst/>
-          </a:prstGeom>
-          <a:noFill/>
-          <a:ln/>
-        </p:spPr>
-        <p:txBody>
-          <a:bodyPr wrap="square" rtlCol="0" anchor="ctr"/>
-          <a:lstStyle/>
-          <a:p>
-            <a:pPr algn="r" indent="0" marL="0">
-              <a:buNone/>
-            </a:pPr>
-            <a:r>
-              <a:rPr lang="en-US" sz="1400" dirty="0">
-                <a:solidFill>
-                  <a:srgbClr val="FFFFFF"/>
-                </a:solidFill>
-                <a:latin typeface="Aptos" pitchFamily="34" charset="0"/>
-                <a:ea typeface="Aptos" pitchFamily="34" charset="-122"/>
-                <a:cs typeface="Aptos" pitchFamily="34" charset="-120"/>
-              </a:rPr>
-              <a:t>Unit / cabang</a:t>
-            </a:r>
-            <a:endParaRPr lang="en-US" sz="1400" dirty="0"/>
-          </a:p>
-        </p:txBody>
-      </p:sp>
-      <p:sp>
-        <p:nvSpPr>
-          <p:cNvPr id="13" name="Text 8"/>
-          <p:cNvSpPr/>
-          <p:nvPr/>
-        </p:nvSpPr>
-        <p:spPr>
-          <a:xfrm>
-            <a:off x="5669280" y="3154680"/>
-            <a:ext cx="3657600" cy="365760"/>
-          </a:xfrm>
-          <a:prstGeom prst="rect">
-            <a:avLst/>
-          </a:prstGeom>
-          <a:noFill/>
-          <a:ln/>
-        </p:spPr>
-        <p:txBody>
-          <a:bodyPr wrap="square" rtlCol="0" anchor="ctr"/>
-          <a:lstStyle/>
-          <a:p>
-            <a:pPr indent="0" marL="0">
-              <a:buNone/>
-            </a:pPr>
-            <a:r>
-              <a:rPr lang="en-US" sz="1400" b="1" dirty="0">
-                <a:solidFill>
-                  <a:srgbClr val="FFFFFF"/>
-                </a:solidFill>
-                <a:latin typeface="Aptos" pitchFamily="34" charset="0"/>
-                <a:ea typeface="Aptos" pitchFamily="34" charset="-122"/>
-                <a:cs typeface="Aptos" pitchFamily="34" charset="-120"/>
-              </a:rPr>
-              <a:t>: Semua unit</a:t>
-            </a:r>
-            <a:endParaRPr lang="en-US" sz="1400" dirty="0"/>
-          </a:p>
-        </p:txBody>
-      </p:sp>
-      <p:sp>
-        <p:nvSpPr>
-          <p:cNvPr id="14" name="Text 9"/>
-          <p:cNvSpPr/>
-          <p:nvPr/>
-        </p:nvSpPr>
-        <p:spPr>
-          <a:xfrm>
-            <a:off x="3566160" y="3611880"/>
-            <a:ext cx="2011680" cy="365760"/>
-          </a:xfrm>
-          <a:prstGeom prst="rect">
-            <a:avLst/>
-          </a:prstGeom>
-          <a:noFill/>
-          <a:ln/>
-        </p:spPr>
-        <p:txBody>
-          <a:bodyPr wrap="square" rtlCol="0" anchor="ctr"/>
-          <a:lstStyle/>
-          <a:p>
-            <a:pPr algn="r" indent="0" marL="0">
-              <a:buNone/>
-            </a:pPr>
-            <a:r>
-              <a:rPr lang="en-US" sz="1400" dirty="0">
-                <a:solidFill>
-                  <a:srgbClr val="FFFFFF"/>
-                </a:solidFill>
-                <a:latin typeface="Aptos" pitchFamily="34" charset="0"/>
-                <a:ea typeface="Aptos" pitchFamily="34" charset="-122"/>
-                <a:cs typeface="Aptos" pitchFamily="34" charset="-120"/>
-              </a:rPr>
-              <a:t>Posisi dinilai</a:t>
-            </a:r>
-            <a:endParaRPr lang="en-US" sz="1400" dirty="0"/>
-          </a:p>
-        </p:txBody>
-      </p:sp>
-      <p:sp>
-        <p:nvSpPr>
-          <p:cNvPr id="15" name="Text 10"/>
-          <p:cNvSpPr/>
-          <p:nvPr/>
-        </p:nvSpPr>
-        <p:spPr>
-          <a:xfrm>
-            <a:off x="5669280" y="3611880"/>
-            <a:ext cx="3657600" cy="365760"/>
-          </a:xfrm>
-          <a:prstGeom prst="rect">
-            <a:avLst/>
-          </a:prstGeom>
-          <a:noFill/>
-          <a:ln/>
-        </p:spPr>
-        <p:txBody>
-          <a:bodyPr wrap="square" rtlCol="0" anchor="ctr"/>
-          <a:lstStyle/>
-          <a:p>
-            <a:pPr indent="0" marL="0">
-              <a:buNone/>
-            </a:pPr>
-            <a:r>
-              <a:rPr lang="en-US" sz="1400" b="1" dirty="0">
-                <a:solidFill>
-                  <a:srgbClr val="FFFFFF"/>
-                </a:solidFill>
-                <a:latin typeface="Aptos" pitchFamily="34" charset="0"/>
-                <a:ea typeface="Aptos" pitchFamily="34" charset="-122"/>
-                <a:cs typeface="Aptos" pitchFamily="34" charset="-120"/>
-              </a:rPr>
-              <a:t>: Semua posisi</a:t>
-            </a:r>
-            <a:endParaRPr lang="en-US" sz="1400" dirty="0"/>
-          </a:p>
-        </p:txBody>
-      </p:sp>
-      <p:sp>
-        <p:nvSpPr>
-          <p:cNvPr id="16" name="Text 11"/>
-          <p:cNvSpPr/>
-          <p:nvPr/>
-        </p:nvSpPr>
-        <p:spPr>
-          <a:xfrm>
-            <a:off x="3566160" y="4069080"/>
-            <a:ext cx="2011680" cy="365760"/>
-          </a:xfrm>
-          <a:prstGeom prst="rect">
-            <a:avLst/>
-          </a:prstGeom>
-          <a:noFill/>
-          <a:ln/>
-        </p:spPr>
-        <p:txBody>
-          <a:bodyPr wrap="square" rtlCol="0" anchor="ctr"/>
-          <a:lstStyle/>
-          <a:p>
-            <a:pPr algn="r" indent="0" marL="0">
-              <a:buNone/>
-            </a:pPr>
-            <a:r>
-              <a:rPr lang="en-US" sz="1400" dirty="0">
-                <a:solidFill>
-                  <a:srgbClr val="FFFFFF"/>
-                </a:solidFill>
-                <a:latin typeface="Aptos" pitchFamily="34" charset="0"/>
-                <a:ea typeface="Aptos" pitchFamily="34" charset="-122"/>
-                <a:cs typeface="Aptos" pitchFamily="34" charset="-120"/>
-              </a:rPr>
-              <a:t>Periode</a:t>
-            </a:r>
-            <a:endParaRPr lang="en-US" sz="1400" dirty="0"/>
-          </a:p>
-        </p:txBody>
-      </p:sp>
-      <p:sp>
-        <p:nvSpPr>
-          <p:cNvPr id="17" name="Text 12"/>
-          <p:cNvSpPr/>
-          <p:nvPr/>
-        </p:nvSpPr>
-        <p:spPr>
-          <a:xfrm>
-            <a:off x="5669280" y="4069080"/>
-            <a:ext cx="3657600" cy="365760"/>
-          </a:xfrm>
-          <a:prstGeom prst="rect">
-            <a:avLst/>
-          </a:prstGeom>
-          <a:noFill/>
-          <a:ln/>
-        </p:spPr>
-        <p:txBody>
-          <a:bodyPr wrap="square" rtlCol="0" anchor="ctr"/>
-          <a:lstStyle/>
-          <a:p>
-            <a:pPr indent="0" marL="0">
-              <a:buNone/>
-            </a:pPr>
-            <a:r>
-              <a:rPr lang="en-US" sz="1400" b="1" dirty="0">
-                <a:solidFill>
-                  <a:srgbClr val="FFFFFF"/>
-                </a:solidFill>
-                <a:latin typeface="Aptos" pitchFamily="34" charset="0"/>
-                <a:ea typeface="Aptos" pitchFamily="34" charset="-122"/>
-                <a:cs typeface="Aptos" pitchFamily="34" charset="-120"/>
-              </a:rPr>
-              <a:t>: Uji Ranking</a:t>
-            </a:r>
-            <a:endParaRPr lang="en-US" sz="1400" dirty="0"/>
-          </a:p>
-        </p:txBody>
-      </p:sp>
-      <p:sp>
-        <p:nvSpPr>
-          <p:cNvPr id="18" name="Text 13"/>
-          <p:cNvSpPr/>
-          <p:nvPr/>
-        </p:nvSpPr>
-        <p:spPr>
-          <a:xfrm>
-            <a:off x="3566160" y="4526280"/>
-            <a:ext cx="2011680" cy="365760"/>
-          </a:xfrm>
-          <a:prstGeom prst="rect">
-            <a:avLst/>
-          </a:prstGeom>
-          <a:noFill/>
-          <a:ln/>
-        </p:spPr>
-        <p:txBody>
-          <a:bodyPr wrap="square" rtlCol="0" anchor="ctr"/>
-          <a:lstStyle/>
-          <a:p>
-            <a:pPr algn="r" indent="0" marL="0">
-              <a:buNone/>
-            </a:pPr>
-            <a:r>
-              <a:rPr lang="en-US" sz="1400" dirty="0">
-                <a:solidFill>
-                  <a:srgbClr val="FFFFFF"/>
-                </a:solidFill>
-                <a:latin typeface="Aptos" pitchFamily="34" charset="0"/>
-                <a:ea typeface="Aptos" pitchFamily="34" charset="-122"/>
-                <a:cs typeface="Aptos" pitchFamily="34" charset="-120"/>
-              </a:rPr>
-              <a:t>Jumlah peserta</a:t>
-            </a:r>
-            <a:endParaRPr lang="en-US" sz="1400" dirty="0"/>
-          </a:p>
-        </p:txBody>
-      </p:sp>
-      <p:sp>
-        <p:nvSpPr>
-          <p:cNvPr id="19" name="Text 14"/>
-          <p:cNvSpPr/>
-          <p:nvPr/>
-        </p:nvSpPr>
-        <p:spPr>
-          <a:xfrm>
-            <a:off x="5669280" y="4526280"/>
-            <a:ext cx="3657600" cy="365760"/>
-          </a:xfrm>
-          <a:prstGeom prst="rect">
-            <a:avLst/>
-          </a:prstGeom>
-          <a:noFill/>
-          <a:ln/>
-        </p:spPr>
-        <p:txBody>
-          <a:bodyPr wrap="square" rtlCol="0" anchor="ctr"/>
-          <a:lstStyle/>
-          <a:p>
-            <a:pPr indent="0" marL="0">
-              <a:buNone/>
-            </a:pPr>
-            <a:r>
-              <a:rPr lang="en-US" sz="1400" b="1" dirty="0">
-                <a:solidFill>
-                  <a:srgbClr val="FFFFFF"/>
-                </a:solidFill>
-                <a:latin typeface="Aptos" pitchFamily="34" charset="0"/>
-                <a:ea typeface="Aptos" pitchFamily="34" charset="-122"/>
-                <a:cs typeface="Aptos" pitchFamily="34" charset="-120"/>
-              </a:rPr>
-              <a:t>: 3</a:t>
-            </a:r>
-            <a:endParaRPr lang="en-US" sz="1400" dirty="0"/>
-          </a:p>
-        </p:txBody>
-      </p:sp>
-      <p:sp>
-        <p:nvSpPr>
-          <p:cNvPr id="20" name="Shape 15"/>
-          <p:cNvSpPr/>
-          <p:nvPr/>
-        </p:nvSpPr>
-        <p:spPr>
-          <a:xfrm>
-            <a:off x="2832811" y="5922569"/>
-            <a:ext cx="6273698" cy="905256"/>
-          </a:xfrm>
-          <a:prstGeom prst="roundRect">
-            <a:avLst>
-              <a:gd name="adj" fmla="val 6061"/>
-            </a:avLst>
-          </a:prstGeom>
-          <a:solidFill>
-            <a:srgbClr val="FFFFFF"/>
-          </a:solidFill>
-          <a:ln w="12700">
-            <a:solidFill>
-              <a:srgbClr val="FFFFFF"/>
-            </a:solidFill>
-            <a:prstDash val="solid"/>
-          </a:ln>
-        </p:spPr>
-      </p:sp>
-      <p:sp>
-        <p:nvSpPr>
           <p:cNvPr id="21" name="Shape 16"/>
           <p:cNvSpPr/>
           <p:nvPr/>
@@ -1849,9 +1846,9 @@
               <a:buNone/>
             </a:pPr>
             <a:r>
-              <a:rPr lang="en-US" sz="1100" b="1" dirty="0">
-                <a:solidFill>
-                  <a:srgbClr val="222222"/>
+              <a:rPr lang="en-US" sz="1000" b="1" dirty="0">
+                <a:solidFill>
+                  <a:srgbClr val="142D64"/>
                 </a:solidFill>
                 <a:latin typeface="Aptos" pitchFamily="34" charset="0"/>
                 <a:ea typeface="Aptos" pitchFamily="34" charset="-122"/>
@@ -1859,7 +1856,7 @@
               </a:rPr>
               <a:t>4,80-5,00</a:t>
             </a:r>
-            <a:endParaRPr lang="en-US" sz="1100" dirty="0"/>
+            <a:endParaRPr lang="en-US" sz="1000" dirty="0"/>
           </a:p>
         </p:txBody>
       </p:sp>
@@ -1890,9 +1887,9 @@
               <a:buNone/>
             </a:pPr>
             <a:r>
-              <a:rPr lang="en-US" sz="1100" dirty="0">
-                <a:solidFill>
-                  <a:srgbClr val="333333"/>
+              <a:rPr lang="en-US" sz="850" dirty="0">
+                <a:solidFill>
+                  <a:srgbClr val="142D64"/>
                 </a:solidFill>
                 <a:latin typeface="Aptos" pitchFamily="34" charset="0"/>
                 <a:ea typeface="Aptos" pitchFamily="34" charset="-122"/>
@@ -1900,7 +1897,7 @@
               </a:rPr>
               <a:t>Istimewa</a:t>
             </a:r>
-            <a:endParaRPr lang="en-US" sz="1100" dirty="0"/>
+            <a:endParaRPr lang="en-US" sz="850" dirty="0"/>
           </a:p>
         </p:txBody>
       </p:sp>
@@ -1956,9 +1953,9 @@
               <a:buNone/>
             </a:pPr>
             <a:r>
-              <a:rPr lang="en-US" sz="1100" b="1" dirty="0">
-                <a:solidFill>
-                  <a:srgbClr val="222222"/>
+              <a:rPr lang="en-US" sz="1000" b="1" dirty="0">
+                <a:solidFill>
+                  <a:srgbClr val="142D64"/>
                 </a:solidFill>
                 <a:latin typeface="Aptos" pitchFamily="34" charset="0"/>
                 <a:ea typeface="Aptos" pitchFamily="34" charset="-122"/>
@@ -1966,7 +1963,7 @@
               </a:rPr>
               <a:t>4,60-4,79</a:t>
             </a:r>
-            <a:endParaRPr lang="en-US" sz="1100" dirty="0"/>
+            <a:endParaRPr lang="en-US" sz="1000" dirty="0"/>
           </a:p>
         </p:txBody>
       </p:sp>
@@ -1997,9 +1994,9 @@
               <a:buNone/>
             </a:pPr>
             <a:r>
-              <a:rPr lang="en-US" sz="1100" dirty="0">
-                <a:solidFill>
-                  <a:srgbClr val="333333"/>
+              <a:rPr lang="en-US" sz="850" dirty="0">
+                <a:solidFill>
+                  <a:srgbClr val="142D64"/>
                 </a:solidFill>
                 <a:latin typeface="Aptos" pitchFamily="34" charset="0"/>
                 <a:ea typeface="Aptos" pitchFamily="34" charset="-122"/>
@@ -2007,7 +2004,7 @@
               </a:rPr>
               <a:t>Sangat Baik</a:t>
             </a:r>
-            <a:endParaRPr lang="en-US" sz="1100" dirty="0"/>
+            <a:endParaRPr lang="en-US" sz="850" dirty="0"/>
           </a:p>
         </p:txBody>
       </p:sp>
@@ -2063,9 +2060,9 @@
               <a:buNone/>
             </a:pPr>
             <a:r>
-              <a:rPr lang="en-US" sz="1100" b="1" dirty="0">
-                <a:solidFill>
-                  <a:srgbClr val="222222"/>
+              <a:rPr lang="en-US" sz="1000" b="1" dirty="0">
+                <a:solidFill>
+                  <a:srgbClr val="142D64"/>
                 </a:solidFill>
                 <a:latin typeface="Aptos" pitchFamily="34" charset="0"/>
                 <a:ea typeface="Aptos" pitchFamily="34" charset="-122"/>
@@ -2073,7 +2070,7 @@
               </a:rPr>
               <a:t>4,00-4,59</a:t>
             </a:r>
-            <a:endParaRPr lang="en-US" sz="1100" dirty="0"/>
+            <a:endParaRPr lang="en-US" sz="1000" dirty="0"/>
           </a:p>
         </p:txBody>
       </p:sp>
@@ -2104,9 +2101,9 @@
               <a:buNone/>
             </a:pPr>
             <a:r>
-              <a:rPr lang="en-US" sz="1100" dirty="0">
-                <a:solidFill>
-                  <a:srgbClr val="333333"/>
+              <a:rPr lang="en-US" sz="850" dirty="0">
+                <a:solidFill>
+                  <a:srgbClr val="142D64"/>
                 </a:solidFill>
                 <a:latin typeface="Aptos" pitchFamily="34" charset="0"/>
                 <a:ea typeface="Aptos" pitchFamily="34" charset="-122"/>
@@ -2114,7 +2111,7 @@
               </a:rPr>
               <a:t>Baik</a:t>
             </a:r>
-            <a:endParaRPr lang="en-US" sz="1100" dirty="0"/>
+            <a:endParaRPr lang="en-US" sz="850" dirty="0"/>
           </a:p>
         </p:txBody>
       </p:sp>
@@ -2170,9 +2167,9 @@
               <a:buNone/>
             </a:pPr>
             <a:r>
-              <a:rPr lang="en-US" sz="1100" b="1" dirty="0">
-                <a:solidFill>
-                  <a:srgbClr val="222222"/>
+              <a:rPr lang="en-US" sz="1000" b="1" dirty="0">
+                <a:solidFill>
+                  <a:srgbClr val="142D64"/>
                 </a:solidFill>
                 <a:latin typeface="Aptos" pitchFamily="34" charset="0"/>
                 <a:ea typeface="Aptos" pitchFamily="34" charset="-122"/>
@@ -2180,7 +2177,7 @@
               </a:rPr>
               <a:t>3,60-3,99</a:t>
             </a:r>
-            <a:endParaRPr lang="en-US" sz="1100" dirty="0"/>
+            <a:endParaRPr lang="en-US" sz="1000" dirty="0"/>
           </a:p>
         </p:txBody>
       </p:sp>
@@ -2211,9 +2208,9 @@
               <a:buNone/>
             </a:pPr>
             <a:r>
-              <a:rPr lang="en-US" sz="1100" dirty="0">
-                <a:solidFill>
-                  <a:srgbClr val="333333"/>
+              <a:rPr lang="en-US" sz="850" dirty="0">
+                <a:solidFill>
+                  <a:srgbClr val="142D64"/>
                 </a:solidFill>
                 <a:latin typeface="Aptos" pitchFamily="34" charset="0"/>
                 <a:ea typeface="Aptos" pitchFamily="34" charset="-122"/>
@@ -2221,7 +2218,7 @@
               </a:rPr>
               <a:t>Cukup</a:t>
             </a:r>
-            <a:endParaRPr lang="en-US" sz="1100" dirty="0"/>
+            <a:endParaRPr lang="en-US" sz="850" dirty="0"/>
           </a:p>
         </p:txBody>
       </p:sp>
@@ -2277,9 +2274,9 @@
               <a:buNone/>
             </a:pPr>
             <a:r>
-              <a:rPr lang="en-US" sz="1100" b="1" dirty="0">
-                <a:solidFill>
-                  <a:srgbClr val="222222"/>
+              <a:rPr lang="en-US" sz="1000" b="1" dirty="0">
+                <a:solidFill>
+                  <a:srgbClr val="142D64"/>
                 </a:solidFill>
                 <a:latin typeface="Aptos" pitchFamily="34" charset="0"/>
                 <a:ea typeface="Aptos" pitchFamily="34" charset="-122"/>
@@ -2287,7 +2284,7 @@
               </a:rPr>
               <a:t>&lt;3,59</a:t>
             </a:r>
-            <a:endParaRPr lang="en-US" sz="1100" dirty="0"/>
+            <a:endParaRPr lang="en-US" sz="1000" dirty="0"/>
           </a:p>
         </p:txBody>
       </p:sp>
@@ -2318,9 +2315,9 @@
               <a:buNone/>
             </a:pPr>
             <a:r>
-              <a:rPr lang="en-US" sz="1100" dirty="0">
-                <a:solidFill>
-                  <a:srgbClr val="333333"/>
+              <a:rPr lang="en-US" sz="850" dirty="0">
+                <a:solidFill>
+                  <a:srgbClr val="142D64"/>
                 </a:solidFill>
                 <a:latin typeface="Aptos" pitchFamily="34" charset="0"/>
                 <a:ea typeface="Aptos" pitchFamily="34" charset="-122"/>
@@ -2328,7 +2325,7 @@
               </a:rPr>
               <a:t>Kurang</a:t>
             </a:r>
-            <a:endParaRPr lang="en-US" sz="1100" dirty="0"/>
+            <a:endParaRPr lang="en-US" sz="850" dirty="0"/>
           </a:p>
         </p:txBody>
       </p:sp>
@@ -2463,7 +2460,7 @@
               <a:buNone/>
             </a:pPr>
             <a:r>
-              <a:rPr lang="en-US" sz="4000" b="1" dirty="0">
+              <a:rPr lang="en-US" sz="4400" b="1" dirty="0">
                 <a:solidFill>
                   <a:srgbClr val="FFFFFF"/>
                 </a:solidFill>
@@ -2473,7 +2470,7 @@
               </a:rPr>
               <a:t>Service Drill Ranking</a:t>
             </a:r>
-            <a:endParaRPr lang="en-US" sz="4000" dirty="0"/>
+            <a:endParaRPr lang="en-US" sz="4400" dirty="0"/>
           </a:p>
         </p:txBody>
       </p:sp>
@@ -2490,13 +2487,10 @@
           </a:xfrm>
           <a:prstGeom prst="roundRect">
             <a:avLst>
-              <a:gd name="adj" fmla="val 15842"/>
+              <a:gd name="adj" fmla="val 19802"/>
             </a:avLst>
           </a:prstGeom>
-          <a:solidFill>
-            <a:srgbClr val="2E4FD6"/>
-          </a:solidFill>
-          <a:ln w="12700">
+          <a:ln w="15875">
             <a:solidFill>
               <a:srgbClr val="FFFFFF"/>
             </a:solidFill>
@@ -2535,9 +2529,9 @@
                 <a:solidFill>
                   <a:srgbClr val="FFFFFF"/>
                 </a:solidFill>
-                <a:latin typeface="Aptos" pitchFamily="34" charset="0"/>
-                <a:ea typeface="Aptos" pitchFamily="34" charset="-122"/>
-                <a:cs typeface="Aptos" pitchFamily="34" charset="-120"/>
+                <a:latin typeface="Poppins" pitchFamily="34" charset="0"/>
+                <a:ea typeface="Poppins" pitchFamily="34" charset="-122"/>
+                <a:cs typeface="Poppins" pitchFamily="34" charset="-120"/>
               </a:rPr>
               <a:t>RO-SMP KANWIL SULAMPUA</a:t>
             </a:r>
@@ -2821,7 +2815,7 @@
               <a:buNone/>
             </a:pPr>
             <a:r>
-              <a:rPr lang="en-US" sz="1400" b="1" dirty="0">
+              <a:rPr lang="en-US" sz="1200" b="1" dirty="0">
                 <a:solidFill>
                   <a:srgbClr val="FFFFFF"/>
                 </a:solidFill>
@@ -2831,7 +2825,7 @@
               </a:rPr>
               <a:t>Sangat Baik</a:t>
             </a:r>
-            <a:endParaRPr lang="en-US" sz="1400" dirty="0"/>
+            <a:endParaRPr lang="en-US" sz="1200" dirty="0"/>
           </a:p>
         </p:txBody>
       </p:sp>
@@ -2980,9 +2974,9 @@
               <a:buNone/>
             </a:pPr>
             <a:r>
-              <a:rPr lang="en-US" sz="1100" b="1" dirty="0">
-                <a:solidFill>
-                  <a:srgbClr val="222222"/>
+              <a:rPr lang="en-US" sz="1000" b="1" dirty="0">
+                <a:solidFill>
+                  <a:srgbClr val="142D64"/>
                 </a:solidFill>
                 <a:latin typeface="Aptos" pitchFamily="34" charset="0"/>
                 <a:ea typeface="Aptos" pitchFamily="34" charset="-122"/>
@@ -2990,7 +2984,7 @@
               </a:rPr>
               <a:t>4,80-5,00</a:t>
             </a:r>
-            <a:endParaRPr lang="en-US" sz="1100" dirty="0"/>
+            <a:endParaRPr lang="en-US" sz="1000" dirty="0"/>
           </a:p>
         </p:txBody>
       </p:sp>
@@ -3021,9 +3015,9 @@
               <a:buNone/>
             </a:pPr>
             <a:r>
-              <a:rPr lang="en-US" sz="1100" dirty="0">
-                <a:solidFill>
-                  <a:srgbClr val="333333"/>
+              <a:rPr lang="en-US" sz="850" dirty="0">
+                <a:solidFill>
+                  <a:srgbClr val="142D64"/>
                 </a:solidFill>
                 <a:latin typeface="Aptos" pitchFamily="34" charset="0"/>
                 <a:ea typeface="Aptos" pitchFamily="34" charset="-122"/>
@@ -3031,7 +3025,7 @@
               </a:rPr>
               <a:t>Istimewa</a:t>
             </a:r>
-            <a:endParaRPr lang="en-US" sz="1100" dirty="0"/>
+            <a:endParaRPr lang="en-US" sz="850" dirty="0"/>
           </a:p>
         </p:txBody>
       </p:sp>
@@ -3087,9 +3081,9 @@
               <a:buNone/>
             </a:pPr>
             <a:r>
-              <a:rPr lang="en-US" sz="1100" b="1" dirty="0">
-                <a:solidFill>
-                  <a:srgbClr val="222222"/>
+              <a:rPr lang="en-US" sz="1000" b="1" dirty="0">
+                <a:solidFill>
+                  <a:srgbClr val="142D64"/>
                 </a:solidFill>
                 <a:latin typeface="Aptos" pitchFamily="34" charset="0"/>
                 <a:ea typeface="Aptos" pitchFamily="34" charset="-122"/>
@@ -3097,7 +3091,7 @@
               </a:rPr>
               <a:t>4,60-4,79</a:t>
             </a:r>
-            <a:endParaRPr lang="en-US" sz="1100" dirty="0"/>
+            <a:endParaRPr lang="en-US" sz="1000" dirty="0"/>
           </a:p>
         </p:txBody>
       </p:sp>
@@ -3128,9 +3122,9 @@
               <a:buNone/>
             </a:pPr>
             <a:r>
-              <a:rPr lang="en-US" sz="1100" dirty="0">
-                <a:solidFill>
-                  <a:srgbClr val="333333"/>
+              <a:rPr lang="en-US" sz="850" dirty="0">
+                <a:solidFill>
+                  <a:srgbClr val="142D64"/>
                 </a:solidFill>
                 <a:latin typeface="Aptos" pitchFamily="34" charset="0"/>
                 <a:ea typeface="Aptos" pitchFamily="34" charset="-122"/>
@@ -3138,7 +3132,7 @@
               </a:rPr>
               <a:t>Sangat Baik</a:t>
             </a:r>
-            <a:endParaRPr lang="en-US" sz="1100" dirty="0"/>
+            <a:endParaRPr lang="en-US" sz="850" dirty="0"/>
           </a:p>
         </p:txBody>
       </p:sp>
@@ -3194,9 +3188,9 @@
               <a:buNone/>
             </a:pPr>
             <a:r>
-              <a:rPr lang="en-US" sz="1100" b="1" dirty="0">
-                <a:solidFill>
-                  <a:srgbClr val="222222"/>
+              <a:rPr lang="en-US" sz="1000" b="1" dirty="0">
+                <a:solidFill>
+                  <a:srgbClr val="142D64"/>
                 </a:solidFill>
                 <a:latin typeface="Aptos" pitchFamily="34" charset="0"/>
                 <a:ea typeface="Aptos" pitchFamily="34" charset="-122"/>
@@ -3204,7 +3198,7 @@
               </a:rPr>
               <a:t>4,00-4,59</a:t>
             </a:r>
-            <a:endParaRPr lang="en-US" sz="1100" dirty="0"/>
+            <a:endParaRPr lang="en-US" sz="1000" dirty="0"/>
           </a:p>
         </p:txBody>
       </p:sp>
@@ -3235,9 +3229,9 @@
               <a:buNone/>
             </a:pPr>
             <a:r>
-              <a:rPr lang="en-US" sz="1100" dirty="0">
-                <a:solidFill>
-                  <a:srgbClr val="333333"/>
+              <a:rPr lang="en-US" sz="850" dirty="0">
+                <a:solidFill>
+                  <a:srgbClr val="142D64"/>
                 </a:solidFill>
                 <a:latin typeface="Aptos" pitchFamily="34" charset="0"/>
                 <a:ea typeface="Aptos" pitchFamily="34" charset="-122"/>
@@ -3245,7 +3239,7 @@
               </a:rPr>
               <a:t>Baik</a:t>
             </a:r>
-            <a:endParaRPr lang="en-US" sz="1100" dirty="0"/>
+            <a:endParaRPr lang="en-US" sz="850" dirty="0"/>
           </a:p>
         </p:txBody>
       </p:sp>
@@ -3301,9 +3295,9 @@
               <a:buNone/>
             </a:pPr>
             <a:r>
-              <a:rPr lang="en-US" sz="1100" b="1" dirty="0">
-                <a:solidFill>
-                  <a:srgbClr val="222222"/>
+              <a:rPr lang="en-US" sz="1000" b="1" dirty="0">
+                <a:solidFill>
+                  <a:srgbClr val="142D64"/>
                 </a:solidFill>
                 <a:latin typeface="Aptos" pitchFamily="34" charset="0"/>
                 <a:ea typeface="Aptos" pitchFamily="34" charset="-122"/>
@@ -3311,7 +3305,7 @@
               </a:rPr>
               <a:t>3,60-3,99</a:t>
             </a:r>
-            <a:endParaRPr lang="en-US" sz="1100" dirty="0"/>
+            <a:endParaRPr lang="en-US" sz="1000" dirty="0"/>
           </a:p>
         </p:txBody>
       </p:sp>
@@ -3342,9 +3336,9 @@
               <a:buNone/>
             </a:pPr>
             <a:r>
-              <a:rPr lang="en-US" sz="1100" dirty="0">
-                <a:solidFill>
-                  <a:srgbClr val="333333"/>
+              <a:rPr lang="en-US" sz="850" dirty="0">
+                <a:solidFill>
+                  <a:srgbClr val="142D64"/>
                 </a:solidFill>
                 <a:latin typeface="Aptos" pitchFamily="34" charset="0"/>
                 <a:ea typeface="Aptos" pitchFamily="34" charset="-122"/>
@@ -3352,7 +3346,7 @@
               </a:rPr>
               <a:t>Cukup</a:t>
             </a:r>
-            <a:endParaRPr lang="en-US" sz="1100" dirty="0"/>
+            <a:endParaRPr lang="en-US" sz="850" dirty="0"/>
           </a:p>
         </p:txBody>
       </p:sp>
@@ -3408,9 +3402,9 @@
               <a:buNone/>
             </a:pPr>
             <a:r>
-              <a:rPr lang="en-US" sz="1100" b="1" dirty="0">
-                <a:solidFill>
-                  <a:srgbClr val="222222"/>
+              <a:rPr lang="en-US" sz="1000" b="1" dirty="0">
+                <a:solidFill>
+                  <a:srgbClr val="142D64"/>
                 </a:solidFill>
                 <a:latin typeface="Aptos" pitchFamily="34" charset="0"/>
                 <a:ea typeface="Aptos" pitchFamily="34" charset="-122"/>
@@ -3418,7 +3412,7 @@
               </a:rPr>
               <a:t>&lt;3,59</a:t>
             </a:r>
-            <a:endParaRPr lang="en-US" sz="1100" dirty="0"/>
+            <a:endParaRPr lang="en-US" sz="1000" dirty="0"/>
           </a:p>
         </p:txBody>
       </p:sp>
@@ -3449,9 +3443,9 @@
               <a:buNone/>
             </a:pPr>
             <a:r>
-              <a:rPr lang="en-US" sz="1100" dirty="0">
-                <a:solidFill>
-                  <a:srgbClr val="333333"/>
+              <a:rPr lang="en-US" sz="850" dirty="0">
+                <a:solidFill>
+                  <a:srgbClr val="142D64"/>
                 </a:solidFill>
                 <a:latin typeface="Aptos" pitchFamily="34" charset="0"/>
                 <a:ea typeface="Aptos" pitchFamily="34" charset="-122"/>
@@ -3459,7 +3453,7 @@
               </a:rPr>
               <a:t>Kurang</a:t>
             </a:r>
-            <a:endParaRPr lang="en-US" sz="1100" dirty="0"/>
+            <a:endParaRPr lang="en-US" sz="850" dirty="0"/>
           </a:p>
         </p:txBody>
       </p:sp>
@@ -3594,7 +3588,7 @@
               <a:buNone/>
             </a:pPr>
             <a:r>
-              <a:rPr lang="en-US" sz="4000" b="1" dirty="0">
+              <a:rPr lang="en-US" sz="4400" b="1" dirty="0">
                 <a:solidFill>
                   <a:srgbClr val="FFFFFF"/>
                 </a:solidFill>
@@ -3604,7 +3598,7 @@
               </a:rPr>
               <a:t>Service Drill Ranking</a:t>
             </a:r>
-            <a:endParaRPr lang="en-US" sz="4000" dirty="0"/>
+            <a:endParaRPr lang="en-US" sz="4400" dirty="0"/>
           </a:p>
         </p:txBody>
       </p:sp>
@@ -3621,13 +3615,10 @@
           </a:xfrm>
           <a:prstGeom prst="roundRect">
             <a:avLst>
-              <a:gd name="adj" fmla="val 15842"/>
+              <a:gd name="adj" fmla="val 19802"/>
             </a:avLst>
           </a:prstGeom>
-          <a:solidFill>
-            <a:srgbClr val="2E4FD6"/>
-          </a:solidFill>
-          <a:ln w="12700">
+          <a:ln w="15875">
             <a:solidFill>
               <a:srgbClr val="FFFFFF"/>
             </a:solidFill>
@@ -3666,9 +3657,9 @@
                 <a:solidFill>
                   <a:srgbClr val="FFFFFF"/>
                 </a:solidFill>
-                <a:latin typeface="Aptos" pitchFamily="34" charset="0"/>
-                <a:ea typeface="Aptos" pitchFamily="34" charset="-122"/>
-                <a:cs typeface="Aptos" pitchFamily="34" charset="-120"/>
+                <a:latin typeface="Poppins" pitchFamily="34" charset="0"/>
+                <a:ea typeface="Poppins" pitchFamily="34" charset="-122"/>
+                <a:cs typeface="Poppins" pitchFamily="34" charset="-120"/>
               </a:rPr>
               <a:t>RO-SMP KANWIL SULAMPUA</a:t>
             </a:r>
@@ -3952,7 +3943,7 @@
               <a:buNone/>
             </a:pPr>
             <a:r>
-              <a:rPr lang="en-US" sz="1400" b="1" dirty="0">
+              <a:rPr lang="en-US" sz="1200" b="1" dirty="0">
                 <a:solidFill>
                   <a:srgbClr val="FFFFFF"/>
                 </a:solidFill>
@@ -3962,7 +3953,7 @@
               </a:rPr>
               <a:t>Istimewa</a:t>
             </a:r>
-            <a:endParaRPr lang="en-US" sz="1400" dirty="0"/>
+            <a:endParaRPr lang="en-US" sz="1200" dirty="0"/>
           </a:p>
         </p:txBody>
       </p:sp>
@@ -4176,7 +4167,7 @@
               <a:buNone/>
             </a:pPr>
             <a:r>
-              <a:rPr lang="en-US" sz="1400" b="1" dirty="0">
+              <a:rPr lang="en-US" sz="1200" b="1" dirty="0">
                 <a:solidFill>
                   <a:srgbClr val="FFFFFF"/>
                 </a:solidFill>
@@ -4186,7 +4177,7 @@
               </a:rPr>
               <a:t>Cukup</a:t>
             </a:r>
-            <a:endParaRPr lang="en-US" sz="1400" dirty="0"/>
+            <a:endParaRPr lang="en-US" sz="1200" dirty="0"/>
           </a:p>
         </p:txBody>
       </p:sp>
@@ -4335,9 +4326,9 @@
               <a:buNone/>
             </a:pPr>
             <a:r>
-              <a:rPr lang="en-US" sz="1100" b="1" dirty="0">
-                <a:solidFill>
-                  <a:srgbClr val="222222"/>
+              <a:rPr lang="en-US" sz="1000" b="1" dirty="0">
+                <a:solidFill>
+                  <a:srgbClr val="142D64"/>
                 </a:solidFill>
                 <a:latin typeface="Aptos" pitchFamily="34" charset="0"/>
                 <a:ea typeface="Aptos" pitchFamily="34" charset="-122"/>
@@ -4345,7 +4336,7 @@
               </a:rPr>
               <a:t>4,80-5,00</a:t>
             </a:r>
-            <a:endParaRPr lang="en-US" sz="1100" dirty="0"/>
+            <a:endParaRPr lang="en-US" sz="1000" dirty="0"/>
           </a:p>
         </p:txBody>
       </p:sp>
@@ -4376,9 +4367,9 @@
               <a:buNone/>
             </a:pPr>
             <a:r>
-              <a:rPr lang="en-US" sz="1100" dirty="0">
-                <a:solidFill>
-                  <a:srgbClr val="333333"/>
+              <a:rPr lang="en-US" sz="850" dirty="0">
+                <a:solidFill>
+                  <a:srgbClr val="142D64"/>
                 </a:solidFill>
                 <a:latin typeface="Aptos" pitchFamily="34" charset="0"/>
                 <a:ea typeface="Aptos" pitchFamily="34" charset="-122"/>
@@ -4386,7 +4377,7 @@
               </a:rPr>
               <a:t>Istimewa</a:t>
             </a:r>
-            <a:endParaRPr lang="en-US" sz="1100" dirty="0"/>
+            <a:endParaRPr lang="en-US" sz="850" dirty="0"/>
           </a:p>
         </p:txBody>
       </p:sp>
@@ -4442,9 +4433,9 @@
               <a:buNone/>
             </a:pPr>
             <a:r>
-              <a:rPr lang="en-US" sz="1100" b="1" dirty="0">
-                <a:solidFill>
-                  <a:srgbClr val="222222"/>
+              <a:rPr lang="en-US" sz="1000" b="1" dirty="0">
+                <a:solidFill>
+                  <a:srgbClr val="142D64"/>
                 </a:solidFill>
                 <a:latin typeface="Aptos" pitchFamily="34" charset="0"/>
                 <a:ea typeface="Aptos" pitchFamily="34" charset="-122"/>
@@ -4452,7 +4443,7 @@
               </a:rPr>
               <a:t>4,60-4,79</a:t>
             </a:r>
-            <a:endParaRPr lang="en-US" sz="1100" dirty="0"/>
+            <a:endParaRPr lang="en-US" sz="1000" dirty="0"/>
           </a:p>
         </p:txBody>
       </p:sp>
@@ -4483,9 +4474,9 @@
               <a:buNone/>
             </a:pPr>
             <a:r>
-              <a:rPr lang="en-US" sz="1100" dirty="0">
-                <a:solidFill>
-                  <a:srgbClr val="333333"/>
+              <a:rPr lang="en-US" sz="850" dirty="0">
+                <a:solidFill>
+                  <a:srgbClr val="142D64"/>
                 </a:solidFill>
                 <a:latin typeface="Aptos" pitchFamily="34" charset="0"/>
                 <a:ea typeface="Aptos" pitchFamily="34" charset="-122"/>
@@ -4493,7 +4484,7 @@
               </a:rPr>
               <a:t>Sangat Baik</a:t>
             </a:r>
-            <a:endParaRPr lang="en-US" sz="1100" dirty="0"/>
+            <a:endParaRPr lang="en-US" sz="850" dirty="0"/>
           </a:p>
         </p:txBody>
       </p:sp>
@@ -4549,9 +4540,9 @@
               <a:buNone/>
             </a:pPr>
             <a:r>
-              <a:rPr lang="en-US" sz="1100" b="1" dirty="0">
-                <a:solidFill>
-                  <a:srgbClr val="222222"/>
+              <a:rPr lang="en-US" sz="1000" b="1" dirty="0">
+                <a:solidFill>
+                  <a:srgbClr val="142D64"/>
                 </a:solidFill>
                 <a:latin typeface="Aptos" pitchFamily="34" charset="0"/>
                 <a:ea typeface="Aptos" pitchFamily="34" charset="-122"/>
@@ -4559,7 +4550,7 @@
               </a:rPr>
               <a:t>4,00-4,59</a:t>
             </a:r>
-            <a:endParaRPr lang="en-US" sz="1100" dirty="0"/>
+            <a:endParaRPr lang="en-US" sz="1000" dirty="0"/>
           </a:p>
         </p:txBody>
       </p:sp>
@@ -4590,9 +4581,9 @@
               <a:buNone/>
             </a:pPr>
             <a:r>
-              <a:rPr lang="en-US" sz="1100" dirty="0">
-                <a:solidFill>
-                  <a:srgbClr val="333333"/>
+              <a:rPr lang="en-US" sz="850" dirty="0">
+                <a:solidFill>
+                  <a:srgbClr val="142D64"/>
                 </a:solidFill>
                 <a:latin typeface="Aptos" pitchFamily="34" charset="0"/>
                 <a:ea typeface="Aptos" pitchFamily="34" charset="-122"/>
@@ -4600,7 +4591,7 @@
               </a:rPr>
               <a:t>Baik</a:t>
             </a:r>
-            <a:endParaRPr lang="en-US" sz="1100" dirty="0"/>
+            <a:endParaRPr lang="en-US" sz="850" dirty="0"/>
           </a:p>
         </p:txBody>
       </p:sp>
@@ -4656,9 +4647,9 @@
               <a:buNone/>
             </a:pPr>
             <a:r>
-              <a:rPr lang="en-US" sz="1100" b="1" dirty="0">
-                <a:solidFill>
-                  <a:srgbClr val="222222"/>
+              <a:rPr lang="en-US" sz="1000" b="1" dirty="0">
+                <a:solidFill>
+                  <a:srgbClr val="142D64"/>
                 </a:solidFill>
                 <a:latin typeface="Aptos" pitchFamily="34" charset="0"/>
                 <a:ea typeface="Aptos" pitchFamily="34" charset="-122"/>
@@ -4666,7 +4657,7 @@
               </a:rPr>
               <a:t>3,60-3,99</a:t>
             </a:r>
-            <a:endParaRPr lang="en-US" sz="1100" dirty="0"/>
+            <a:endParaRPr lang="en-US" sz="1000" dirty="0"/>
           </a:p>
         </p:txBody>
       </p:sp>
@@ -4697,9 +4688,9 @@
               <a:buNone/>
             </a:pPr>
             <a:r>
-              <a:rPr lang="en-US" sz="1100" dirty="0">
-                <a:solidFill>
-                  <a:srgbClr val="333333"/>
+              <a:rPr lang="en-US" sz="850" dirty="0">
+                <a:solidFill>
+                  <a:srgbClr val="142D64"/>
                 </a:solidFill>
                 <a:latin typeface="Aptos" pitchFamily="34" charset="0"/>
                 <a:ea typeface="Aptos" pitchFamily="34" charset="-122"/>
@@ -4707,7 +4698,7 @@
               </a:rPr>
               <a:t>Cukup</a:t>
             </a:r>
-            <a:endParaRPr lang="en-US" sz="1100" dirty="0"/>
+            <a:endParaRPr lang="en-US" sz="850" dirty="0"/>
           </a:p>
         </p:txBody>
       </p:sp>
@@ -4763,9 +4754,9 @@
               <a:buNone/>
             </a:pPr>
             <a:r>
-              <a:rPr lang="en-US" sz="1100" b="1" dirty="0">
-                <a:solidFill>
-                  <a:srgbClr val="222222"/>
+              <a:rPr lang="en-US" sz="1000" b="1" dirty="0">
+                <a:solidFill>
+                  <a:srgbClr val="142D64"/>
                 </a:solidFill>
                 <a:latin typeface="Aptos" pitchFamily="34" charset="0"/>
                 <a:ea typeface="Aptos" pitchFamily="34" charset="-122"/>
@@ -4773,7 +4764,7 @@
               </a:rPr>
               <a:t>&lt;3,59</a:t>
             </a:r>
-            <a:endParaRPr lang="en-US" sz="1100" dirty="0"/>
+            <a:endParaRPr lang="en-US" sz="1000" dirty="0"/>
           </a:p>
         </p:txBody>
       </p:sp>
@@ -4804,9 +4795,9 @@
               <a:buNone/>
             </a:pPr>
             <a:r>
-              <a:rPr lang="en-US" sz="1100" dirty="0">
-                <a:solidFill>
-                  <a:srgbClr val="333333"/>
+              <a:rPr lang="en-US" sz="850" dirty="0">
+                <a:solidFill>
+                  <a:srgbClr val="142D64"/>
                 </a:solidFill>
                 <a:latin typeface="Aptos" pitchFamily="34" charset="0"/>
                 <a:ea typeface="Aptos" pitchFamily="34" charset="-122"/>
@@ -4814,7 +4805,7 @@
               </a:rPr>
               <a:t>Kurang</a:t>
             </a:r>
-            <a:endParaRPr lang="en-US" sz="1100" dirty="0"/>
+            <a:endParaRPr lang="en-US" sz="850" dirty="0"/>
           </a:p>
         </p:txBody>
       </p:sp>

--- a/ranking-uji-route.pptx
+++ b/ranking-uji-route.pptx
@@ -1258,7 +1258,7 @@
               <a:buNone/>
             </a:pPr>
             <a:r>
-              <a:rPr lang="en-US" sz="2400" dirty="0">
+              <a:rPr lang="en-US" sz="1800" dirty="0">
                 <a:solidFill>
                   <a:srgbClr val="FFFFFF"/>
                 </a:solidFill>
@@ -1268,7 +1268,7 @@
               </a:rPr>
               <a:t>Semua posisi</a:t>
             </a:r>
-            <a:endParaRPr lang="en-US" sz="2400" dirty="0"/>
+            <a:endParaRPr lang="en-US" sz="1800" dirty="0"/>
           </a:p>
         </p:txBody>
       </p:sp>
@@ -2566,7 +2566,7 @@
               <a:buNone/>
             </a:pPr>
             <a:r>
-              <a:rPr lang="en-US" sz="2400" dirty="0">
+              <a:rPr lang="en-US" sz="1800" dirty="0">
                 <a:solidFill>
                   <a:srgbClr val="FFFFFF"/>
                 </a:solidFill>
@@ -2576,7 +2576,7 @@
               </a:rPr>
               <a:t>Customer Service</a:t>
             </a:r>
-            <a:endParaRPr lang="en-US" sz="2400" dirty="0"/>
+            <a:endParaRPr lang="en-US" sz="1800" dirty="0"/>
           </a:p>
         </p:txBody>
       </p:sp>
@@ -2683,7 +2683,7 @@
               <a:buNone/>
             </a:pPr>
             <a:r>
-              <a:rPr lang="en-US" sz="2000" b="1" dirty="0">
+              <a:rPr lang="en-US" sz="1600" b="1" dirty="0">
                 <a:solidFill>
                   <a:srgbClr val="FFFFFF"/>
                 </a:solidFill>
@@ -2693,7 +2693,7 @@
               </a:rPr>
               <a:t>CS Satu</a:t>
             </a:r>
-            <a:endParaRPr lang="en-US" sz="2000" dirty="0"/>
+            <a:endParaRPr lang="en-US" sz="1600" dirty="0"/>
           </a:p>
         </p:txBody>
       </p:sp>
@@ -3694,7 +3694,7 @@
               <a:buNone/>
             </a:pPr>
             <a:r>
-              <a:rPr lang="en-US" sz="2400" dirty="0">
+              <a:rPr lang="en-US" sz="1800" dirty="0">
                 <a:solidFill>
                   <a:srgbClr val="FFFFFF"/>
                 </a:solidFill>
@@ -3704,7 +3704,7 @@
               </a:rPr>
               <a:t>Teller</a:t>
             </a:r>
-            <a:endParaRPr lang="en-US" sz="2400" dirty="0"/>
+            <a:endParaRPr lang="en-US" sz="1800" dirty="0"/>
           </a:p>
         </p:txBody>
       </p:sp>
@@ -3811,7 +3811,7 @@
               <a:buNone/>
             </a:pPr>
             <a:r>
-              <a:rPr lang="en-US" sz="2000" b="1" dirty="0">
+              <a:rPr lang="en-US" sz="1600" b="1" dirty="0">
                 <a:solidFill>
                   <a:srgbClr val="FFFFFF"/>
                 </a:solidFill>
@@ -3821,7 +3821,7 @@
               </a:rPr>
               <a:t>Teller Satu</a:t>
             </a:r>
-            <a:endParaRPr lang="en-US" sz="2000" dirty="0"/>
+            <a:endParaRPr lang="en-US" sz="1600" dirty="0"/>
           </a:p>
         </p:txBody>
       </p:sp>
@@ -4035,7 +4035,7 @@
               <a:buNone/>
             </a:pPr>
             <a:r>
-              <a:rPr lang="en-US" sz="2000" b="1" dirty="0">
+              <a:rPr lang="en-US" sz="1600" b="1" dirty="0">
                 <a:solidFill>
                   <a:srgbClr val="FFFFFF"/>
                 </a:solidFill>
@@ -4045,7 +4045,7 @@
               </a:rPr>
               <a:t>Teller Dua</a:t>
             </a:r>
-            <a:endParaRPr lang="en-US" sz="2000" dirty="0"/>
+            <a:endParaRPr lang="en-US" sz="1600" dirty="0"/>
           </a:p>
         </p:txBody>
       </p:sp>

--- a/ranking-uji-route.pptx
+++ b/ranking-uji-route.pptx
@@ -3702,7 +3702,7 @@
                 <a:ea typeface="Aptos" pitchFamily="34" charset="-122"/>
                 <a:cs typeface="Aptos" pitchFamily="34" charset="-120"/>
               </a:rPr>
-              <a:t>Teller</a:t>
+              <a:t>Teller Service</a:t>
             </a:r>
             <a:endParaRPr lang="en-US" sz="1800" dirty="0"/>
           </a:p>

--- a/ranking-uji-route.pptx
+++ b/ranking-uji-route.pptx
@@ -1709,12 +1709,12 @@
         </p:nvSpPr>
         <p:spPr>
           <a:xfrm>
-            <a:off x="2832811" y="5922569"/>
-            <a:ext cx="6273698" cy="905256"/>
+            <a:off x="2606040" y="5605272"/>
+            <a:ext cx="6273698" cy="658368"/>
           </a:xfrm>
           <a:prstGeom prst="roundRect">
             <a:avLst>
-              <a:gd name="adj" fmla="val 6061"/>
+              <a:gd name="adj" fmla="val 8333"/>
             </a:avLst>
           </a:prstGeom>
           <a:solidFill>
@@ -1736,20 +1736,17 @@
         </p:nvSpPr>
         <p:spPr>
           <a:xfrm>
-            <a:off x="5100980" y="5748833"/>
-            <a:ext cx="1737360" cy="274320"/>
+            <a:off x="4754880" y="5358384"/>
+            <a:ext cx="1828800" cy="310896"/>
           </a:xfrm>
           <a:prstGeom prst="roundRect">
             <a:avLst>
-              <a:gd name="adj" fmla="val 33333"/>
+              <a:gd name="adj" fmla="val 52941"/>
             </a:avLst>
           </a:prstGeom>
-          <a:solidFill>
-            <a:srgbClr val="2E4FD6"/>
-          </a:solidFill>
           <a:ln w="12700">
             <a:solidFill>
-              <a:srgbClr val="2E4FD6"/>
+              <a:srgbClr val="FFFFFF"/>
             </a:solidFill>
             <a:prstDash val="solid"/>
           </a:ln>
@@ -1763,8 +1760,8 @@
         </p:nvSpPr>
         <p:spPr>
           <a:xfrm>
-            <a:off x="5100980" y="5748833"/>
-            <a:ext cx="1737360" cy="274320"/>
+            <a:off x="4754880" y="5385816"/>
+            <a:ext cx="1828800" cy="228600"/>
           </a:xfrm>
           <a:prstGeom prst="rect">
             <a:avLst/>
@@ -1802,8 +1799,8 @@
         </p:nvSpPr>
         <p:spPr>
           <a:xfrm>
-            <a:off x="2924251" y="6196889"/>
-            <a:ext cx="118872" cy="118872"/>
+            <a:off x="2770632" y="5806440"/>
+            <a:ext cx="109728" cy="109728"/>
           </a:xfrm>
           <a:prstGeom prst="ellipse">
             <a:avLst/>
@@ -1827,8 +1824,8 @@
         </p:nvSpPr>
         <p:spPr>
           <a:xfrm>
-            <a:off x="3070555" y="6105449"/>
-            <a:ext cx="1053572" cy="219456"/>
+            <a:off x="2919679" y="5749747"/>
+            <a:ext cx="777240" cy="245974"/>
           </a:xfrm>
           <a:prstGeom prst="rect">
             <a:avLst/>
@@ -1868,8 +1865,8 @@
         </p:nvSpPr>
         <p:spPr>
           <a:xfrm>
-            <a:off x="3070555" y="6324905"/>
-            <a:ext cx="1053572" cy="237744"/>
+            <a:off x="2926080" y="5934456"/>
+            <a:ext cx="960120" cy="164592"/>
           </a:xfrm>
           <a:prstGeom prst="rect">
             <a:avLst/>
@@ -1909,8 +1906,8 @@
         </p:nvSpPr>
         <p:spPr>
           <a:xfrm>
-            <a:off x="4178991" y="6196889"/>
-            <a:ext cx="118872" cy="118872"/>
+            <a:off x="4078224" y="5806440"/>
+            <a:ext cx="109728" cy="109728"/>
           </a:xfrm>
           <a:prstGeom prst="ellipse">
             <a:avLst/>
@@ -1934,8 +1931,8 @@
         </p:nvSpPr>
         <p:spPr>
           <a:xfrm>
-            <a:off x="4325295" y="6105449"/>
-            <a:ext cx="1053572" cy="219456"/>
+            <a:off x="4227271" y="5749747"/>
+            <a:ext cx="777240" cy="245974"/>
           </a:xfrm>
           <a:prstGeom prst="rect">
             <a:avLst/>
@@ -1975,8 +1972,8 @@
         </p:nvSpPr>
         <p:spPr>
           <a:xfrm>
-            <a:off x="4325295" y="6324905"/>
-            <a:ext cx="1053572" cy="237744"/>
+            <a:off x="4233672" y="5934456"/>
+            <a:ext cx="960120" cy="164592"/>
           </a:xfrm>
           <a:prstGeom prst="rect">
             <a:avLst/>
@@ -2016,8 +2013,8 @@
         </p:nvSpPr>
         <p:spPr>
           <a:xfrm>
-            <a:off x="5433731" y="6196889"/>
-            <a:ext cx="118872" cy="118872"/>
+            <a:off x="5437022" y="5806440"/>
+            <a:ext cx="109728" cy="109728"/>
           </a:xfrm>
           <a:prstGeom prst="ellipse">
             <a:avLst/>
@@ -2041,8 +2038,8 @@
         </p:nvSpPr>
         <p:spPr>
           <a:xfrm>
-            <a:off x="5580035" y="6105449"/>
-            <a:ext cx="1053572" cy="219456"/>
+            <a:off x="5586070" y="5749747"/>
+            <a:ext cx="777240" cy="245974"/>
           </a:xfrm>
           <a:prstGeom prst="rect">
             <a:avLst/>
@@ -2082,8 +2079,8 @@
         </p:nvSpPr>
         <p:spPr>
           <a:xfrm>
-            <a:off x="5580035" y="6324905"/>
-            <a:ext cx="1053572" cy="237744"/>
+            <a:off x="5592470" y="5934456"/>
+            <a:ext cx="960120" cy="164592"/>
           </a:xfrm>
           <a:prstGeom prst="rect">
             <a:avLst/>
@@ -2123,8 +2120,8 @@
         </p:nvSpPr>
         <p:spPr>
           <a:xfrm>
-            <a:off x="6688470" y="6196889"/>
-            <a:ext cx="118872" cy="118872"/>
+            <a:off x="6765646" y="5806440"/>
+            <a:ext cx="109728" cy="109728"/>
           </a:xfrm>
           <a:prstGeom prst="ellipse">
             <a:avLst/>
@@ -2148,8 +2145,8 @@
         </p:nvSpPr>
         <p:spPr>
           <a:xfrm>
-            <a:off x="6834774" y="6105449"/>
-            <a:ext cx="1053572" cy="219456"/>
+            <a:off x="6914693" y="5749747"/>
+            <a:ext cx="777240" cy="245974"/>
           </a:xfrm>
           <a:prstGeom prst="rect">
             <a:avLst/>
@@ -2189,8 +2186,8 @@
         </p:nvSpPr>
         <p:spPr>
           <a:xfrm>
-            <a:off x="6834774" y="6324905"/>
-            <a:ext cx="1053572" cy="237744"/>
+            <a:off x="6921094" y="5934456"/>
+            <a:ext cx="960120" cy="164592"/>
           </a:xfrm>
           <a:prstGeom prst="rect">
             <a:avLst/>
@@ -2230,8 +2227,8 @@
         </p:nvSpPr>
         <p:spPr>
           <a:xfrm>
-            <a:off x="7943210" y="6196889"/>
-            <a:ext cx="118872" cy="118872"/>
+            <a:off x="8108899" y="5806440"/>
+            <a:ext cx="109728" cy="109728"/>
           </a:xfrm>
           <a:prstGeom prst="ellipse">
             <a:avLst/>
@@ -2255,8 +2252,8 @@
         </p:nvSpPr>
         <p:spPr>
           <a:xfrm>
-            <a:off x="8089514" y="6105449"/>
-            <a:ext cx="1053572" cy="219456"/>
+            <a:off x="8257946" y="5749747"/>
+            <a:ext cx="777240" cy="245974"/>
           </a:xfrm>
           <a:prstGeom prst="rect">
             <a:avLst/>
@@ -2296,8 +2293,8 @@
         </p:nvSpPr>
         <p:spPr>
           <a:xfrm>
-            <a:off x="8089514" y="6324905"/>
-            <a:ext cx="1053572" cy="237744"/>
+            <a:off x="8264347" y="5934456"/>
+            <a:ext cx="960120" cy="164592"/>
           </a:xfrm>
           <a:prstGeom prst="rect">
             <a:avLst/>
@@ -2588,7 +2585,7 @@
         </p:nvSpPr>
         <p:spPr>
           <a:xfrm>
-            <a:off x="3739896" y="2020824"/>
+            <a:off x="4644238" y="2020824"/>
             <a:ext cx="9144" cy="548640"/>
           </a:xfrm>
           <a:prstGeom prst="rect">
@@ -2621,9 +2618,6 @@
               <a:gd name="adj" fmla="val 18711"/>
             </a:avLst>
           </a:prstGeom>
-          <a:solidFill>
-            <a:srgbClr val="2E4FD6"/>
-          </a:solidFill>
           <a:ln w="15875">
             <a:solidFill>
               <a:srgbClr val="FFFFFF"/>
@@ -2664,8 +2658,8 @@
         </p:nvSpPr>
         <p:spPr>
           <a:xfrm>
-            <a:off x="3749040" y="1929384"/>
-            <a:ext cx="2103120" cy="879653"/>
+            <a:off x="2723998" y="1929384"/>
+            <a:ext cx="1874520" cy="879653"/>
           </a:xfrm>
           <a:prstGeom prst="rect">
             <a:avLst/>
@@ -2679,7 +2673,7 @@
           </a:bodyPr>
           <a:lstStyle/>
           <a:p>
-            <a:pPr indent="0" marL="0">
+            <a:pPr algn="l" indent="0" marL="0">
               <a:buNone/>
             </a:pPr>
             <a:r>
@@ -2705,15 +2699,137 @@
         </p:nvSpPr>
         <p:spPr>
           <a:xfrm>
-            <a:off x="3739896" y="2186330"/>
-            <a:ext cx="4626864" cy="365760"/>
-          </a:xfrm>
-          <a:prstGeom prst="rect">
-            <a:avLst/>
-          </a:prstGeom>
-          <a:solidFill>
-            <a:srgbClr val="1226AA"/>
-          </a:solidFill>
+            <a:off x="4708246" y="2186330"/>
+            <a:ext cx="3977640" cy="82296"/>
+          </a:xfrm>
+          <a:prstGeom prst="rect">
+            <a:avLst/>
+          </a:prstGeom>
+          <a:solidFill>
+            <a:srgbClr val="4E7BE8"/>
+          </a:solidFill>
+          <a:ln w="12700">
+            <a:solidFill>
+              <a:srgbClr val="4E7BE8"/>
+            </a:solidFill>
+            <a:prstDash val="solid"/>
+          </a:ln>
+        </p:spPr>
+      </p:sp>
+      <p:sp>
+        <p:nvSpPr>
+          <p:cNvPr id="14" name="Shape 8"/>
+          <p:cNvSpPr/>
+          <p:nvPr/>
+        </p:nvSpPr>
+        <p:spPr>
+          <a:xfrm>
+            <a:off x="4708246" y="2259482"/>
+            <a:ext cx="3977640" cy="82296"/>
+          </a:xfrm>
+          <a:prstGeom prst="rect">
+            <a:avLst/>
+          </a:prstGeom>
+          <a:solidFill>
+            <a:srgbClr val="3D68DF"/>
+          </a:solidFill>
+          <a:ln w="12700">
+            <a:solidFill>
+              <a:srgbClr val="3D68DF"/>
+            </a:solidFill>
+            <a:prstDash val="solid"/>
+          </a:ln>
+        </p:spPr>
+      </p:sp>
+      <p:sp>
+        <p:nvSpPr>
+          <p:cNvPr id="15" name="Shape 9"/>
+          <p:cNvSpPr/>
+          <p:nvPr/>
+        </p:nvSpPr>
+        <p:spPr>
+          <a:xfrm>
+            <a:off x="4708246" y="2332634"/>
+            <a:ext cx="3977640" cy="82296"/>
+          </a:xfrm>
+          <a:prstGeom prst="rect">
+            <a:avLst/>
+          </a:prstGeom>
+          <a:solidFill>
+            <a:srgbClr val="2E56D4"/>
+          </a:solidFill>
+          <a:ln w="12700">
+            <a:solidFill>
+              <a:srgbClr val="2E56D4"/>
+            </a:solidFill>
+            <a:prstDash val="solid"/>
+          </a:ln>
+        </p:spPr>
+      </p:sp>
+      <p:sp>
+        <p:nvSpPr>
+          <p:cNvPr id="16" name="Shape 10"/>
+          <p:cNvSpPr/>
+          <p:nvPr/>
+        </p:nvSpPr>
+        <p:spPr>
+          <a:xfrm>
+            <a:off x="4708246" y="2405786"/>
+            <a:ext cx="3977640" cy="82296"/>
+          </a:xfrm>
+          <a:prstGeom prst="rect">
+            <a:avLst/>
+          </a:prstGeom>
+          <a:solidFill>
+            <a:srgbClr val="2348C4"/>
+          </a:solidFill>
+          <a:ln w="12700">
+            <a:solidFill>
+              <a:srgbClr val="2348C4"/>
+            </a:solidFill>
+            <a:prstDash val="solid"/>
+          </a:ln>
+        </p:spPr>
+      </p:sp>
+      <p:sp>
+        <p:nvSpPr>
+          <p:cNvPr id="17" name="Shape 11"/>
+          <p:cNvSpPr/>
+          <p:nvPr/>
+        </p:nvSpPr>
+        <p:spPr>
+          <a:xfrm>
+            <a:off x="4708246" y="2478938"/>
+            <a:ext cx="3977640" cy="82296"/>
+          </a:xfrm>
+          <a:prstGeom prst="rect">
+            <a:avLst/>
+          </a:prstGeom>
+          <a:solidFill>
+            <a:srgbClr val="1B3AAE"/>
+          </a:solidFill>
+          <a:ln w="12700">
+            <a:solidFill>
+              <a:srgbClr val="1B3AAE"/>
+            </a:solidFill>
+            <a:prstDash val="solid"/>
+          </a:ln>
+        </p:spPr>
+      </p:sp>
+      <p:sp>
+        <p:nvSpPr>
+          <p:cNvPr id="18" name="Shape 12"/>
+          <p:cNvSpPr/>
+          <p:nvPr/>
+        </p:nvSpPr>
+        <p:spPr>
+          <a:xfrm>
+            <a:off x="4708246" y="2186330"/>
+            <a:ext cx="3977640" cy="365760"/>
+          </a:xfrm>
+          <a:prstGeom prst="rect">
+            <a:avLst/>
+          </a:prstGeom>
           <a:ln w="12700">
             <a:solidFill>
               <a:srgbClr val="FFFFFF"/>
@@ -2724,14 +2840,14 @@
       </p:sp>
       <p:sp>
         <p:nvSpPr>
-          <p:cNvPr id="14" name="Text 8"/>
-          <p:cNvSpPr/>
-          <p:nvPr/>
-        </p:nvSpPr>
-        <p:spPr>
-          <a:xfrm>
-            <a:off x="3739896" y="2186330"/>
-            <a:ext cx="4535424" cy="365760"/>
+          <p:cNvPr id="19" name="Text 13"/>
+          <p:cNvSpPr/>
+          <p:nvPr/>
+        </p:nvSpPr>
+        <p:spPr>
+          <a:xfrm>
+            <a:off x="4708246" y="2186330"/>
+            <a:ext cx="3886200" cy="365760"/>
           </a:xfrm>
           <a:prstGeom prst="rect">
             <a:avLst/>
@@ -2763,14 +2879,14 @@
       </p:sp>
       <p:sp>
         <p:nvSpPr>
-          <p:cNvPr id="15" name="Shape 9"/>
-          <p:cNvSpPr/>
-          <p:nvPr/>
-        </p:nvSpPr>
-        <p:spPr>
-          <a:xfrm>
-            <a:off x="8942832" y="2131466"/>
-            <a:ext cx="1207008" cy="475488"/>
+          <p:cNvPr id="20" name="Shape 14"/>
+          <p:cNvSpPr/>
+          <p:nvPr/>
+        </p:nvSpPr>
+        <p:spPr>
+          <a:xfrm>
+            <a:off x="8813902" y="2131466"/>
+            <a:ext cx="1188720" cy="475488"/>
           </a:xfrm>
           <a:prstGeom prst="roundRect">
             <a:avLst>
@@ -2790,14 +2906,14 @@
       </p:sp>
       <p:sp>
         <p:nvSpPr>
-          <p:cNvPr id="16" name="Text 10"/>
-          <p:cNvSpPr/>
-          <p:nvPr/>
-        </p:nvSpPr>
-        <p:spPr>
-          <a:xfrm>
-            <a:off x="8942832" y="2131466"/>
-            <a:ext cx="1207008" cy="475488"/>
+          <p:cNvPr id="21" name="Text 15"/>
+          <p:cNvSpPr/>
+          <p:nvPr/>
+        </p:nvSpPr>
+        <p:spPr>
+          <a:xfrm>
+            <a:off x="8813902" y="2131466"/>
+            <a:ext cx="1188720" cy="475488"/>
           </a:xfrm>
           <a:prstGeom prst="rect">
             <a:avLst/>
@@ -2831,18 +2947,18 @@
       </p:sp>
       <p:sp>
         <p:nvSpPr>
-          <p:cNvPr id="17" name="Shape 11"/>
-          <p:cNvSpPr/>
-          <p:nvPr/>
-        </p:nvSpPr>
-        <p:spPr>
-          <a:xfrm>
-            <a:off x="2832811" y="5922569"/>
-            <a:ext cx="6273698" cy="905256"/>
+          <p:cNvPr id="22" name="Shape 16"/>
+          <p:cNvSpPr/>
+          <p:nvPr/>
+        </p:nvSpPr>
+        <p:spPr>
+          <a:xfrm>
+            <a:off x="2606040" y="5605272"/>
+            <a:ext cx="6273698" cy="658368"/>
           </a:xfrm>
           <a:prstGeom prst="roundRect">
             <a:avLst>
-              <a:gd name="adj" fmla="val 6061"/>
+              <a:gd name="adj" fmla="val 8333"/>
             </a:avLst>
           </a:prstGeom>
           <a:solidFill>
@@ -2858,26 +2974,23 @@
       </p:sp>
       <p:sp>
         <p:nvSpPr>
-          <p:cNvPr id="18" name="Shape 12"/>
-          <p:cNvSpPr/>
-          <p:nvPr/>
-        </p:nvSpPr>
-        <p:spPr>
-          <a:xfrm>
-            <a:off x="5100980" y="5748833"/>
-            <a:ext cx="1737360" cy="274320"/>
+          <p:cNvPr id="23" name="Shape 17"/>
+          <p:cNvSpPr/>
+          <p:nvPr/>
+        </p:nvSpPr>
+        <p:spPr>
+          <a:xfrm>
+            <a:off x="4754880" y="5358384"/>
+            <a:ext cx="1828800" cy="310896"/>
           </a:xfrm>
           <a:prstGeom prst="roundRect">
             <a:avLst>
-              <a:gd name="adj" fmla="val 33333"/>
+              <a:gd name="adj" fmla="val 52941"/>
             </a:avLst>
           </a:prstGeom>
-          <a:solidFill>
-            <a:srgbClr val="2E4FD6"/>
-          </a:solidFill>
           <a:ln w="12700">
             <a:solidFill>
-              <a:srgbClr val="2E4FD6"/>
+              <a:srgbClr val="FFFFFF"/>
             </a:solidFill>
             <a:prstDash val="solid"/>
           </a:ln>
@@ -2885,14 +2998,14 @@
       </p:sp>
       <p:sp>
         <p:nvSpPr>
-          <p:cNvPr id="19" name="Text 13"/>
-          <p:cNvSpPr/>
-          <p:nvPr/>
-        </p:nvSpPr>
-        <p:spPr>
-          <a:xfrm>
-            <a:off x="5100980" y="5748833"/>
-            <a:ext cx="1737360" cy="274320"/>
+          <p:cNvPr id="24" name="Text 18"/>
+          <p:cNvSpPr/>
+          <p:nvPr/>
+        </p:nvSpPr>
+        <p:spPr>
+          <a:xfrm>
+            <a:off x="4754880" y="5385816"/>
+            <a:ext cx="1828800" cy="228600"/>
           </a:xfrm>
           <a:prstGeom prst="rect">
             <a:avLst/>
@@ -2924,14 +3037,14 @@
       </p:sp>
       <p:sp>
         <p:nvSpPr>
-          <p:cNvPr id="20" name="Shape 14"/>
-          <p:cNvSpPr/>
-          <p:nvPr/>
-        </p:nvSpPr>
-        <p:spPr>
-          <a:xfrm>
-            <a:off x="2924251" y="6196889"/>
-            <a:ext cx="118872" cy="118872"/>
+          <p:cNvPr id="25" name="Shape 19"/>
+          <p:cNvSpPr/>
+          <p:nvPr/>
+        </p:nvSpPr>
+        <p:spPr>
+          <a:xfrm>
+            <a:off x="2770632" y="5806440"/>
+            <a:ext cx="109728" cy="109728"/>
           </a:xfrm>
           <a:prstGeom prst="ellipse">
             <a:avLst/>
@@ -2949,14 +3062,14 @@
       </p:sp>
       <p:sp>
         <p:nvSpPr>
-          <p:cNvPr id="21" name="Text 15"/>
-          <p:cNvSpPr/>
-          <p:nvPr/>
-        </p:nvSpPr>
-        <p:spPr>
-          <a:xfrm>
-            <a:off x="3070555" y="6105449"/>
-            <a:ext cx="1053572" cy="219456"/>
+          <p:cNvPr id="26" name="Text 20"/>
+          <p:cNvSpPr/>
+          <p:nvPr/>
+        </p:nvSpPr>
+        <p:spPr>
+          <a:xfrm>
+            <a:off x="2919679" y="5749747"/>
+            <a:ext cx="777240" cy="245974"/>
           </a:xfrm>
           <a:prstGeom prst="rect">
             <a:avLst/>
@@ -2990,14 +3103,14 @@
       </p:sp>
       <p:sp>
         <p:nvSpPr>
-          <p:cNvPr id="22" name="Text 16"/>
-          <p:cNvSpPr/>
-          <p:nvPr/>
-        </p:nvSpPr>
-        <p:spPr>
-          <a:xfrm>
-            <a:off x="3070555" y="6324905"/>
-            <a:ext cx="1053572" cy="237744"/>
+          <p:cNvPr id="27" name="Text 21"/>
+          <p:cNvSpPr/>
+          <p:nvPr/>
+        </p:nvSpPr>
+        <p:spPr>
+          <a:xfrm>
+            <a:off x="2926080" y="5934456"/>
+            <a:ext cx="960120" cy="164592"/>
           </a:xfrm>
           <a:prstGeom prst="rect">
             <a:avLst/>
@@ -3031,14 +3144,14 @@
       </p:sp>
       <p:sp>
         <p:nvSpPr>
-          <p:cNvPr id="23" name="Shape 17"/>
-          <p:cNvSpPr/>
-          <p:nvPr/>
-        </p:nvSpPr>
-        <p:spPr>
-          <a:xfrm>
-            <a:off x="4178991" y="6196889"/>
-            <a:ext cx="118872" cy="118872"/>
+          <p:cNvPr id="28" name="Shape 22"/>
+          <p:cNvSpPr/>
+          <p:nvPr/>
+        </p:nvSpPr>
+        <p:spPr>
+          <a:xfrm>
+            <a:off x="4078224" y="5806440"/>
+            <a:ext cx="109728" cy="109728"/>
           </a:xfrm>
           <a:prstGeom prst="ellipse">
             <a:avLst/>
@@ -3056,14 +3169,14 @@
       </p:sp>
       <p:sp>
         <p:nvSpPr>
-          <p:cNvPr id="24" name="Text 18"/>
-          <p:cNvSpPr/>
-          <p:nvPr/>
-        </p:nvSpPr>
-        <p:spPr>
-          <a:xfrm>
-            <a:off x="4325295" y="6105449"/>
-            <a:ext cx="1053572" cy="219456"/>
+          <p:cNvPr id="29" name="Text 23"/>
+          <p:cNvSpPr/>
+          <p:nvPr/>
+        </p:nvSpPr>
+        <p:spPr>
+          <a:xfrm>
+            <a:off x="4227271" y="5749747"/>
+            <a:ext cx="777240" cy="245974"/>
           </a:xfrm>
           <a:prstGeom prst="rect">
             <a:avLst/>
@@ -3097,14 +3210,14 @@
       </p:sp>
       <p:sp>
         <p:nvSpPr>
-          <p:cNvPr id="25" name="Text 19"/>
-          <p:cNvSpPr/>
-          <p:nvPr/>
-        </p:nvSpPr>
-        <p:spPr>
-          <a:xfrm>
-            <a:off x="4325295" y="6324905"/>
-            <a:ext cx="1053572" cy="237744"/>
+          <p:cNvPr id="30" name="Text 24"/>
+          <p:cNvSpPr/>
+          <p:nvPr/>
+        </p:nvSpPr>
+        <p:spPr>
+          <a:xfrm>
+            <a:off x="4233672" y="5934456"/>
+            <a:ext cx="960120" cy="164592"/>
           </a:xfrm>
           <a:prstGeom prst="rect">
             <a:avLst/>
@@ -3138,14 +3251,14 @@
       </p:sp>
       <p:sp>
         <p:nvSpPr>
-          <p:cNvPr id="26" name="Shape 20"/>
-          <p:cNvSpPr/>
-          <p:nvPr/>
-        </p:nvSpPr>
-        <p:spPr>
-          <a:xfrm>
-            <a:off x="5433731" y="6196889"/>
-            <a:ext cx="118872" cy="118872"/>
+          <p:cNvPr id="31" name="Shape 25"/>
+          <p:cNvSpPr/>
+          <p:nvPr/>
+        </p:nvSpPr>
+        <p:spPr>
+          <a:xfrm>
+            <a:off x="5437022" y="5806440"/>
+            <a:ext cx="109728" cy="109728"/>
           </a:xfrm>
           <a:prstGeom prst="ellipse">
             <a:avLst/>
@@ -3163,14 +3276,14 @@
       </p:sp>
       <p:sp>
         <p:nvSpPr>
-          <p:cNvPr id="27" name="Text 21"/>
-          <p:cNvSpPr/>
-          <p:nvPr/>
-        </p:nvSpPr>
-        <p:spPr>
-          <a:xfrm>
-            <a:off x="5580035" y="6105449"/>
-            <a:ext cx="1053572" cy="219456"/>
+          <p:cNvPr id="32" name="Text 26"/>
+          <p:cNvSpPr/>
+          <p:nvPr/>
+        </p:nvSpPr>
+        <p:spPr>
+          <a:xfrm>
+            <a:off x="5586070" y="5749747"/>
+            <a:ext cx="777240" cy="245974"/>
           </a:xfrm>
           <a:prstGeom prst="rect">
             <a:avLst/>
@@ -3204,14 +3317,14 @@
       </p:sp>
       <p:sp>
         <p:nvSpPr>
-          <p:cNvPr id="28" name="Text 22"/>
-          <p:cNvSpPr/>
-          <p:nvPr/>
-        </p:nvSpPr>
-        <p:spPr>
-          <a:xfrm>
-            <a:off x="5580035" y="6324905"/>
-            <a:ext cx="1053572" cy="237744"/>
+          <p:cNvPr id="33" name="Text 27"/>
+          <p:cNvSpPr/>
+          <p:nvPr/>
+        </p:nvSpPr>
+        <p:spPr>
+          <a:xfrm>
+            <a:off x="5592470" y="5934456"/>
+            <a:ext cx="960120" cy="164592"/>
           </a:xfrm>
           <a:prstGeom prst="rect">
             <a:avLst/>
@@ -3245,14 +3358,14 @@
       </p:sp>
       <p:sp>
         <p:nvSpPr>
-          <p:cNvPr id="29" name="Shape 23"/>
-          <p:cNvSpPr/>
-          <p:nvPr/>
-        </p:nvSpPr>
-        <p:spPr>
-          <a:xfrm>
-            <a:off x="6688470" y="6196889"/>
-            <a:ext cx="118872" cy="118872"/>
+          <p:cNvPr id="34" name="Shape 28"/>
+          <p:cNvSpPr/>
+          <p:nvPr/>
+        </p:nvSpPr>
+        <p:spPr>
+          <a:xfrm>
+            <a:off x="6765646" y="5806440"/>
+            <a:ext cx="109728" cy="109728"/>
           </a:xfrm>
           <a:prstGeom prst="ellipse">
             <a:avLst/>
@@ -3270,14 +3383,14 @@
       </p:sp>
       <p:sp>
         <p:nvSpPr>
-          <p:cNvPr id="30" name="Text 24"/>
-          <p:cNvSpPr/>
-          <p:nvPr/>
-        </p:nvSpPr>
-        <p:spPr>
-          <a:xfrm>
-            <a:off x="6834774" y="6105449"/>
-            <a:ext cx="1053572" cy="219456"/>
+          <p:cNvPr id="35" name="Text 29"/>
+          <p:cNvSpPr/>
+          <p:nvPr/>
+        </p:nvSpPr>
+        <p:spPr>
+          <a:xfrm>
+            <a:off x="6914693" y="5749747"/>
+            <a:ext cx="777240" cy="245974"/>
           </a:xfrm>
           <a:prstGeom prst="rect">
             <a:avLst/>
@@ -3311,14 +3424,14 @@
       </p:sp>
       <p:sp>
         <p:nvSpPr>
-          <p:cNvPr id="31" name="Text 25"/>
-          <p:cNvSpPr/>
-          <p:nvPr/>
-        </p:nvSpPr>
-        <p:spPr>
-          <a:xfrm>
-            <a:off x="6834774" y="6324905"/>
-            <a:ext cx="1053572" cy="237744"/>
+          <p:cNvPr id="36" name="Text 30"/>
+          <p:cNvSpPr/>
+          <p:nvPr/>
+        </p:nvSpPr>
+        <p:spPr>
+          <a:xfrm>
+            <a:off x="6921094" y="5934456"/>
+            <a:ext cx="960120" cy="164592"/>
           </a:xfrm>
           <a:prstGeom prst="rect">
             <a:avLst/>
@@ -3352,14 +3465,14 @@
       </p:sp>
       <p:sp>
         <p:nvSpPr>
-          <p:cNvPr id="32" name="Shape 26"/>
-          <p:cNvSpPr/>
-          <p:nvPr/>
-        </p:nvSpPr>
-        <p:spPr>
-          <a:xfrm>
-            <a:off x="7943210" y="6196889"/>
-            <a:ext cx="118872" cy="118872"/>
+          <p:cNvPr id="37" name="Shape 31"/>
+          <p:cNvSpPr/>
+          <p:nvPr/>
+        </p:nvSpPr>
+        <p:spPr>
+          <a:xfrm>
+            <a:off x="8108899" y="5806440"/>
+            <a:ext cx="109728" cy="109728"/>
           </a:xfrm>
           <a:prstGeom prst="ellipse">
             <a:avLst/>
@@ -3377,14 +3490,14 @@
       </p:sp>
       <p:sp>
         <p:nvSpPr>
-          <p:cNvPr id="33" name="Text 27"/>
-          <p:cNvSpPr/>
-          <p:nvPr/>
-        </p:nvSpPr>
-        <p:spPr>
-          <a:xfrm>
-            <a:off x="8089514" y="6105449"/>
-            <a:ext cx="1053572" cy="219456"/>
+          <p:cNvPr id="38" name="Text 32"/>
+          <p:cNvSpPr/>
+          <p:nvPr/>
+        </p:nvSpPr>
+        <p:spPr>
+          <a:xfrm>
+            <a:off x="8257946" y="5749747"/>
+            <a:ext cx="777240" cy="245974"/>
           </a:xfrm>
           <a:prstGeom prst="rect">
             <a:avLst/>
@@ -3418,14 +3531,14 @@
       </p:sp>
       <p:sp>
         <p:nvSpPr>
-          <p:cNvPr id="34" name="Text 28"/>
-          <p:cNvSpPr/>
-          <p:nvPr/>
-        </p:nvSpPr>
-        <p:spPr>
-          <a:xfrm>
-            <a:off x="8089514" y="6324905"/>
-            <a:ext cx="1053572" cy="237744"/>
+          <p:cNvPr id="39" name="Text 33"/>
+          <p:cNvSpPr/>
+          <p:nvPr/>
+        </p:nvSpPr>
+        <p:spPr>
+          <a:xfrm>
+            <a:off x="8264347" y="5934456"/>
+            <a:ext cx="960120" cy="164592"/>
           </a:xfrm>
           <a:prstGeom prst="rect">
             <a:avLst/>
@@ -3716,7 +3829,7 @@
         </p:nvSpPr>
         <p:spPr>
           <a:xfrm>
-            <a:off x="3739896" y="2020824"/>
+            <a:off x="4644238" y="2020824"/>
             <a:ext cx="9144" cy="1382573"/>
           </a:xfrm>
           <a:prstGeom prst="rect">
@@ -3749,9 +3862,6 @@
               <a:gd name="adj" fmla="val 18711"/>
             </a:avLst>
           </a:prstGeom>
-          <a:solidFill>
-            <a:srgbClr val="2E4FD6"/>
-          </a:solidFill>
           <a:ln w="15875">
             <a:solidFill>
               <a:srgbClr val="FFFFFF"/>
@@ -3792,8 +3902,8 @@
         </p:nvSpPr>
         <p:spPr>
           <a:xfrm>
-            <a:off x="3749040" y="1929384"/>
-            <a:ext cx="2103120" cy="879653"/>
+            <a:off x="2723998" y="1929384"/>
+            <a:ext cx="1874520" cy="879653"/>
           </a:xfrm>
           <a:prstGeom prst="rect">
             <a:avLst/>
@@ -3807,7 +3917,7 @@
           </a:bodyPr>
           <a:lstStyle/>
           <a:p>
-            <a:pPr indent="0" marL="0">
+            <a:pPr algn="l" indent="0" marL="0">
               <a:buNone/>
             </a:pPr>
             <a:r>
@@ -3833,15 +3943,137 @@
         </p:nvSpPr>
         <p:spPr>
           <a:xfrm>
-            <a:off x="3739896" y="2186330"/>
-            <a:ext cx="4626864" cy="365760"/>
-          </a:xfrm>
-          <a:prstGeom prst="rect">
-            <a:avLst/>
-          </a:prstGeom>
-          <a:solidFill>
-            <a:srgbClr val="1226AA"/>
-          </a:solidFill>
+            <a:off x="4708246" y="2186330"/>
+            <a:ext cx="3977640" cy="82296"/>
+          </a:xfrm>
+          <a:prstGeom prst="rect">
+            <a:avLst/>
+          </a:prstGeom>
+          <a:solidFill>
+            <a:srgbClr val="4E7BE8"/>
+          </a:solidFill>
+          <a:ln w="12700">
+            <a:solidFill>
+              <a:srgbClr val="4E7BE8"/>
+            </a:solidFill>
+            <a:prstDash val="solid"/>
+          </a:ln>
+        </p:spPr>
+      </p:sp>
+      <p:sp>
+        <p:nvSpPr>
+          <p:cNvPr id="14" name="Shape 8"/>
+          <p:cNvSpPr/>
+          <p:nvPr/>
+        </p:nvSpPr>
+        <p:spPr>
+          <a:xfrm>
+            <a:off x="4708246" y="2259482"/>
+            <a:ext cx="3977640" cy="82296"/>
+          </a:xfrm>
+          <a:prstGeom prst="rect">
+            <a:avLst/>
+          </a:prstGeom>
+          <a:solidFill>
+            <a:srgbClr val="3D68DF"/>
+          </a:solidFill>
+          <a:ln w="12700">
+            <a:solidFill>
+              <a:srgbClr val="3D68DF"/>
+            </a:solidFill>
+            <a:prstDash val="solid"/>
+          </a:ln>
+        </p:spPr>
+      </p:sp>
+      <p:sp>
+        <p:nvSpPr>
+          <p:cNvPr id="15" name="Shape 9"/>
+          <p:cNvSpPr/>
+          <p:nvPr/>
+        </p:nvSpPr>
+        <p:spPr>
+          <a:xfrm>
+            <a:off x="4708246" y="2332634"/>
+            <a:ext cx="3977640" cy="82296"/>
+          </a:xfrm>
+          <a:prstGeom prst="rect">
+            <a:avLst/>
+          </a:prstGeom>
+          <a:solidFill>
+            <a:srgbClr val="2E56D4"/>
+          </a:solidFill>
+          <a:ln w="12700">
+            <a:solidFill>
+              <a:srgbClr val="2E56D4"/>
+            </a:solidFill>
+            <a:prstDash val="solid"/>
+          </a:ln>
+        </p:spPr>
+      </p:sp>
+      <p:sp>
+        <p:nvSpPr>
+          <p:cNvPr id="16" name="Shape 10"/>
+          <p:cNvSpPr/>
+          <p:nvPr/>
+        </p:nvSpPr>
+        <p:spPr>
+          <a:xfrm>
+            <a:off x="4708246" y="2405786"/>
+            <a:ext cx="3977640" cy="82296"/>
+          </a:xfrm>
+          <a:prstGeom prst="rect">
+            <a:avLst/>
+          </a:prstGeom>
+          <a:solidFill>
+            <a:srgbClr val="2348C4"/>
+          </a:solidFill>
+          <a:ln w="12700">
+            <a:solidFill>
+              <a:srgbClr val="2348C4"/>
+            </a:solidFill>
+            <a:prstDash val="solid"/>
+          </a:ln>
+        </p:spPr>
+      </p:sp>
+      <p:sp>
+        <p:nvSpPr>
+          <p:cNvPr id="17" name="Shape 11"/>
+          <p:cNvSpPr/>
+          <p:nvPr/>
+        </p:nvSpPr>
+        <p:spPr>
+          <a:xfrm>
+            <a:off x="4708246" y="2478938"/>
+            <a:ext cx="3977640" cy="82296"/>
+          </a:xfrm>
+          <a:prstGeom prst="rect">
+            <a:avLst/>
+          </a:prstGeom>
+          <a:solidFill>
+            <a:srgbClr val="1B3AAE"/>
+          </a:solidFill>
+          <a:ln w="12700">
+            <a:solidFill>
+              <a:srgbClr val="1B3AAE"/>
+            </a:solidFill>
+            <a:prstDash val="solid"/>
+          </a:ln>
+        </p:spPr>
+      </p:sp>
+      <p:sp>
+        <p:nvSpPr>
+          <p:cNvPr id="18" name="Shape 12"/>
+          <p:cNvSpPr/>
+          <p:nvPr/>
+        </p:nvSpPr>
+        <p:spPr>
+          <a:xfrm>
+            <a:off x="4708246" y="2186330"/>
+            <a:ext cx="3977640" cy="365760"/>
+          </a:xfrm>
+          <a:prstGeom prst="rect">
+            <a:avLst/>
+          </a:prstGeom>
           <a:ln w="12700">
             <a:solidFill>
               <a:srgbClr val="FFFFFF"/>
@@ -3852,14 +4084,14 @@
       </p:sp>
       <p:sp>
         <p:nvSpPr>
-          <p:cNvPr id="14" name="Text 8"/>
-          <p:cNvSpPr/>
-          <p:nvPr/>
-        </p:nvSpPr>
-        <p:spPr>
-          <a:xfrm>
-            <a:off x="3739896" y="2186330"/>
-            <a:ext cx="4535424" cy="365760"/>
+          <p:cNvPr id="19" name="Text 13"/>
+          <p:cNvSpPr/>
+          <p:nvPr/>
+        </p:nvSpPr>
+        <p:spPr>
+          <a:xfrm>
+            <a:off x="4708246" y="2186330"/>
+            <a:ext cx="3886200" cy="365760"/>
           </a:xfrm>
           <a:prstGeom prst="rect">
             <a:avLst/>
@@ -3891,14 +4123,14 @@
       </p:sp>
       <p:sp>
         <p:nvSpPr>
-          <p:cNvPr id="15" name="Shape 9"/>
-          <p:cNvSpPr/>
-          <p:nvPr/>
-        </p:nvSpPr>
-        <p:spPr>
-          <a:xfrm>
-            <a:off x="8942832" y="2131466"/>
-            <a:ext cx="1207008" cy="475488"/>
+          <p:cNvPr id="20" name="Shape 14"/>
+          <p:cNvSpPr/>
+          <p:nvPr/>
+        </p:nvSpPr>
+        <p:spPr>
+          <a:xfrm>
+            <a:off x="8813902" y="2131466"/>
+            <a:ext cx="1188720" cy="475488"/>
           </a:xfrm>
           <a:prstGeom prst="roundRect">
             <a:avLst>
@@ -3918,14 +4150,14 @@
       </p:sp>
       <p:sp>
         <p:nvSpPr>
-          <p:cNvPr id="16" name="Text 10"/>
-          <p:cNvSpPr/>
-          <p:nvPr/>
-        </p:nvSpPr>
-        <p:spPr>
-          <a:xfrm>
-            <a:off x="8942832" y="2131466"/>
-            <a:ext cx="1207008" cy="475488"/>
+          <p:cNvPr id="21" name="Text 15"/>
+          <p:cNvSpPr/>
+          <p:nvPr/>
+        </p:nvSpPr>
+        <p:spPr>
+          <a:xfrm>
+            <a:off x="8813902" y="2131466"/>
+            <a:ext cx="1188720" cy="475488"/>
           </a:xfrm>
           <a:prstGeom prst="rect">
             <a:avLst/>
@@ -3959,7 +4191,7 @@
       </p:sp>
       <p:sp>
         <p:nvSpPr>
-          <p:cNvPr id="17" name="Shape 11"/>
+          <p:cNvPr id="22" name="Shape 16"/>
           <p:cNvSpPr/>
           <p:nvPr/>
         </p:nvSpPr>
@@ -3973,9 +4205,6 @@
               <a:gd name="adj" fmla="val 18711"/>
             </a:avLst>
           </a:prstGeom>
-          <a:solidFill>
-            <a:srgbClr val="2E4FD6"/>
-          </a:solidFill>
           <a:ln w="15875">
             <a:solidFill>
               <a:srgbClr val="FFFFFF"/>
@@ -3986,7 +4215,7 @@
       </p:sp>
       <p:pic>
         <p:nvPicPr>
-          <p:cNvPr id="18" name="Image 4" descr="preencoded.png">    </p:cNvPr>
+          <p:cNvPr id="23" name="Image 4" descr="preencoded.png">    </p:cNvPr>
           <p:cNvPicPr>
             <a:picLocks noChangeAspect="1"/>
           </p:cNvPicPr>
@@ -4010,14 +4239,14 @@
       </p:pic>
       <p:sp>
         <p:nvSpPr>
-          <p:cNvPr id="19" name="Text 12"/>
-          <p:cNvSpPr/>
-          <p:nvPr/>
-        </p:nvSpPr>
-        <p:spPr>
-          <a:xfrm>
-            <a:off x="3749040" y="2809037"/>
-            <a:ext cx="2103120" cy="879653"/>
+          <p:cNvPr id="24" name="Text 17"/>
+          <p:cNvSpPr/>
+          <p:nvPr/>
+        </p:nvSpPr>
+        <p:spPr>
+          <a:xfrm>
+            <a:off x="2723998" y="2809037"/>
+            <a:ext cx="1874520" cy="879653"/>
           </a:xfrm>
           <a:prstGeom prst="rect">
             <a:avLst/>
@@ -4031,7 +4260,7 @@
           </a:bodyPr>
           <a:lstStyle/>
           <a:p>
-            <a:pPr indent="0" marL="0">
+            <a:pPr algn="l" indent="0" marL="0">
               <a:buNone/>
             </a:pPr>
             <a:r>
@@ -4051,21 +4280,143 @@
       </p:sp>
       <p:sp>
         <p:nvSpPr>
-          <p:cNvPr id="20" name="Shape 13"/>
-          <p:cNvSpPr/>
-          <p:nvPr/>
-        </p:nvSpPr>
-        <p:spPr>
-          <a:xfrm>
-            <a:off x="3739896" y="3065983"/>
-            <a:ext cx="4626864" cy="365760"/>
-          </a:xfrm>
-          <a:prstGeom prst="rect">
-            <a:avLst/>
-          </a:prstGeom>
-          <a:solidFill>
-            <a:srgbClr val="1226AA"/>
-          </a:solidFill>
+          <p:cNvPr id="25" name="Shape 18"/>
+          <p:cNvSpPr/>
+          <p:nvPr/>
+        </p:nvSpPr>
+        <p:spPr>
+          <a:xfrm>
+            <a:off x="4708246" y="3065983"/>
+            <a:ext cx="3977640" cy="82296"/>
+          </a:xfrm>
+          <a:prstGeom prst="rect">
+            <a:avLst/>
+          </a:prstGeom>
+          <a:solidFill>
+            <a:srgbClr val="4E7BE8"/>
+          </a:solidFill>
+          <a:ln w="12700">
+            <a:solidFill>
+              <a:srgbClr val="4E7BE8"/>
+            </a:solidFill>
+            <a:prstDash val="solid"/>
+          </a:ln>
+        </p:spPr>
+      </p:sp>
+      <p:sp>
+        <p:nvSpPr>
+          <p:cNvPr id="26" name="Shape 19"/>
+          <p:cNvSpPr/>
+          <p:nvPr/>
+        </p:nvSpPr>
+        <p:spPr>
+          <a:xfrm>
+            <a:off x="4708246" y="3139135"/>
+            <a:ext cx="3977640" cy="82296"/>
+          </a:xfrm>
+          <a:prstGeom prst="rect">
+            <a:avLst/>
+          </a:prstGeom>
+          <a:solidFill>
+            <a:srgbClr val="3D68DF"/>
+          </a:solidFill>
+          <a:ln w="12700">
+            <a:solidFill>
+              <a:srgbClr val="3D68DF"/>
+            </a:solidFill>
+            <a:prstDash val="solid"/>
+          </a:ln>
+        </p:spPr>
+      </p:sp>
+      <p:sp>
+        <p:nvSpPr>
+          <p:cNvPr id="27" name="Shape 20"/>
+          <p:cNvSpPr/>
+          <p:nvPr/>
+        </p:nvSpPr>
+        <p:spPr>
+          <a:xfrm>
+            <a:off x="4708246" y="3212287"/>
+            <a:ext cx="3977640" cy="82296"/>
+          </a:xfrm>
+          <a:prstGeom prst="rect">
+            <a:avLst/>
+          </a:prstGeom>
+          <a:solidFill>
+            <a:srgbClr val="2E56D4"/>
+          </a:solidFill>
+          <a:ln w="12700">
+            <a:solidFill>
+              <a:srgbClr val="2E56D4"/>
+            </a:solidFill>
+            <a:prstDash val="solid"/>
+          </a:ln>
+        </p:spPr>
+      </p:sp>
+      <p:sp>
+        <p:nvSpPr>
+          <p:cNvPr id="28" name="Shape 21"/>
+          <p:cNvSpPr/>
+          <p:nvPr/>
+        </p:nvSpPr>
+        <p:spPr>
+          <a:xfrm>
+            <a:off x="4708246" y="3285439"/>
+            <a:ext cx="3977640" cy="82296"/>
+          </a:xfrm>
+          <a:prstGeom prst="rect">
+            <a:avLst/>
+          </a:prstGeom>
+          <a:solidFill>
+            <a:srgbClr val="2348C4"/>
+          </a:solidFill>
+          <a:ln w="12700">
+            <a:solidFill>
+              <a:srgbClr val="2348C4"/>
+            </a:solidFill>
+            <a:prstDash val="solid"/>
+          </a:ln>
+        </p:spPr>
+      </p:sp>
+      <p:sp>
+        <p:nvSpPr>
+          <p:cNvPr id="29" name="Shape 22"/>
+          <p:cNvSpPr/>
+          <p:nvPr/>
+        </p:nvSpPr>
+        <p:spPr>
+          <a:xfrm>
+            <a:off x="4708246" y="3358591"/>
+            <a:ext cx="3977640" cy="82296"/>
+          </a:xfrm>
+          <a:prstGeom prst="rect">
+            <a:avLst/>
+          </a:prstGeom>
+          <a:solidFill>
+            <a:srgbClr val="1B3AAE"/>
+          </a:solidFill>
+          <a:ln w="12700">
+            <a:solidFill>
+              <a:srgbClr val="1B3AAE"/>
+            </a:solidFill>
+            <a:prstDash val="solid"/>
+          </a:ln>
+        </p:spPr>
+      </p:sp>
+      <p:sp>
+        <p:nvSpPr>
+          <p:cNvPr id="30" name="Shape 23"/>
+          <p:cNvSpPr/>
+          <p:nvPr/>
+        </p:nvSpPr>
+        <p:spPr>
+          <a:xfrm>
+            <a:off x="4708246" y="3065983"/>
+            <a:ext cx="3977640" cy="365760"/>
+          </a:xfrm>
+          <a:prstGeom prst="rect">
+            <a:avLst/>
+          </a:prstGeom>
           <a:ln w="12700">
             <a:solidFill>
               <a:srgbClr val="FFFFFF"/>
@@ -4076,14 +4427,14 @@
       </p:sp>
       <p:sp>
         <p:nvSpPr>
-          <p:cNvPr id="21" name="Text 14"/>
-          <p:cNvSpPr/>
-          <p:nvPr/>
-        </p:nvSpPr>
-        <p:spPr>
-          <a:xfrm>
-            <a:off x="3739896" y="3065983"/>
-            <a:ext cx="4535424" cy="365760"/>
+          <p:cNvPr id="31" name="Text 24"/>
+          <p:cNvSpPr/>
+          <p:nvPr/>
+        </p:nvSpPr>
+        <p:spPr>
+          <a:xfrm>
+            <a:off x="4708246" y="3065983"/>
+            <a:ext cx="3886200" cy="365760"/>
           </a:xfrm>
           <a:prstGeom prst="rect">
             <a:avLst/>
@@ -4115,14 +4466,14 @@
       </p:sp>
       <p:sp>
         <p:nvSpPr>
-          <p:cNvPr id="22" name="Shape 15"/>
-          <p:cNvSpPr/>
-          <p:nvPr/>
-        </p:nvSpPr>
-        <p:spPr>
-          <a:xfrm>
-            <a:off x="8942832" y="3011119"/>
-            <a:ext cx="1207008" cy="475488"/>
+          <p:cNvPr id="32" name="Shape 25"/>
+          <p:cNvSpPr/>
+          <p:nvPr/>
+        </p:nvSpPr>
+        <p:spPr>
+          <a:xfrm>
+            <a:off x="8813902" y="3011119"/>
+            <a:ext cx="1188720" cy="475488"/>
           </a:xfrm>
           <a:prstGeom prst="roundRect">
             <a:avLst>
@@ -4142,14 +4493,14 @@
       </p:sp>
       <p:sp>
         <p:nvSpPr>
-          <p:cNvPr id="23" name="Text 16"/>
-          <p:cNvSpPr/>
-          <p:nvPr/>
-        </p:nvSpPr>
-        <p:spPr>
-          <a:xfrm>
-            <a:off x="8942832" y="3011119"/>
-            <a:ext cx="1207008" cy="475488"/>
+          <p:cNvPr id="33" name="Text 26"/>
+          <p:cNvSpPr/>
+          <p:nvPr/>
+        </p:nvSpPr>
+        <p:spPr>
+          <a:xfrm>
+            <a:off x="8813902" y="3011119"/>
+            <a:ext cx="1188720" cy="475488"/>
           </a:xfrm>
           <a:prstGeom prst="rect">
             <a:avLst/>
@@ -4183,18 +4534,18 @@
       </p:sp>
       <p:sp>
         <p:nvSpPr>
-          <p:cNvPr id="24" name="Shape 17"/>
-          <p:cNvSpPr/>
-          <p:nvPr/>
-        </p:nvSpPr>
-        <p:spPr>
-          <a:xfrm>
-            <a:off x="2832811" y="5922569"/>
-            <a:ext cx="6273698" cy="905256"/>
+          <p:cNvPr id="34" name="Shape 27"/>
+          <p:cNvSpPr/>
+          <p:nvPr/>
+        </p:nvSpPr>
+        <p:spPr>
+          <a:xfrm>
+            <a:off x="2606040" y="5605272"/>
+            <a:ext cx="6273698" cy="658368"/>
           </a:xfrm>
           <a:prstGeom prst="roundRect">
             <a:avLst>
-              <a:gd name="adj" fmla="val 6061"/>
+              <a:gd name="adj" fmla="val 8333"/>
             </a:avLst>
           </a:prstGeom>
           <a:solidFill>
@@ -4210,26 +4561,23 @@
       </p:sp>
       <p:sp>
         <p:nvSpPr>
-          <p:cNvPr id="25" name="Shape 18"/>
-          <p:cNvSpPr/>
-          <p:nvPr/>
-        </p:nvSpPr>
-        <p:spPr>
-          <a:xfrm>
-            <a:off x="5100980" y="5748833"/>
-            <a:ext cx="1737360" cy="274320"/>
+          <p:cNvPr id="35" name="Shape 28"/>
+          <p:cNvSpPr/>
+          <p:nvPr/>
+        </p:nvSpPr>
+        <p:spPr>
+          <a:xfrm>
+            <a:off x="4754880" y="5358384"/>
+            <a:ext cx="1828800" cy="310896"/>
           </a:xfrm>
           <a:prstGeom prst="roundRect">
             <a:avLst>
-              <a:gd name="adj" fmla="val 33333"/>
+              <a:gd name="adj" fmla="val 52941"/>
             </a:avLst>
           </a:prstGeom>
-          <a:solidFill>
-            <a:srgbClr val="2E4FD6"/>
-          </a:solidFill>
           <a:ln w="12700">
             <a:solidFill>
-              <a:srgbClr val="2E4FD6"/>
+              <a:srgbClr val="FFFFFF"/>
             </a:solidFill>
             <a:prstDash val="solid"/>
           </a:ln>
@@ -4237,14 +4585,14 @@
       </p:sp>
       <p:sp>
         <p:nvSpPr>
-          <p:cNvPr id="26" name="Text 19"/>
-          <p:cNvSpPr/>
-          <p:nvPr/>
-        </p:nvSpPr>
-        <p:spPr>
-          <a:xfrm>
-            <a:off x="5100980" y="5748833"/>
-            <a:ext cx="1737360" cy="274320"/>
+          <p:cNvPr id="36" name="Text 29"/>
+          <p:cNvSpPr/>
+          <p:nvPr/>
+        </p:nvSpPr>
+        <p:spPr>
+          <a:xfrm>
+            <a:off x="4754880" y="5385816"/>
+            <a:ext cx="1828800" cy="228600"/>
           </a:xfrm>
           <a:prstGeom prst="rect">
             <a:avLst/>
@@ -4276,14 +4624,14 @@
       </p:sp>
       <p:sp>
         <p:nvSpPr>
-          <p:cNvPr id="27" name="Shape 20"/>
-          <p:cNvSpPr/>
-          <p:nvPr/>
-        </p:nvSpPr>
-        <p:spPr>
-          <a:xfrm>
-            <a:off x="2924251" y="6196889"/>
-            <a:ext cx="118872" cy="118872"/>
+          <p:cNvPr id="37" name="Shape 30"/>
+          <p:cNvSpPr/>
+          <p:nvPr/>
+        </p:nvSpPr>
+        <p:spPr>
+          <a:xfrm>
+            <a:off x="2770632" y="5806440"/>
+            <a:ext cx="109728" cy="109728"/>
           </a:xfrm>
           <a:prstGeom prst="ellipse">
             <a:avLst/>
@@ -4301,14 +4649,14 @@
       </p:sp>
       <p:sp>
         <p:nvSpPr>
-          <p:cNvPr id="28" name="Text 21"/>
-          <p:cNvSpPr/>
-          <p:nvPr/>
-        </p:nvSpPr>
-        <p:spPr>
-          <a:xfrm>
-            <a:off x="3070555" y="6105449"/>
-            <a:ext cx="1053572" cy="219456"/>
+          <p:cNvPr id="38" name="Text 31"/>
+          <p:cNvSpPr/>
+          <p:nvPr/>
+        </p:nvSpPr>
+        <p:spPr>
+          <a:xfrm>
+            <a:off x="2919679" y="5749747"/>
+            <a:ext cx="777240" cy="245974"/>
           </a:xfrm>
           <a:prstGeom prst="rect">
             <a:avLst/>
@@ -4342,14 +4690,14 @@
       </p:sp>
       <p:sp>
         <p:nvSpPr>
-          <p:cNvPr id="29" name="Text 22"/>
-          <p:cNvSpPr/>
-          <p:nvPr/>
-        </p:nvSpPr>
-        <p:spPr>
-          <a:xfrm>
-            <a:off x="3070555" y="6324905"/>
-            <a:ext cx="1053572" cy="237744"/>
+          <p:cNvPr id="39" name="Text 32"/>
+          <p:cNvSpPr/>
+          <p:nvPr/>
+        </p:nvSpPr>
+        <p:spPr>
+          <a:xfrm>
+            <a:off x="2926080" y="5934456"/>
+            <a:ext cx="960120" cy="164592"/>
           </a:xfrm>
           <a:prstGeom prst="rect">
             <a:avLst/>
@@ -4383,14 +4731,14 @@
       </p:sp>
       <p:sp>
         <p:nvSpPr>
-          <p:cNvPr id="30" name="Shape 23"/>
-          <p:cNvSpPr/>
-          <p:nvPr/>
-        </p:nvSpPr>
-        <p:spPr>
-          <a:xfrm>
-            <a:off x="4178991" y="6196889"/>
-            <a:ext cx="118872" cy="118872"/>
+          <p:cNvPr id="40" name="Shape 33"/>
+          <p:cNvSpPr/>
+          <p:nvPr/>
+        </p:nvSpPr>
+        <p:spPr>
+          <a:xfrm>
+            <a:off x="4078224" y="5806440"/>
+            <a:ext cx="109728" cy="109728"/>
           </a:xfrm>
           <a:prstGeom prst="ellipse">
             <a:avLst/>
@@ -4408,14 +4756,14 @@
       </p:sp>
       <p:sp>
         <p:nvSpPr>
-          <p:cNvPr id="31" name="Text 24"/>
-          <p:cNvSpPr/>
-          <p:nvPr/>
-        </p:nvSpPr>
-        <p:spPr>
-          <a:xfrm>
-            <a:off x="4325295" y="6105449"/>
-            <a:ext cx="1053572" cy="219456"/>
+          <p:cNvPr id="41" name="Text 34"/>
+          <p:cNvSpPr/>
+          <p:nvPr/>
+        </p:nvSpPr>
+        <p:spPr>
+          <a:xfrm>
+            <a:off x="4227271" y="5749747"/>
+            <a:ext cx="777240" cy="245974"/>
           </a:xfrm>
           <a:prstGeom prst="rect">
             <a:avLst/>
@@ -4449,14 +4797,14 @@
       </p:sp>
       <p:sp>
         <p:nvSpPr>
-          <p:cNvPr id="32" name="Text 25"/>
-          <p:cNvSpPr/>
-          <p:nvPr/>
-        </p:nvSpPr>
-        <p:spPr>
-          <a:xfrm>
-            <a:off x="4325295" y="6324905"/>
-            <a:ext cx="1053572" cy="237744"/>
+          <p:cNvPr id="42" name="Text 35"/>
+          <p:cNvSpPr/>
+          <p:nvPr/>
+        </p:nvSpPr>
+        <p:spPr>
+          <a:xfrm>
+            <a:off x="4233672" y="5934456"/>
+            <a:ext cx="960120" cy="164592"/>
           </a:xfrm>
           <a:prstGeom prst="rect">
             <a:avLst/>
@@ -4490,14 +4838,14 @@
       </p:sp>
       <p:sp>
         <p:nvSpPr>
-          <p:cNvPr id="33" name="Shape 26"/>
-          <p:cNvSpPr/>
-          <p:nvPr/>
-        </p:nvSpPr>
-        <p:spPr>
-          <a:xfrm>
-            <a:off x="5433731" y="6196889"/>
-            <a:ext cx="118872" cy="118872"/>
+          <p:cNvPr id="43" name="Shape 36"/>
+          <p:cNvSpPr/>
+          <p:nvPr/>
+        </p:nvSpPr>
+        <p:spPr>
+          <a:xfrm>
+            <a:off x="5437022" y="5806440"/>
+            <a:ext cx="109728" cy="109728"/>
           </a:xfrm>
           <a:prstGeom prst="ellipse">
             <a:avLst/>
@@ -4515,14 +4863,14 @@
       </p:sp>
       <p:sp>
         <p:nvSpPr>
-          <p:cNvPr id="34" name="Text 27"/>
-          <p:cNvSpPr/>
-          <p:nvPr/>
-        </p:nvSpPr>
-        <p:spPr>
-          <a:xfrm>
-            <a:off x="5580035" y="6105449"/>
-            <a:ext cx="1053572" cy="219456"/>
+          <p:cNvPr id="44" name="Text 37"/>
+          <p:cNvSpPr/>
+          <p:nvPr/>
+        </p:nvSpPr>
+        <p:spPr>
+          <a:xfrm>
+            <a:off x="5586070" y="5749747"/>
+            <a:ext cx="777240" cy="245974"/>
           </a:xfrm>
           <a:prstGeom prst="rect">
             <a:avLst/>
@@ -4556,14 +4904,14 @@
       </p:sp>
       <p:sp>
         <p:nvSpPr>
-          <p:cNvPr id="35" name="Text 28"/>
-          <p:cNvSpPr/>
-          <p:nvPr/>
-        </p:nvSpPr>
-        <p:spPr>
-          <a:xfrm>
-            <a:off x="5580035" y="6324905"/>
-            <a:ext cx="1053572" cy="237744"/>
+          <p:cNvPr id="45" name="Text 38"/>
+          <p:cNvSpPr/>
+          <p:nvPr/>
+        </p:nvSpPr>
+        <p:spPr>
+          <a:xfrm>
+            <a:off x="5592470" y="5934456"/>
+            <a:ext cx="960120" cy="164592"/>
           </a:xfrm>
           <a:prstGeom prst="rect">
             <a:avLst/>
@@ -4597,14 +4945,14 @@
       </p:sp>
       <p:sp>
         <p:nvSpPr>
-          <p:cNvPr id="36" name="Shape 29"/>
-          <p:cNvSpPr/>
-          <p:nvPr/>
-        </p:nvSpPr>
-        <p:spPr>
-          <a:xfrm>
-            <a:off x="6688470" y="6196889"/>
-            <a:ext cx="118872" cy="118872"/>
+          <p:cNvPr id="46" name="Shape 39"/>
+          <p:cNvSpPr/>
+          <p:nvPr/>
+        </p:nvSpPr>
+        <p:spPr>
+          <a:xfrm>
+            <a:off x="6765646" y="5806440"/>
+            <a:ext cx="109728" cy="109728"/>
           </a:xfrm>
           <a:prstGeom prst="ellipse">
             <a:avLst/>
@@ -4622,14 +4970,14 @@
       </p:sp>
       <p:sp>
         <p:nvSpPr>
-          <p:cNvPr id="37" name="Text 30"/>
-          <p:cNvSpPr/>
-          <p:nvPr/>
-        </p:nvSpPr>
-        <p:spPr>
-          <a:xfrm>
-            <a:off x="6834774" y="6105449"/>
-            <a:ext cx="1053572" cy="219456"/>
+          <p:cNvPr id="47" name="Text 40"/>
+          <p:cNvSpPr/>
+          <p:nvPr/>
+        </p:nvSpPr>
+        <p:spPr>
+          <a:xfrm>
+            <a:off x="6914693" y="5749747"/>
+            <a:ext cx="777240" cy="245974"/>
           </a:xfrm>
           <a:prstGeom prst="rect">
             <a:avLst/>
@@ -4663,14 +5011,14 @@
       </p:sp>
       <p:sp>
         <p:nvSpPr>
-          <p:cNvPr id="38" name="Text 31"/>
-          <p:cNvSpPr/>
-          <p:nvPr/>
-        </p:nvSpPr>
-        <p:spPr>
-          <a:xfrm>
-            <a:off x="6834774" y="6324905"/>
-            <a:ext cx="1053572" cy="237744"/>
+          <p:cNvPr id="48" name="Text 41"/>
+          <p:cNvSpPr/>
+          <p:nvPr/>
+        </p:nvSpPr>
+        <p:spPr>
+          <a:xfrm>
+            <a:off x="6921094" y="5934456"/>
+            <a:ext cx="960120" cy="164592"/>
           </a:xfrm>
           <a:prstGeom prst="rect">
             <a:avLst/>
@@ -4704,14 +5052,14 @@
       </p:sp>
       <p:sp>
         <p:nvSpPr>
-          <p:cNvPr id="39" name="Shape 32"/>
-          <p:cNvSpPr/>
-          <p:nvPr/>
-        </p:nvSpPr>
-        <p:spPr>
-          <a:xfrm>
-            <a:off x="7943210" y="6196889"/>
-            <a:ext cx="118872" cy="118872"/>
+          <p:cNvPr id="49" name="Shape 42"/>
+          <p:cNvSpPr/>
+          <p:nvPr/>
+        </p:nvSpPr>
+        <p:spPr>
+          <a:xfrm>
+            <a:off x="8108899" y="5806440"/>
+            <a:ext cx="109728" cy="109728"/>
           </a:xfrm>
           <a:prstGeom prst="ellipse">
             <a:avLst/>
@@ -4729,14 +5077,14 @@
       </p:sp>
       <p:sp>
         <p:nvSpPr>
-          <p:cNvPr id="40" name="Text 33"/>
-          <p:cNvSpPr/>
-          <p:nvPr/>
-        </p:nvSpPr>
-        <p:spPr>
-          <a:xfrm>
-            <a:off x="8089514" y="6105449"/>
-            <a:ext cx="1053572" cy="219456"/>
+          <p:cNvPr id="50" name="Text 43"/>
+          <p:cNvSpPr/>
+          <p:nvPr/>
+        </p:nvSpPr>
+        <p:spPr>
+          <a:xfrm>
+            <a:off x="8257946" y="5749747"/>
+            <a:ext cx="777240" cy="245974"/>
           </a:xfrm>
           <a:prstGeom prst="rect">
             <a:avLst/>
@@ -4770,14 +5118,14 @@
       </p:sp>
       <p:sp>
         <p:nvSpPr>
-          <p:cNvPr id="41" name="Text 34"/>
-          <p:cNvSpPr/>
-          <p:nvPr/>
-        </p:nvSpPr>
-        <p:spPr>
-          <a:xfrm>
-            <a:off x="8089514" y="6324905"/>
-            <a:ext cx="1053572" cy="237744"/>
+          <p:cNvPr id="51" name="Text 44"/>
+          <p:cNvSpPr/>
+          <p:nvPr/>
+        </p:nvSpPr>
+        <p:spPr>
+          <a:xfrm>
+            <a:off x="8264347" y="5934456"/>
+            <a:ext cx="960120" cy="164592"/>
           </a:xfrm>
           <a:prstGeom prst="rect">
             <a:avLst/>
